--- a/docs/presentations/Slide_Bao_Cao_He_Thong_Dat_Lich_Salon_Spa.pptx
+++ b/docs/presentations/Slide_Bao_Cao_He_Thong_Dat_Lich_Salon_Spa.pptx
@@ -18,6 +18,8 @@
     <p:sldId id="266" r:id="rId18"/>
     <p:sldId id="267" r:id="rId19"/>
     <p:sldId id="268" r:id="rId20"/>
+    <p:sldId id="269" r:id="rId21"/>
+    <p:sldId id="270" r:id="rId22"/>
   </p:sldIdLst>
   <p:sldSz cx="12191695" cy="6858000" type="screen4x3"/>
   <p:notesSz cx="6858000" cy="9144000"/>
@@ -762,7 +764,7 @@
           <a:lstStyle/>
           <a:p>
             <a:r>
-              <a:t>Mục tiêu: sao chép dự án sang bất kỳ máy nào, bật Docker Desktop, nhấp đúp run_project.bat. Launcher kiểm tra Node, dựng Docker, tạo .env, cài gói khi lockfile đổi, nạp dữ liệu an toàn, rồi bộ giám sát chạy API và giao diện. Bản v1.2.5 xử lý lỗi Windows 3221226505: dịch vụ sập được tự khởi động lại, Ctrl+C dừng sạch cả cây tiến trình. SSE phát sau commit; TypeORM migration có phiên bản và rollback bước lỗi. update_project.bat build bản mới, sao lưu trước migration, healthcheck; lỗi bật lại bản build cũ, giữ migration đã hoàn tất tương thích. Máy vận hành không seed dữ liệu mẫu.</a:t>
+              <a:t>Mục tiêu: sao chép dự án sang bất kỳ máy nào, bật Docker Desktop, nhấp đúp HoYoSalon.bat và bấm BẮT ĐẦU. Launcher kiểm tra Node, dựng Docker, tạo .env, cài gói khi lockfile đổi, nạp dữ liệu an toàn, rồi bộ giám sát chạy API và giao diện. Bản v1.2.5 xử lý lỗi Windows 3221226505: dịch vụ sập được tự khởi động lại, Ctrl+C dừng sạch cả cây tiến trình. SSE phát sau commit; TypeORM migration có phiên bản và rollback bước lỗi. Nút CẬP NHẬT build bản mới, sao lưu trước migration, healthcheck; lỗi bật lại bản build cũ, giữ migration đã hoàn tất tương thích. Máy vận hành không seed dữ liệu mẫu.</a:t>
             </a:r>
           </a:p>
         </p:txBody>
@@ -832,7 +834,7 @@
           <a:lstStyle/>
           <a:p>
             <a:r>
-              <a:t>Kiểm định 06/10/2026: 139 unit test, 83 E2E trong 12 bộ, 4 test Demo đạt. Build và lint sạch. 39 story / 165 point đối chiếu Excel gốc và BACKLOG-MAPPING; test tự động không thay thế biên bản nghiệm thu thủ công của PO.</a:t>
+              <a:t>Từ v1.4.0 mọi thao tác vận hành gom về một cửa sổ. Người không biết lập trình chỉ cần nhấp đúp HoYoSalon.bat và bấm BẮT ĐẦU. Khi có phiên bản mới trên GitHub, nút đổi thành CẬP NHẬT. Bảng Thông tin &amp; Chẩn đoán giúp xem log, xuất gói nhật ký và sao chép cấu hình máy để gửi hỗ trợ kỹ thuật.</a:t>
             </a:r>
           </a:p>
         </p:txBody>
@@ -902,7 +904,7 @@
           <a:lstStyle/>
           <a:p>
             <a:r>
-              <a:t>Chuẩn bị: chạy run_project.bat, mở sẵn giao diện 5173, Maildev 1080, Swagger và một cửa sổ ẩn danh. Bước 1 bạn đóng vai khách đặt lịch. Bước 2 chạy kiểm thử đồng thời. Bước 3 lễ tân xác nhận, vãng lai, check-in. Bước 4 thợ hoàn tất và ghi chú. Bước 5 lễ tân lập phiếu với mã giảm giá. Bước 6 chủ tiệm xem doanh thu, quản trị xem nhật ký. Chi tiết trong docs/DEMO-SCRIPT.md.</a:t>
+              <a:t>Mỗi góp ý của Mentor được làm trên một nhánh feature/fix/docs riêng, có kiểm thử tự động và hợp nhất vào develop. Điểm nhấn: giữ chỗ 10 phút (10 khách tranh một khung chỉ 1 người giữ được), thợ tự đăng ký ca và quản lý duyệt, cảnh báo khung giờ thiếu thợ, trợ lý xếp lịch và trợ lý sinh ngày lễ bằng âm lịch thiên văn.</a:t>
             </a:r>
           </a:p>
         </p:txBody>
@@ -928,6 +930,146 @@
 </file>
 
 <file path=ppt/notesSlides/notesSlide13.xml><?xml version="1.0" encoding="utf-8"?>
+<p:notes xmlns:a="http://schemas.openxmlformats.org/drawingml/2006/main" xmlns:p="http://schemas.openxmlformats.org/presentationml/2006/main" xmlns:r="http://schemas.openxmlformats.org/officeDocument/2006/relationships">
+  <p:cSld>
+    <p:spTree>
+      <p:nvGrpSpPr>
+        <p:cNvPr id="1" name=""/>
+        <p:cNvGrpSpPr/>
+        <p:nvPr/>
+      </p:nvGrpSpPr>
+      <p:grpSpPr>
+        <a:xfrm>
+          <a:off x="0" y="0"/>
+          <a:ext cx="0" cy="0"/>
+          <a:chOff x="0" y="0"/>
+          <a:chExt cx="0" cy="0"/>
+        </a:xfrm>
+      </p:grpSpPr>
+      <p:sp>
+        <p:nvSpPr>
+          <p:cNvPr id="2" name="Slide Image Placeholder 1"/>
+          <p:cNvSpPr>
+            <a:spLocks noGrp="1"/>
+          </p:cNvSpPr>
+          <p:nvPr>
+            <p:ph type="sldImg" idx="2"/>
+          </p:nvPr>
+        </p:nvSpPr>
+        <p:spPr/>
+      </p:sp>
+      <p:sp>
+        <p:nvSpPr>
+          <p:cNvPr id="3" name="Notes Placeholder 2"/>
+          <p:cNvSpPr>
+            <a:spLocks noGrp="1"/>
+          </p:cNvSpPr>
+          <p:nvPr>
+            <p:ph type="body" idx="3" sz="quarter"/>
+          </p:nvPr>
+        </p:nvSpPr>
+        <p:spPr/>
+        <p:txBody>
+          <a:bodyPr/>
+          <a:lstStyle/>
+          <a:p>
+            <a:r>
+              <a:t>Kiểm định 06/10/2026: 168 unit test, 95 E2E trong 13 bộ, 4 test Demo đạt. Build và lint sạch. 39 story / 165 point đối chiếu Excel gốc và BACKLOG-MAPPING; test tự động không thay thế biên bản nghiệm thu thủ công của PO.</a:t>
+            </a:r>
+          </a:p>
+        </p:txBody>
+      </p:sp>
+      <p:sp>
+        <p:nvSpPr>
+          <p:cNvPr id="4" name="Slide Number Placeholder 3"/>
+          <p:cNvSpPr>
+            <a:spLocks noGrp="1"/>
+          </p:cNvSpPr>
+          <p:nvPr>
+            <p:ph type="sldNum" idx="5" sz="quarter"/>
+          </p:nvPr>
+        </p:nvSpPr>
+        <p:spPr/>
+      </p:sp>
+    </p:spTree>
+  </p:cSld>
+  <p:clrMapOvr>
+    <a:masterClrMapping/>
+  </p:clrMapOvr>
+</p:notes>
+</file>
+
+<file path=ppt/notesSlides/notesSlide14.xml><?xml version="1.0" encoding="utf-8"?>
+<p:notes xmlns:a="http://schemas.openxmlformats.org/drawingml/2006/main" xmlns:p="http://schemas.openxmlformats.org/presentationml/2006/main" xmlns:r="http://schemas.openxmlformats.org/officeDocument/2006/relationships">
+  <p:cSld>
+    <p:spTree>
+      <p:nvGrpSpPr>
+        <p:cNvPr id="1" name=""/>
+        <p:cNvGrpSpPr/>
+        <p:nvPr/>
+      </p:nvGrpSpPr>
+      <p:grpSpPr>
+        <a:xfrm>
+          <a:off x="0" y="0"/>
+          <a:ext cx="0" cy="0"/>
+          <a:chOff x="0" y="0"/>
+          <a:chExt cx="0" cy="0"/>
+        </a:xfrm>
+      </p:grpSpPr>
+      <p:sp>
+        <p:nvSpPr>
+          <p:cNvPr id="2" name="Slide Image Placeholder 1"/>
+          <p:cNvSpPr>
+            <a:spLocks noGrp="1"/>
+          </p:cNvSpPr>
+          <p:nvPr>
+            <p:ph type="sldImg" idx="2"/>
+          </p:nvPr>
+        </p:nvSpPr>
+        <p:spPr/>
+      </p:sp>
+      <p:sp>
+        <p:nvSpPr>
+          <p:cNvPr id="3" name="Notes Placeholder 2"/>
+          <p:cNvSpPr>
+            <a:spLocks noGrp="1"/>
+          </p:cNvSpPr>
+          <p:nvPr>
+            <p:ph type="body" idx="3" sz="quarter"/>
+          </p:nvPr>
+        </p:nvSpPr>
+        <p:spPr/>
+        <p:txBody>
+          <a:bodyPr/>
+          <a:lstStyle/>
+          <a:p>
+            <a:r>
+              <a:t>Chuẩn bị: chạy run_project.bat, mở sẵn giao diện 5173, Maildev 1080, Swagger và một cửa sổ ẩn danh. Bước 1 bạn đóng vai khách đặt lịch. Bước 2 chạy kiểm thử đồng thời. Bước 3 lễ tân xác nhận, vãng lai, check-in. Bước 4 thợ hoàn tất và ghi chú. Bước 5 lễ tân lập phiếu với mã giảm giá. Bước 6 chủ tiệm xem doanh thu, quản trị xem nhật ký. Chi tiết trong docs/DEMO-SCRIPT.md.</a:t>
+            </a:r>
+          </a:p>
+        </p:txBody>
+      </p:sp>
+      <p:sp>
+        <p:nvSpPr>
+          <p:cNvPr id="4" name="Slide Number Placeholder 3"/>
+          <p:cNvSpPr>
+            <a:spLocks noGrp="1"/>
+          </p:cNvSpPr>
+          <p:nvPr>
+            <p:ph type="sldNum" idx="5" sz="quarter"/>
+          </p:nvPr>
+        </p:nvSpPr>
+        <p:spPr/>
+      </p:sp>
+    </p:spTree>
+  </p:cSld>
+  <p:clrMapOvr>
+    <a:masterClrMapping/>
+  </p:clrMapOvr>
+</p:notes>
+</file>
+
+<file path=ppt/notesSlides/notesSlide15.xml><?xml version="1.0" encoding="utf-8"?>
 <p:notes xmlns:a="http://schemas.openxmlformats.org/drawingml/2006/main" xmlns:p="http://schemas.openxmlformats.org/presentationml/2006/main" xmlns:r="http://schemas.openxmlformats.org/officeDocument/2006/relationships">
   <p:cSld>
     <p:spTree>
@@ -7083,7 +7225,7 @@
                 </a:solidFill>
                 <a:latin typeface="Calibri"/>
               </a:rPr>
-              <a:t>start_server.bat / update_project.bat; bootstrap, giữ dữ liệu khách, không nạp seed mẫu.</a:t>
+              <a:t>HoYoSalon.bat → chế độ Máy chủ cửa hàng → BẮT ĐẦU / CẬP NHẬT; giữ dữ liệu khách, không nạp seed mẫu.</a:t>
             </a:r>
           </a:p>
           <a:p>
@@ -7268,7 +7410,7 @@
                 </a:solidFill>
                 <a:latin typeface="Calibri"/>
               </a:rPr>
-              <a:t>11  ·  ĐẢM BẢO CHẤT LƯỢNG</a:t>
+              <a:t>11  ·  VẬN HÀNH 1 CÚ NHẤP (V1.4.0)</a:t>
             </a:r>
           </a:p>
         </p:txBody>
@@ -7310,1738 +7452,14 @@
                 </a:solidFill>
                 <a:latin typeface="Calibri"/>
               </a:rPr>
-              <a:t>100% kiểm thử đạt · 0 cảnh báo lint · đồng bộ Backlog</a:t>
-            </a:r>
-          </a:p>
-        </p:txBody>
-      </p:sp>
-      <p:sp>
-        <p:nvSpPr>
-          <p:cNvPr id="4" name="Rounded Rectangle 3"/>
-          <p:cNvSpPr/>
-          <p:nvPr/>
-        </p:nvSpPr>
-        <p:spPr>
-          <a:xfrm>
-            <a:off x="548640" y="1554480"/>
-            <a:ext cx="2624328" cy="1783080"/>
-          </a:xfrm>
-          <a:prstGeom prst="roundRect">
-            <a:avLst>
-              <a:gd name="adj" fmla="val 8000"/>
-            </a:avLst>
-          </a:prstGeom>
-          <a:solidFill>
-            <a:srgbClr val="FFFFFF"/>
-          </a:solidFill>
-          <a:ln>
-            <a:noFill/>
-          </a:ln>
-          <a:effectLst>
-            <a:outerShdw blurRad="152400" dist="38100" dir="5400000" algn="t" rotWithShape="0">
-              <a:srgbClr val="0F172A">
-                <a:alpha val="14000"/>
-              </a:srgbClr>
-            </a:outerShdw>
-          </a:effectLst>
-        </p:spPr>
-        <p:style>
-          <a:lnRef idx="1">
-            <a:schemeClr val="accent1"/>
-          </a:lnRef>
-          <a:fillRef idx="3">
-            <a:schemeClr val="accent1"/>
-          </a:fillRef>
-          <a:effectRef idx="2">
-            <a:schemeClr val="accent1"/>
-          </a:effectRef>
-          <a:fontRef idx="minor">
-            <a:schemeClr val="lt1"/>
-          </a:fontRef>
-        </p:style>
-        <p:txBody>
-          <a:bodyPr rtlCol="0" anchor="ctr"/>
-          <a:lstStyle/>
-          <a:p/>
-        </p:txBody>
-      </p:sp>
-      <p:sp>
-        <p:nvSpPr>
-          <p:cNvPr id="5" name="TextBox 4"/>
-          <p:cNvSpPr txBox="1"/>
-          <p:nvPr/>
-        </p:nvSpPr>
-        <p:spPr>
-          <a:xfrm>
-            <a:off x="804672" y="1719072"/>
-            <a:ext cx="2167128" cy="731520"/>
-          </a:xfrm>
-          <a:prstGeom prst="rect">
-            <a:avLst/>
-          </a:prstGeom>
-          <a:noFill/>
-        </p:spPr>
-        <p:txBody>
-          <a:bodyPr wrap="square" lIns="0" rIns="0" tIns="0" bIns="0" anchor="t">
-            <a:spAutoFit/>
-          </a:bodyPr>
-          <a:lstStyle/>
-          <a:p>
-            <a:pPr algn="l">
-              <a:lnSpc>
-                <a:spcPct val="108000"/>
-              </a:lnSpc>
-              <a:spcAft>
-                <a:spcPts val="400"/>
-              </a:spcAft>
-            </a:pPr>
-            <a:r>
-              <a:rPr sz="4000" b="1" i="0">
-                <a:solidFill>
-                  <a:srgbClr val="0D9488"/>
-                </a:solidFill>
-                <a:latin typeface="Calibri"/>
-              </a:rPr>
-              <a:t>139/139</a:t>
-            </a:r>
-          </a:p>
-        </p:txBody>
-      </p:sp>
-      <p:sp>
-        <p:nvSpPr>
-          <p:cNvPr id="6" name="TextBox 5"/>
-          <p:cNvSpPr txBox="1"/>
-          <p:nvPr/>
-        </p:nvSpPr>
-        <p:spPr>
-          <a:xfrm>
-            <a:off x="804672" y="2487168"/>
-            <a:ext cx="2167128" cy="320040"/>
-          </a:xfrm>
-          <a:prstGeom prst="rect">
-            <a:avLst/>
-          </a:prstGeom>
-          <a:noFill/>
-        </p:spPr>
-        <p:txBody>
-          <a:bodyPr wrap="square" lIns="0" rIns="0" tIns="0" bIns="0" anchor="t">
-            <a:spAutoFit/>
-          </a:bodyPr>
-          <a:lstStyle/>
-          <a:p>
-            <a:pPr algn="l">
-              <a:lnSpc>
-                <a:spcPct val="108000"/>
-              </a:lnSpc>
-              <a:spcAft>
-                <a:spcPts val="400"/>
-              </a:spcAft>
-            </a:pPr>
-            <a:r>
-              <a:rPr sz="1500" b="1" i="0">
-                <a:solidFill>
-                  <a:srgbClr val="0F172A"/>
-                </a:solidFill>
-                <a:latin typeface="Calibri"/>
-              </a:rPr>
-              <a:t>Unit test đạt</a:t>
-            </a:r>
-          </a:p>
-        </p:txBody>
-      </p:sp>
-      <p:sp>
-        <p:nvSpPr>
-          <p:cNvPr id="7" name="TextBox 6"/>
-          <p:cNvSpPr txBox="1"/>
-          <p:nvPr/>
-        </p:nvSpPr>
-        <p:spPr>
-          <a:xfrm>
-            <a:off x="804672" y="2834640"/>
-            <a:ext cx="2167128" cy="365760"/>
-          </a:xfrm>
-          <a:prstGeom prst="rect">
-            <a:avLst/>
-          </a:prstGeom>
-          <a:noFill/>
-        </p:spPr>
-        <p:txBody>
-          <a:bodyPr wrap="square" lIns="0" rIns="0" tIns="0" bIns="0" anchor="t">
-            <a:spAutoFit/>
-          </a:bodyPr>
-          <a:lstStyle/>
-          <a:p>
-            <a:pPr algn="l">
-              <a:lnSpc>
-                <a:spcPct val="108000"/>
-              </a:lnSpc>
-              <a:spcAft>
-                <a:spcPts val="400"/>
-              </a:spcAft>
-            </a:pPr>
-            <a:r>
-              <a:rPr sz="1200" b="0" i="0">
-                <a:solidFill>
-                  <a:srgbClr val="475569"/>
-                </a:solidFill>
-                <a:latin typeface="Calibri"/>
-              </a:rPr>
-              <a:t>8 bộ kiểm thử nghiệp vụ</a:t>
-            </a:r>
-          </a:p>
-        </p:txBody>
-      </p:sp>
-      <p:sp>
-        <p:nvSpPr>
-          <p:cNvPr id="8" name="Rounded Rectangle 7"/>
-          <p:cNvSpPr/>
-          <p:nvPr/>
-        </p:nvSpPr>
-        <p:spPr>
-          <a:xfrm>
-            <a:off x="3364992" y="1554480"/>
-            <a:ext cx="2624328" cy="1783080"/>
-          </a:xfrm>
-          <a:prstGeom prst="roundRect">
-            <a:avLst>
-              <a:gd name="adj" fmla="val 8000"/>
-            </a:avLst>
-          </a:prstGeom>
-          <a:solidFill>
-            <a:srgbClr val="FFFFFF"/>
-          </a:solidFill>
-          <a:ln>
-            <a:noFill/>
-          </a:ln>
-          <a:effectLst>
-            <a:outerShdw blurRad="152400" dist="38100" dir="5400000" algn="t" rotWithShape="0">
-              <a:srgbClr val="0F172A">
-                <a:alpha val="14000"/>
-              </a:srgbClr>
-            </a:outerShdw>
-          </a:effectLst>
-        </p:spPr>
-        <p:style>
-          <a:lnRef idx="1">
-            <a:schemeClr val="accent1"/>
-          </a:lnRef>
-          <a:fillRef idx="3">
-            <a:schemeClr val="accent1"/>
-          </a:fillRef>
-          <a:effectRef idx="2">
-            <a:schemeClr val="accent1"/>
-          </a:effectRef>
-          <a:fontRef idx="minor">
-            <a:schemeClr val="lt1"/>
-          </a:fontRef>
-        </p:style>
-        <p:txBody>
-          <a:bodyPr rtlCol="0" anchor="ctr"/>
-          <a:lstStyle/>
-          <a:p/>
-        </p:txBody>
-      </p:sp>
-      <p:sp>
-        <p:nvSpPr>
-          <p:cNvPr id="9" name="TextBox 8"/>
-          <p:cNvSpPr txBox="1"/>
-          <p:nvPr/>
-        </p:nvSpPr>
-        <p:spPr>
-          <a:xfrm>
-            <a:off x="3621024" y="1719072"/>
-            <a:ext cx="2167128" cy="731520"/>
-          </a:xfrm>
-          <a:prstGeom prst="rect">
-            <a:avLst/>
-          </a:prstGeom>
-          <a:noFill/>
-        </p:spPr>
-        <p:txBody>
-          <a:bodyPr wrap="square" lIns="0" rIns="0" tIns="0" bIns="0" anchor="t">
-            <a:spAutoFit/>
-          </a:bodyPr>
-          <a:lstStyle/>
-          <a:p>
-            <a:pPr algn="l">
-              <a:lnSpc>
-                <a:spcPct val="108000"/>
-              </a:lnSpc>
-              <a:spcAft>
-                <a:spcPts val="400"/>
-              </a:spcAft>
-            </a:pPr>
-            <a:r>
-              <a:rPr sz="4000" b="1" i="0">
-                <a:solidFill>
-                  <a:srgbClr val="0D9488"/>
-                </a:solidFill>
-                <a:latin typeface="Calibri"/>
-              </a:rPr>
-              <a:t>83/83</a:t>
-            </a:r>
-          </a:p>
-        </p:txBody>
-      </p:sp>
-      <p:sp>
-        <p:nvSpPr>
-          <p:cNvPr id="10" name="TextBox 9"/>
-          <p:cNvSpPr txBox="1"/>
-          <p:nvPr/>
-        </p:nvSpPr>
-        <p:spPr>
-          <a:xfrm>
-            <a:off x="3621024" y="2487168"/>
-            <a:ext cx="2167128" cy="320040"/>
-          </a:xfrm>
-          <a:prstGeom prst="rect">
-            <a:avLst/>
-          </a:prstGeom>
-          <a:noFill/>
-        </p:spPr>
-        <p:txBody>
-          <a:bodyPr wrap="square" lIns="0" rIns="0" tIns="0" bIns="0" anchor="t">
-            <a:spAutoFit/>
-          </a:bodyPr>
-          <a:lstStyle/>
-          <a:p>
-            <a:pPr algn="l">
-              <a:lnSpc>
-                <a:spcPct val="108000"/>
-              </a:lnSpc>
-              <a:spcAft>
-                <a:spcPts val="400"/>
-              </a:spcAft>
-            </a:pPr>
-            <a:r>
-              <a:rPr sz="1500" b="1" i="0">
-                <a:solidFill>
-                  <a:srgbClr val="0F172A"/>
-                </a:solidFill>
-                <a:latin typeface="Calibri"/>
-              </a:rPr>
-              <a:t>E2E test đạt</a:t>
-            </a:r>
-          </a:p>
-        </p:txBody>
-      </p:sp>
-      <p:sp>
-        <p:nvSpPr>
-          <p:cNvPr id="11" name="TextBox 10"/>
-          <p:cNvSpPr txBox="1"/>
-          <p:nvPr/>
-        </p:nvSpPr>
-        <p:spPr>
-          <a:xfrm>
-            <a:off x="3621024" y="2834640"/>
-            <a:ext cx="2167128" cy="365760"/>
-          </a:xfrm>
-          <a:prstGeom prst="rect">
-            <a:avLst/>
-          </a:prstGeom>
-          <a:noFill/>
-        </p:spPr>
-        <p:txBody>
-          <a:bodyPr wrap="square" lIns="0" rIns="0" tIns="0" bIns="0" anchor="t">
-            <a:spAutoFit/>
-          </a:bodyPr>
-          <a:lstStyle/>
-          <a:p>
-            <a:pPr algn="l">
-              <a:lnSpc>
-                <a:spcPct val="108000"/>
-              </a:lnSpc>
-              <a:spcAft>
-                <a:spcPts val="400"/>
-              </a:spcAft>
-            </a:pPr>
-            <a:r>
-              <a:rPr sz="1200" b="0" i="0">
-                <a:solidFill>
-                  <a:srgbClr val="475569"/>
-                </a:solidFill>
-                <a:latin typeface="Calibri"/>
-              </a:rPr>
-              <a:t>12 bộ PostgreSQL · Demo 4/4</a:t>
-            </a:r>
-          </a:p>
-        </p:txBody>
-      </p:sp>
-      <p:sp>
-        <p:nvSpPr>
-          <p:cNvPr id="12" name="Rounded Rectangle 11"/>
-          <p:cNvSpPr/>
-          <p:nvPr/>
-        </p:nvSpPr>
-        <p:spPr>
-          <a:xfrm>
-            <a:off x="6181344" y="1554480"/>
-            <a:ext cx="2624328" cy="1783080"/>
-          </a:xfrm>
-          <a:prstGeom prst="roundRect">
-            <a:avLst>
-              <a:gd name="adj" fmla="val 8000"/>
-            </a:avLst>
-          </a:prstGeom>
-          <a:solidFill>
-            <a:srgbClr val="FFFFFF"/>
-          </a:solidFill>
-          <a:ln>
-            <a:noFill/>
-          </a:ln>
-          <a:effectLst>
-            <a:outerShdw blurRad="152400" dist="38100" dir="5400000" algn="t" rotWithShape="0">
-              <a:srgbClr val="0F172A">
-                <a:alpha val="14000"/>
-              </a:srgbClr>
-            </a:outerShdw>
-          </a:effectLst>
-        </p:spPr>
-        <p:style>
-          <a:lnRef idx="1">
-            <a:schemeClr val="accent1"/>
-          </a:lnRef>
-          <a:fillRef idx="3">
-            <a:schemeClr val="accent1"/>
-          </a:fillRef>
-          <a:effectRef idx="2">
-            <a:schemeClr val="accent1"/>
-          </a:effectRef>
-          <a:fontRef idx="minor">
-            <a:schemeClr val="lt1"/>
-          </a:fontRef>
-        </p:style>
-        <p:txBody>
-          <a:bodyPr rtlCol="0" anchor="ctr"/>
-          <a:lstStyle/>
-          <a:p/>
-        </p:txBody>
-      </p:sp>
-      <p:sp>
-        <p:nvSpPr>
-          <p:cNvPr id="13" name="TextBox 12"/>
-          <p:cNvSpPr txBox="1"/>
-          <p:nvPr/>
-        </p:nvSpPr>
-        <p:spPr>
-          <a:xfrm>
-            <a:off x="6437376" y="1719072"/>
-            <a:ext cx="2167128" cy="731520"/>
-          </a:xfrm>
-          <a:prstGeom prst="rect">
-            <a:avLst/>
-          </a:prstGeom>
-          <a:noFill/>
-        </p:spPr>
-        <p:txBody>
-          <a:bodyPr wrap="square" lIns="0" rIns="0" tIns="0" bIns="0" anchor="t">
-            <a:spAutoFit/>
-          </a:bodyPr>
-          <a:lstStyle/>
-          <a:p>
-            <a:pPr algn="l">
-              <a:lnSpc>
-                <a:spcPct val="108000"/>
-              </a:lnSpc>
-              <a:spcAft>
-                <a:spcPts val="400"/>
-              </a:spcAft>
-            </a:pPr>
-            <a:r>
-              <a:rPr sz="4000" b="1" i="0">
-                <a:solidFill>
-                  <a:srgbClr val="0D9488"/>
-                </a:solidFill>
-                <a:latin typeface="Calibri"/>
-              </a:rPr>
-              <a:t>0</a:t>
-            </a:r>
-          </a:p>
-        </p:txBody>
-      </p:sp>
-      <p:sp>
-        <p:nvSpPr>
-          <p:cNvPr id="14" name="TextBox 13"/>
-          <p:cNvSpPr txBox="1"/>
-          <p:nvPr/>
-        </p:nvSpPr>
-        <p:spPr>
-          <a:xfrm>
-            <a:off x="6437376" y="2487168"/>
-            <a:ext cx="2167128" cy="320040"/>
-          </a:xfrm>
-          <a:prstGeom prst="rect">
-            <a:avLst/>
-          </a:prstGeom>
-          <a:noFill/>
-        </p:spPr>
-        <p:txBody>
-          <a:bodyPr wrap="square" lIns="0" rIns="0" tIns="0" bIns="0" anchor="t">
-            <a:spAutoFit/>
-          </a:bodyPr>
-          <a:lstStyle/>
-          <a:p>
-            <a:pPr algn="l">
-              <a:lnSpc>
-                <a:spcPct val="108000"/>
-              </a:lnSpc>
-              <a:spcAft>
-                <a:spcPts val="400"/>
-              </a:spcAft>
-            </a:pPr>
-            <a:r>
-              <a:rPr sz="1500" b="1" i="0">
-                <a:solidFill>
-                  <a:srgbClr val="0F172A"/>
-                </a:solidFill>
-                <a:latin typeface="Calibri"/>
-              </a:rPr>
-              <a:t>Lỗi build · cảnh báo lint</a:t>
-            </a:r>
-          </a:p>
-        </p:txBody>
-      </p:sp>
-      <p:sp>
-        <p:nvSpPr>
-          <p:cNvPr id="15" name="TextBox 14"/>
-          <p:cNvSpPr txBox="1"/>
-          <p:nvPr/>
-        </p:nvSpPr>
-        <p:spPr>
-          <a:xfrm>
-            <a:off x="6437376" y="2834640"/>
-            <a:ext cx="2167128" cy="365760"/>
-          </a:xfrm>
-          <a:prstGeom prst="rect">
-            <a:avLst/>
-          </a:prstGeom>
-          <a:noFill/>
-        </p:spPr>
-        <p:txBody>
-          <a:bodyPr wrap="square" lIns="0" rIns="0" tIns="0" bIns="0" anchor="t">
-            <a:spAutoFit/>
-          </a:bodyPr>
-          <a:lstStyle/>
-          <a:p>
-            <a:pPr algn="l">
-              <a:lnSpc>
-                <a:spcPct val="108000"/>
-              </a:lnSpc>
-              <a:spcAft>
-                <a:spcPts val="400"/>
-              </a:spcAft>
-            </a:pPr>
-            <a:r>
-              <a:rPr sz="1200" b="0" i="0">
-                <a:solidFill>
-                  <a:srgbClr val="475569"/>
-                </a:solidFill>
-                <a:latin typeface="Calibri"/>
-              </a:rPr>
-              <a:t>tsc -b · ESLint --max-warnings 0</a:t>
-            </a:r>
-          </a:p>
-        </p:txBody>
-      </p:sp>
-      <p:sp>
-        <p:nvSpPr>
-          <p:cNvPr id="16" name="Rounded Rectangle 15"/>
-          <p:cNvSpPr/>
-          <p:nvPr/>
-        </p:nvSpPr>
-        <p:spPr>
-          <a:xfrm>
-            <a:off x="8997696" y="1554480"/>
-            <a:ext cx="2624328" cy="1783080"/>
-          </a:xfrm>
-          <a:prstGeom prst="roundRect">
-            <a:avLst>
-              <a:gd name="adj" fmla="val 8000"/>
-            </a:avLst>
-          </a:prstGeom>
-          <a:solidFill>
-            <a:srgbClr val="FFFFFF"/>
-          </a:solidFill>
-          <a:ln>
-            <a:noFill/>
-          </a:ln>
-          <a:effectLst>
-            <a:outerShdw blurRad="152400" dist="38100" dir="5400000" algn="t" rotWithShape="0">
-              <a:srgbClr val="0F172A">
-                <a:alpha val="14000"/>
-              </a:srgbClr>
-            </a:outerShdw>
-          </a:effectLst>
-        </p:spPr>
-        <p:style>
-          <a:lnRef idx="1">
-            <a:schemeClr val="accent1"/>
-          </a:lnRef>
-          <a:fillRef idx="3">
-            <a:schemeClr val="accent1"/>
-          </a:fillRef>
-          <a:effectRef idx="2">
-            <a:schemeClr val="accent1"/>
-          </a:effectRef>
-          <a:fontRef idx="minor">
-            <a:schemeClr val="lt1"/>
-          </a:fontRef>
-        </p:style>
-        <p:txBody>
-          <a:bodyPr rtlCol="0" anchor="ctr"/>
-          <a:lstStyle/>
-          <a:p/>
-        </p:txBody>
-      </p:sp>
-      <p:sp>
-        <p:nvSpPr>
-          <p:cNvPr id="17" name="TextBox 16"/>
-          <p:cNvSpPr txBox="1"/>
-          <p:nvPr/>
-        </p:nvSpPr>
-        <p:spPr>
-          <a:xfrm>
-            <a:off x="9253728" y="1719072"/>
-            <a:ext cx="2167128" cy="731520"/>
-          </a:xfrm>
-          <a:prstGeom prst="rect">
-            <a:avLst/>
-          </a:prstGeom>
-          <a:noFill/>
-        </p:spPr>
-        <p:txBody>
-          <a:bodyPr wrap="square" lIns="0" rIns="0" tIns="0" bIns="0" anchor="t">
-            <a:spAutoFit/>
-          </a:bodyPr>
-          <a:lstStyle/>
-          <a:p>
-            <a:pPr algn="l">
-              <a:lnSpc>
-                <a:spcPct val="108000"/>
-              </a:lnSpc>
-              <a:spcAft>
-                <a:spcPts val="400"/>
-              </a:spcAft>
-            </a:pPr>
-            <a:r>
-              <a:rPr sz="4000" b="1" i="0">
-                <a:solidFill>
-                  <a:srgbClr val="0D9488"/>
-                </a:solidFill>
-                <a:latin typeface="Calibri"/>
-              </a:rPr>
-              <a:t>39 / 39</a:t>
-            </a:r>
-          </a:p>
-        </p:txBody>
-      </p:sp>
-      <p:sp>
-        <p:nvSpPr>
-          <p:cNvPr id="18" name="TextBox 17"/>
-          <p:cNvSpPr txBox="1"/>
-          <p:nvPr/>
-        </p:nvSpPr>
-        <p:spPr>
-          <a:xfrm>
-            <a:off x="9253728" y="2487168"/>
-            <a:ext cx="2167128" cy="320040"/>
-          </a:xfrm>
-          <a:prstGeom prst="rect">
-            <a:avLst/>
-          </a:prstGeom>
-          <a:noFill/>
-        </p:spPr>
-        <p:txBody>
-          <a:bodyPr wrap="square" lIns="0" rIns="0" tIns="0" bIns="0" anchor="t">
-            <a:spAutoFit/>
-          </a:bodyPr>
-          <a:lstStyle/>
-          <a:p>
-            <a:pPr algn="l">
-              <a:lnSpc>
-                <a:spcPct val="108000"/>
-              </a:lnSpc>
-              <a:spcAft>
-                <a:spcPts val="400"/>
-              </a:spcAft>
-            </a:pPr>
-            <a:r>
-              <a:rPr sz="1500" b="1" i="0">
-                <a:solidFill>
-                  <a:srgbClr val="0F172A"/>
-                </a:solidFill>
-                <a:latin typeface="Calibri"/>
-              </a:rPr>
-              <a:t>User story đối chiếu</a:t>
-            </a:r>
-          </a:p>
-        </p:txBody>
-      </p:sp>
-      <p:sp>
-        <p:nvSpPr>
-          <p:cNvPr id="19" name="TextBox 18"/>
-          <p:cNvSpPr txBox="1"/>
-          <p:nvPr/>
-        </p:nvSpPr>
-        <p:spPr>
-          <a:xfrm>
-            <a:off x="9253728" y="2834640"/>
-            <a:ext cx="2167128" cy="365760"/>
-          </a:xfrm>
-          <a:prstGeom prst="rect">
-            <a:avLst/>
-          </a:prstGeom>
-          <a:noFill/>
-        </p:spPr>
-        <p:txBody>
-          <a:bodyPr wrap="square" lIns="0" rIns="0" tIns="0" bIns="0" anchor="t">
-            <a:spAutoFit/>
-          </a:bodyPr>
-          <a:lstStyle/>
-          <a:p>
-            <a:pPr algn="l">
-              <a:lnSpc>
-                <a:spcPct val="108000"/>
-              </a:lnSpc>
-              <a:spcAft>
-                <a:spcPts val="400"/>
-              </a:spcAft>
-            </a:pPr>
-            <a:r>
-              <a:rPr sz="1200" b="0" i="0">
-                <a:solidFill>
-                  <a:srgbClr val="475569"/>
-                </a:solidFill>
-                <a:latin typeface="Calibri"/>
-              </a:rPr>
-              <a:t>4 Sprint · 165 Story Point</a:t>
-            </a:r>
-          </a:p>
-        </p:txBody>
-      </p:sp>
-      <p:sp>
-        <p:nvSpPr>
-          <p:cNvPr id="20" name="TextBox 19"/>
-          <p:cNvSpPr txBox="1"/>
-          <p:nvPr/>
-        </p:nvSpPr>
-        <p:spPr>
-          <a:xfrm>
-            <a:off x="548640" y="3611880"/>
-            <a:ext cx="7315200" cy="320040"/>
-          </a:xfrm>
-          <a:prstGeom prst="rect">
-            <a:avLst/>
-          </a:prstGeom>
-          <a:noFill/>
-        </p:spPr>
-        <p:txBody>
-          <a:bodyPr wrap="square" lIns="0" rIns="0" tIns="0" bIns="0" anchor="t">
-            <a:spAutoFit/>
-          </a:bodyPr>
-          <a:lstStyle/>
-          <a:p>
-            <a:pPr algn="l">
-              <a:lnSpc>
-                <a:spcPct val="108000"/>
-              </a:lnSpc>
-              <a:spcAft>
-                <a:spcPts val="400"/>
-              </a:spcAft>
-            </a:pPr>
-            <a:r>
-              <a:rPr sz="1600" b="1" i="0">
-                <a:solidFill>
-                  <a:srgbClr val="0F172A"/>
-                </a:solidFill>
-                <a:latin typeface="Calibri"/>
-              </a:rPr>
-              <a:t>Vòng phản hồi PO → phát hành có tag (Git Flow)</a:t>
-            </a:r>
-          </a:p>
-        </p:txBody>
-      </p:sp>
-      <p:cxnSp>
-        <p:nvCxnSpPr>
-          <p:cNvPr id="21" name="Connector 20"/>
-          <p:cNvCxnSpPr/>
-          <p:nvPr/>
-        </p:nvCxnSpPr>
-        <p:spPr>
-          <a:xfrm>
-            <a:off x="1097280" y="4526280"/>
-            <a:ext cx="9997135" cy="0"/>
-          </a:xfrm>
-          <a:prstGeom prst="line">
-            <a:avLst/>
-          </a:prstGeom>
-          <a:ln w="38100">
-            <a:solidFill>
-              <a:srgbClr val="99F6E4"/>
-            </a:solidFill>
-          </a:ln>
-        </p:spPr>
-        <p:style>
-          <a:lnRef idx="2">
-            <a:schemeClr val="accent1"/>
-          </a:lnRef>
-          <a:fillRef idx="0">
-            <a:schemeClr val="accent1"/>
-          </a:fillRef>
-          <a:effectRef idx="1">
-            <a:schemeClr val="accent1"/>
-          </a:effectRef>
-          <a:fontRef idx="minor">
-            <a:schemeClr val="tx1"/>
-          </a:fontRef>
-        </p:style>
-      </p:cxnSp>
-      <p:sp>
-        <p:nvSpPr>
-          <p:cNvPr id="22" name="Oval 21"/>
-          <p:cNvSpPr/>
-          <p:nvPr/>
-        </p:nvSpPr>
-        <p:spPr>
-          <a:xfrm>
-            <a:off x="969264" y="4398264"/>
-            <a:ext cx="256032" cy="256032"/>
-          </a:xfrm>
-          <a:prstGeom prst="ellipse">
-            <a:avLst/>
-          </a:prstGeom>
-          <a:solidFill>
-            <a:srgbClr val="0D9488"/>
-          </a:solidFill>
-          <a:ln w="25400">
-            <a:solidFill>
-              <a:srgbClr val="FFFFFF"/>
-            </a:solidFill>
-          </a:ln>
-        </p:spPr>
-        <p:style>
-          <a:lnRef idx="1">
-            <a:schemeClr val="accent1"/>
-          </a:lnRef>
-          <a:fillRef idx="3">
-            <a:schemeClr val="accent1"/>
-          </a:fillRef>
-          <a:effectRef idx="2">
-            <a:schemeClr val="accent1"/>
-          </a:effectRef>
-          <a:fontRef idx="minor">
-            <a:schemeClr val="lt1"/>
-          </a:fontRef>
-        </p:style>
-        <p:txBody>
-          <a:bodyPr rtlCol="0" anchor="ctr"/>
-          <a:lstStyle/>
-          <a:p>
-            <a:pPr algn="ctr"/>
-          </a:p>
-        </p:txBody>
-      </p:sp>
-      <p:sp>
-        <p:nvSpPr>
-          <p:cNvPr id="23" name="TextBox 22"/>
-          <p:cNvSpPr txBox="1"/>
-          <p:nvPr/>
-        </p:nvSpPr>
-        <p:spPr>
-          <a:xfrm>
-            <a:off x="91440" y="3977640"/>
-            <a:ext cx="2011680" cy="274320"/>
-          </a:xfrm>
-          <a:prstGeom prst="rect">
-            <a:avLst/>
-          </a:prstGeom>
-          <a:noFill/>
-        </p:spPr>
-        <p:txBody>
-          <a:bodyPr wrap="square" lIns="0" rIns="0" tIns="0" bIns="0" anchor="t">
-            <a:spAutoFit/>
-          </a:bodyPr>
-          <a:lstStyle/>
-          <a:p>
-            <a:pPr algn="ctr">
-              <a:lnSpc>
-                <a:spcPct val="108000"/>
-              </a:lnSpc>
-              <a:spcAft>
-                <a:spcPts val="400"/>
-              </a:spcAft>
-            </a:pPr>
-            <a:r>
-              <a:rPr sz="1200" b="0" i="0">
-                <a:solidFill>
-                  <a:srgbClr val="475569"/>
-                </a:solidFill>
-                <a:latin typeface="Calibri"/>
-              </a:rPr>
-              <a:t>25/09</a:t>
-            </a:r>
-          </a:p>
-        </p:txBody>
-      </p:sp>
-      <p:sp>
-        <p:nvSpPr>
-          <p:cNvPr id="24" name="TextBox 23"/>
-          <p:cNvSpPr txBox="1"/>
-          <p:nvPr/>
-        </p:nvSpPr>
-        <p:spPr>
-          <a:xfrm>
-            <a:off x="91440" y="4773168"/>
-            <a:ext cx="2011680" cy="320040"/>
-          </a:xfrm>
-          <a:prstGeom prst="rect">
-            <a:avLst/>
-          </a:prstGeom>
-          <a:noFill/>
-        </p:spPr>
-        <p:txBody>
-          <a:bodyPr wrap="square" lIns="0" rIns="0" tIns="0" bIns="0" anchor="t">
-            <a:spAutoFit/>
-          </a:bodyPr>
-          <a:lstStyle/>
-          <a:p>
-            <a:pPr algn="ctr">
-              <a:lnSpc>
-                <a:spcPct val="108000"/>
-              </a:lnSpc>
-              <a:spcAft>
-                <a:spcPts val="400"/>
-              </a:spcAft>
-            </a:pPr>
-            <a:r>
-              <a:rPr sz="1600" b="1" i="0">
-                <a:solidFill>
-                  <a:srgbClr val="0F172A"/>
-                </a:solidFill>
-                <a:latin typeface="Calibri"/>
-              </a:rPr>
-              <a:t>v1.1.0</a:t>
-            </a:r>
-          </a:p>
-        </p:txBody>
-      </p:sp>
-      <p:sp>
-        <p:nvSpPr>
-          <p:cNvPr id="25" name="TextBox 24"/>
-          <p:cNvSpPr txBox="1"/>
-          <p:nvPr/>
-        </p:nvSpPr>
-        <p:spPr>
-          <a:xfrm>
-            <a:off x="91440" y="5093208"/>
-            <a:ext cx="2011680" cy="274320"/>
-          </a:xfrm>
-          <a:prstGeom prst="rect">
-            <a:avLst/>
-          </a:prstGeom>
-          <a:noFill/>
-        </p:spPr>
-        <p:txBody>
-          <a:bodyPr wrap="square" lIns="0" rIns="0" tIns="0" bIns="0" anchor="t">
-            <a:spAutoFit/>
-          </a:bodyPr>
-          <a:lstStyle/>
-          <a:p>
-            <a:pPr algn="ctr">
-              <a:lnSpc>
-                <a:spcPct val="108000"/>
-              </a:lnSpc>
-              <a:spcAft>
-                <a:spcPts val="400"/>
-              </a:spcAft>
-            </a:pPr>
-            <a:r>
-              <a:rPr sz="1200" b="0" i="0">
-                <a:solidFill>
-                  <a:srgbClr val="475569"/>
-                </a:solidFill>
-                <a:latin typeface="Calibri"/>
-              </a:rPr>
-              <a:t>Giao diện Fresha</a:t>
-            </a:r>
-          </a:p>
-        </p:txBody>
-      </p:sp>
-      <p:sp>
-        <p:nvSpPr>
-          <p:cNvPr id="26" name="Oval 25"/>
-          <p:cNvSpPr/>
-          <p:nvPr/>
-        </p:nvSpPr>
-        <p:spPr>
-          <a:xfrm>
-            <a:off x="3468547" y="4398264"/>
-            <a:ext cx="256032" cy="256032"/>
-          </a:xfrm>
-          <a:prstGeom prst="ellipse">
-            <a:avLst/>
-          </a:prstGeom>
-          <a:solidFill>
-            <a:srgbClr val="0D9488"/>
-          </a:solidFill>
-          <a:ln w="25400">
-            <a:solidFill>
-              <a:srgbClr val="FFFFFF"/>
-            </a:solidFill>
-          </a:ln>
-        </p:spPr>
-        <p:style>
-          <a:lnRef idx="1">
-            <a:schemeClr val="accent1"/>
-          </a:lnRef>
-          <a:fillRef idx="3">
-            <a:schemeClr val="accent1"/>
-          </a:fillRef>
-          <a:effectRef idx="2">
-            <a:schemeClr val="accent1"/>
-          </a:effectRef>
-          <a:fontRef idx="minor">
-            <a:schemeClr val="lt1"/>
-          </a:fontRef>
-        </p:style>
-        <p:txBody>
-          <a:bodyPr rtlCol="0" anchor="ctr"/>
-          <a:lstStyle/>
-          <a:p>
-            <a:pPr algn="ctr"/>
-          </a:p>
-        </p:txBody>
-      </p:sp>
-      <p:sp>
-        <p:nvSpPr>
-          <p:cNvPr id="27" name="TextBox 26"/>
-          <p:cNvSpPr txBox="1"/>
-          <p:nvPr/>
-        </p:nvSpPr>
-        <p:spPr>
-          <a:xfrm>
-            <a:off x="2590723" y="3977640"/>
-            <a:ext cx="2011680" cy="274320"/>
-          </a:xfrm>
-          <a:prstGeom prst="rect">
-            <a:avLst/>
-          </a:prstGeom>
-          <a:noFill/>
-        </p:spPr>
-        <p:txBody>
-          <a:bodyPr wrap="square" lIns="0" rIns="0" tIns="0" bIns="0" anchor="t">
-            <a:spAutoFit/>
-          </a:bodyPr>
-          <a:lstStyle/>
-          <a:p>
-            <a:pPr algn="ctr">
-              <a:lnSpc>
-                <a:spcPct val="108000"/>
-              </a:lnSpc>
-              <a:spcAft>
-                <a:spcPts val="400"/>
-              </a:spcAft>
-            </a:pPr>
-            <a:r>
-              <a:rPr sz="1200" b="0" i="0">
-                <a:solidFill>
-                  <a:srgbClr val="475569"/>
-                </a:solidFill>
-                <a:latin typeface="Calibri"/>
-              </a:rPr>
-              <a:t>27/09</a:t>
-            </a:r>
-          </a:p>
-        </p:txBody>
-      </p:sp>
-      <p:sp>
-        <p:nvSpPr>
-          <p:cNvPr id="28" name="TextBox 27"/>
-          <p:cNvSpPr txBox="1"/>
-          <p:nvPr/>
-        </p:nvSpPr>
-        <p:spPr>
-          <a:xfrm>
-            <a:off x="2590723" y="4773168"/>
-            <a:ext cx="2011680" cy="320040"/>
-          </a:xfrm>
-          <a:prstGeom prst="rect">
-            <a:avLst/>
-          </a:prstGeom>
-          <a:noFill/>
-        </p:spPr>
-        <p:txBody>
-          <a:bodyPr wrap="square" lIns="0" rIns="0" tIns="0" bIns="0" anchor="t">
-            <a:spAutoFit/>
-          </a:bodyPr>
-          <a:lstStyle/>
-          <a:p>
-            <a:pPr algn="ctr">
-              <a:lnSpc>
-                <a:spcPct val="108000"/>
-              </a:lnSpc>
-              <a:spcAft>
-                <a:spcPts val="400"/>
-              </a:spcAft>
-            </a:pPr>
-            <a:r>
-              <a:rPr sz="1600" b="1" i="0">
-                <a:solidFill>
-                  <a:srgbClr val="0F172A"/>
-                </a:solidFill>
-                <a:latin typeface="Calibri"/>
-              </a:rPr>
-              <a:t>v1.2.0</a:t>
-            </a:r>
-          </a:p>
-        </p:txBody>
-      </p:sp>
-      <p:sp>
-        <p:nvSpPr>
-          <p:cNvPr id="29" name="TextBox 28"/>
-          <p:cNvSpPr txBox="1"/>
-          <p:nvPr/>
-        </p:nvSpPr>
-        <p:spPr>
-          <a:xfrm>
-            <a:off x="2590723" y="5093208"/>
-            <a:ext cx="2011680" cy="274320"/>
-          </a:xfrm>
-          <a:prstGeom prst="rect">
-            <a:avLst/>
-          </a:prstGeom>
-          <a:noFill/>
-        </p:spPr>
-        <p:txBody>
-          <a:bodyPr wrap="square" lIns="0" rIns="0" tIns="0" bIns="0" anchor="t">
-            <a:spAutoFit/>
-          </a:bodyPr>
-          <a:lstStyle/>
-          <a:p>
-            <a:pPr algn="ctr">
-              <a:lnSpc>
-                <a:spcPct val="108000"/>
-              </a:lnSpc>
-              <a:spcAft>
-                <a:spcPts val="400"/>
-              </a:spcAft>
-            </a:pPr>
-            <a:r>
-              <a:rPr sz="1200" b="0" i="0">
-                <a:solidFill>
-                  <a:srgbClr val="475569"/>
-                </a:solidFill>
-                <a:latin typeface="Calibri"/>
-              </a:rPr>
-              <a:t>15 + 8 lỗi Sprint 1</a:t>
-            </a:r>
-          </a:p>
-        </p:txBody>
-      </p:sp>
-      <p:sp>
-        <p:nvSpPr>
-          <p:cNvPr id="30" name="Oval 29"/>
-          <p:cNvSpPr/>
-          <p:nvPr/>
-        </p:nvSpPr>
-        <p:spPr>
-          <a:xfrm>
-            <a:off x="5967831" y="4398264"/>
-            <a:ext cx="256032" cy="256032"/>
-          </a:xfrm>
-          <a:prstGeom prst="ellipse">
-            <a:avLst/>
-          </a:prstGeom>
-          <a:solidFill>
-            <a:srgbClr val="0D9488"/>
-          </a:solidFill>
-          <a:ln w="25400">
-            <a:solidFill>
-              <a:srgbClr val="FFFFFF"/>
-            </a:solidFill>
-          </a:ln>
-        </p:spPr>
-        <p:style>
-          <a:lnRef idx="1">
-            <a:schemeClr val="accent1"/>
-          </a:lnRef>
-          <a:fillRef idx="3">
-            <a:schemeClr val="accent1"/>
-          </a:fillRef>
-          <a:effectRef idx="2">
-            <a:schemeClr val="accent1"/>
-          </a:effectRef>
-          <a:fontRef idx="minor">
-            <a:schemeClr val="lt1"/>
-          </a:fontRef>
-        </p:style>
-        <p:txBody>
-          <a:bodyPr rtlCol="0" anchor="ctr"/>
-          <a:lstStyle/>
-          <a:p>
-            <a:pPr algn="ctr"/>
-          </a:p>
-        </p:txBody>
-      </p:sp>
-      <p:sp>
-        <p:nvSpPr>
-          <p:cNvPr id="31" name="TextBox 30"/>
-          <p:cNvSpPr txBox="1"/>
-          <p:nvPr/>
-        </p:nvSpPr>
-        <p:spPr>
-          <a:xfrm>
-            <a:off x="5090007" y="3977640"/>
-            <a:ext cx="2011680" cy="274320"/>
-          </a:xfrm>
-          <a:prstGeom prst="rect">
-            <a:avLst/>
-          </a:prstGeom>
-          <a:noFill/>
-        </p:spPr>
-        <p:txBody>
-          <a:bodyPr wrap="square" lIns="0" rIns="0" tIns="0" bIns="0" anchor="t">
-            <a:spAutoFit/>
-          </a:bodyPr>
-          <a:lstStyle/>
-          <a:p>
-            <a:pPr algn="ctr">
-              <a:lnSpc>
-                <a:spcPct val="108000"/>
-              </a:lnSpc>
-              <a:spcAft>
-                <a:spcPts val="400"/>
-              </a:spcAft>
-            </a:pPr>
-            <a:r>
-              <a:rPr sz="1200" b="0" i="0">
-                <a:solidFill>
-                  <a:srgbClr val="475569"/>
-                </a:solidFill>
-                <a:latin typeface="Calibri"/>
-              </a:rPr>
-              <a:t>28/09</a:t>
-            </a:r>
-          </a:p>
-        </p:txBody>
-      </p:sp>
-      <p:sp>
-        <p:nvSpPr>
-          <p:cNvPr id="32" name="TextBox 31"/>
-          <p:cNvSpPr txBox="1"/>
-          <p:nvPr/>
-        </p:nvSpPr>
-        <p:spPr>
-          <a:xfrm>
-            <a:off x="5090007" y="4773168"/>
-            <a:ext cx="2011680" cy="320040"/>
-          </a:xfrm>
-          <a:prstGeom prst="rect">
-            <a:avLst/>
-          </a:prstGeom>
-          <a:noFill/>
-        </p:spPr>
-        <p:txBody>
-          <a:bodyPr wrap="square" lIns="0" rIns="0" tIns="0" bIns="0" anchor="t">
-            <a:spAutoFit/>
-          </a:bodyPr>
-          <a:lstStyle/>
-          <a:p>
-            <a:pPr algn="ctr">
-              <a:lnSpc>
-                <a:spcPct val="108000"/>
-              </a:lnSpc>
-              <a:spcAft>
-                <a:spcPts val="400"/>
-              </a:spcAft>
-            </a:pPr>
-            <a:r>
-              <a:rPr sz="1600" b="1" i="0">
-                <a:solidFill>
-                  <a:srgbClr val="0F172A"/>
-                </a:solidFill>
-                <a:latin typeface="Calibri"/>
-              </a:rPr>
-              <a:t>v1.2.1</a:t>
-            </a:r>
-          </a:p>
-        </p:txBody>
-      </p:sp>
-      <p:sp>
-        <p:nvSpPr>
-          <p:cNvPr id="33" name="TextBox 32"/>
-          <p:cNvSpPr txBox="1"/>
-          <p:nvPr/>
-        </p:nvSpPr>
-        <p:spPr>
-          <a:xfrm>
-            <a:off x="5090007" y="5093208"/>
-            <a:ext cx="2011680" cy="274320"/>
-          </a:xfrm>
-          <a:prstGeom prst="rect">
-            <a:avLst/>
-          </a:prstGeom>
-          <a:noFill/>
-        </p:spPr>
-        <p:txBody>
-          <a:bodyPr wrap="square" lIns="0" rIns="0" tIns="0" bIns="0" anchor="t">
-            <a:spAutoFit/>
-          </a:bodyPr>
-          <a:lstStyle/>
-          <a:p>
-            <a:pPr algn="ctr">
-              <a:lnSpc>
-                <a:spcPct val="108000"/>
-              </a:lnSpc>
-              <a:spcAft>
-                <a:spcPts val="400"/>
-              </a:spcAft>
-            </a:pPr>
-            <a:r>
-              <a:rPr sz="1200" b="0" i="0">
-                <a:solidFill>
-                  <a:srgbClr val="475569"/>
-                </a:solidFill>
-                <a:latin typeface="Calibri"/>
-              </a:rPr>
-              <a:t>6 lỗi tích hợp</a:t>
-            </a:r>
-          </a:p>
-        </p:txBody>
-      </p:sp>
-      <p:sp>
-        <p:nvSpPr>
-          <p:cNvPr id="34" name="Oval 33"/>
-          <p:cNvSpPr/>
-          <p:nvPr/>
-        </p:nvSpPr>
-        <p:spPr>
-          <a:xfrm>
-            <a:off x="8467115" y="4398264"/>
-            <a:ext cx="256032" cy="256032"/>
-          </a:xfrm>
-          <a:prstGeom prst="ellipse">
-            <a:avLst/>
-          </a:prstGeom>
-          <a:solidFill>
-            <a:srgbClr val="0D9488"/>
-          </a:solidFill>
-          <a:ln w="25400">
-            <a:solidFill>
-              <a:srgbClr val="FFFFFF"/>
-            </a:solidFill>
-          </a:ln>
-        </p:spPr>
-        <p:style>
-          <a:lnRef idx="1">
-            <a:schemeClr val="accent1"/>
-          </a:lnRef>
-          <a:fillRef idx="3">
-            <a:schemeClr val="accent1"/>
-          </a:fillRef>
-          <a:effectRef idx="2">
-            <a:schemeClr val="accent1"/>
-          </a:effectRef>
-          <a:fontRef idx="minor">
-            <a:schemeClr val="lt1"/>
-          </a:fontRef>
-        </p:style>
-        <p:txBody>
-          <a:bodyPr rtlCol="0" anchor="ctr"/>
-          <a:lstStyle/>
-          <a:p>
-            <a:pPr algn="ctr"/>
-          </a:p>
-        </p:txBody>
-      </p:sp>
-      <p:sp>
-        <p:nvSpPr>
-          <p:cNvPr id="35" name="TextBox 34"/>
-          <p:cNvSpPr txBox="1"/>
-          <p:nvPr/>
-        </p:nvSpPr>
-        <p:spPr>
-          <a:xfrm>
-            <a:off x="7589291" y="3977640"/>
-            <a:ext cx="2011680" cy="274320"/>
-          </a:xfrm>
-          <a:prstGeom prst="rect">
-            <a:avLst/>
-          </a:prstGeom>
-          <a:noFill/>
-        </p:spPr>
-        <p:txBody>
-          <a:bodyPr wrap="square" lIns="0" rIns="0" tIns="0" bIns="0" anchor="t">
-            <a:spAutoFit/>
-          </a:bodyPr>
-          <a:lstStyle/>
-          <a:p>
-            <a:pPr algn="ctr">
-              <a:lnSpc>
-                <a:spcPct val="108000"/>
-              </a:lnSpc>
-              <a:spcAft>
-                <a:spcPts val="400"/>
-              </a:spcAft>
-            </a:pPr>
-            <a:r>
-              <a:rPr sz="1200" b="0" i="0">
-                <a:solidFill>
-                  <a:srgbClr val="475569"/>
-                </a:solidFill>
-                <a:latin typeface="Calibri"/>
-              </a:rPr>
-              <a:t>28/09</a:t>
-            </a:r>
-          </a:p>
-        </p:txBody>
-      </p:sp>
-      <p:sp>
-        <p:nvSpPr>
-          <p:cNvPr id="36" name="TextBox 35"/>
-          <p:cNvSpPr txBox="1"/>
-          <p:nvPr/>
-        </p:nvSpPr>
-        <p:spPr>
-          <a:xfrm>
-            <a:off x="7589291" y="4773168"/>
-            <a:ext cx="2011680" cy="320040"/>
-          </a:xfrm>
-          <a:prstGeom prst="rect">
-            <a:avLst/>
-          </a:prstGeom>
-          <a:noFill/>
-        </p:spPr>
-        <p:txBody>
-          <a:bodyPr wrap="square" lIns="0" rIns="0" tIns="0" bIns="0" anchor="t">
-            <a:spAutoFit/>
-          </a:bodyPr>
-          <a:lstStyle/>
-          <a:p>
-            <a:pPr algn="ctr">
-              <a:lnSpc>
-                <a:spcPct val="108000"/>
-              </a:lnSpc>
-              <a:spcAft>
-                <a:spcPts val="400"/>
-              </a:spcAft>
-            </a:pPr>
-            <a:r>
-              <a:rPr sz="1600" b="1" i="0">
-                <a:solidFill>
-                  <a:srgbClr val="0F172A"/>
-                </a:solidFill>
-                <a:latin typeface="Calibri"/>
-              </a:rPr>
-              <a:t>v1.2.3</a:t>
-            </a:r>
-          </a:p>
-        </p:txBody>
-      </p:sp>
-      <p:sp>
-        <p:nvSpPr>
-          <p:cNvPr id="37" name="TextBox 36"/>
-          <p:cNvSpPr txBox="1"/>
-          <p:nvPr/>
-        </p:nvSpPr>
-        <p:spPr>
-          <a:xfrm>
-            <a:off x="7589291" y="5093208"/>
-            <a:ext cx="2011680" cy="274320"/>
-          </a:xfrm>
-          <a:prstGeom prst="rect">
-            <a:avLst/>
-          </a:prstGeom>
-          <a:noFill/>
-        </p:spPr>
-        <p:txBody>
-          <a:bodyPr wrap="square" lIns="0" rIns="0" tIns="0" bIns="0" anchor="t">
-            <a:spAutoFit/>
-          </a:bodyPr>
-          <a:lstStyle/>
-          <a:p>
-            <a:pPr algn="ctr">
-              <a:lnSpc>
-                <a:spcPct val="108000"/>
-              </a:lnSpc>
-              <a:spcAft>
-                <a:spcPts val="400"/>
-              </a:spcAft>
-            </a:pPr>
-            <a:r>
-              <a:rPr sz="1200" b="0" i="0">
-                <a:solidFill>
-                  <a:srgbClr val="475569"/>
-                </a:solidFill>
-                <a:latin typeface="Calibri"/>
-              </a:rPr>
-              <a:t>Launcher mọi máy</a:t>
-            </a:r>
-          </a:p>
-        </p:txBody>
-      </p:sp>
-      <p:sp>
-        <p:nvSpPr>
-          <p:cNvPr id="38" name="Oval 37"/>
-          <p:cNvSpPr/>
-          <p:nvPr/>
-        </p:nvSpPr>
-        <p:spPr>
-          <a:xfrm>
-            <a:off x="10966399" y="4398264"/>
-            <a:ext cx="256032" cy="256032"/>
-          </a:xfrm>
-          <a:prstGeom prst="ellipse">
-            <a:avLst/>
-          </a:prstGeom>
-          <a:solidFill>
-            <a:srgbClr val="0F172A"/>
-          </a:solidFill>
-          <a:ln w="25400">
-            <a:solidFill>
-              <a:srgbClr val="FFFFFF"/>
-            </a:solidFill>
-          </a:ln>
-        </p:spPr>
-        <p:style>
-          <a:lnRef idx="1">
-            <a:schemeClr val="accent1"/>
-          </a:lnRef>
-          <a:fillRef idx="3">
-            <a:schemeClr val="accent1"/>
-          </a:fillRef>
-          <a:effectRef idx="2">
-            <a:schemeClr val="accent1"/>
-          </a:effectRef>
-          <a:fontRef idx="minor">
-            <a:schemeClr val="lt1"/>
-          </a:fontRef>
-        </p:style>
-        <p:txBody>
-          <a:bodyPr rtlCol="0" anchor="ctr"/>
-          <a:lstStyle/>
-          <a:p>
-            <a:pPr algn="ctr"/>
-          </a:p>
-        </p:txBody>
-      </p:sp>
-      <p:sp>
-        <p:nvSpPr>
-          <p:cNvPr id="39" name="TextBox 38"/>
-          <p:cNvSpPr txBox="1"/>
-          <p:nvPr/>
-        </p:nvSpPr>
-        <p:spPr>
-          <a:xfrm>
-            <a:off x="10088575" y="3977640"/>
-            <a:ext cx="2011680" cy="274320"/>
-          </a:xfrm>
-          <a:prstGeom prst="rect">
-            <a:avLst/>
-          </a:prstGeom>
-          <a:noFill/>
-        </p:spPr>
-        <p:txBody>
-          <a:bodyPr wrap="square" lIns="0" rIns="0" tIns="0" bIns="0" anchor="t">
-            <a:spAutoFit/>
-          </a:bodyPr>
-          <a:lstStyle/>
-          <a:p>
-            <a:pPr algn="ctr">
-              <a:lnSpc>
-                <a:spcPct val="108000"/>
-              </a:lnSpc>
-              <a:spcAft>
-                <a:spcPts val="400"/>
-              </a:spcAft>
-            </a:pPr>
-            <a:r>
-              <a:rPr sz="1200" b="0" i="0">
-                <a:solidFill>
-                  <a:srgbClr val="475569"/>
-                </a:solidFill>
-                <a:latin typeface="Calibri"/>
-              </a:rPr>
-              <a:t>28/09</a:t>
-            </a:r>
-          </a:p>
-        </p:txBody>
-      </p:sp>
-      <p:sp>
-        <p:nvSpPr>
-          <p:cNvPr id="40" name="TextBox 39"/>
-          <p:cNvSpPr txBox="1"/>
-          <p:nvPr/>
-        </p:nvSpPr>
-        <p:spPr>
-          <a:xfrm>
-            <a:off x="10088575" y="4773168"/>
-            <a:ext cx="2011680" cy="320040"/>
-          </a:xfrm>
-          <a:prstGeom prst="rect">
-            <a:avLst/>
-          </a:prstGeom>
-          <a:noFill/>
-        </p:spPr>
-        <p:txBody>
-          <a:bodyPr wrap="square" lIns="0" rIns="0" tIns="0" bIns="0" anchor="t">
-            <a:spAutoFit/>
-          </a:bodyPr>
-          <a:lstStyle/>
-          <a:p>
-            <a:pPr algn="ctr">
-              <a:lnSpc>
-                <a:spcPct val="108000"/>
-              </a:lnSpc>
-              <a:spcAft>
-                <a:spcPts val="400"/>
-              </a:spcAft>
-            </a:pPr>
-            <a:r>
-              <a:rPr sz="1600" b="1" i="0">
-                <a:solidFill>
-                  <a:srgbClr val="0F172A"/>
-                </a:solidFill>
-                <a:latin typeface="Calibri"/>
-              </a:rPr>
-              <a:t>v1.2.5</a:t>
-            </a:r>
-          </a:p>
-        </p:txBody>
-      </p:sp>
-      <p:sp>
-        <p:nvSpPr>
-          <p:cNvPr id="41" name="TextBox 40"/>
-          <p:cNvSpPr txBox="1"/>
-          <p:nvPr/>
-        </p:nvSpPr>
-        <p:spPr>
-          <a:xfrm>
-            <a:off x="10088575" y="5093208"/>
-            <a:ext cx="2011680" cy="274320"/>
-          </a:xfrm>
-          <a:prstGeom prst="rect">
-            <a:avLst/>
-          </a:prstGeom>
-          <a:noFill/>
-        </p:spPr>
-        <p:txBody>
-          <a:bodyPr wrap="square" lIns="0" rIns="0" tIns="0" bIns="0" anchor="t">
-            <a:spAutoFit/>
-          </a:bodyPr>
-          <a:lstStyle/>
-          <a:p>
-            <a:pPr algn="ctr">
-              <a:lnSpc>
-                <a:spcPct val="108000"/>
-              </a:lnSpc>
-              <a:spcAft>
-                <a:spcPts val="400"/>
-              </a:spcAft>
-            </a:pPr>
-            <a:r>
-              <a:rPr sz="1200" b="0" i="0">
-                <a:solidFill>
-                  <a:srgbClr val="475569"/>
-                </a:solidFill>
-                <a:latin typeface="Calibri"/>
-              </a:rPr>
-              <a:t>Supervisor</a:t>
-            </a:r>
-          </a:p>
-        </p:txBody>
-      </p:sp>
-      <p:sp>
-        <p:nvSpPr>
-          <p:cNvPr id="42" name="Rounded Rectangle 41"/>
-          <p:cNvSpPr/>
-          <p:nvPr/>
-        </p:nvSpPr>
-        <p:spPr>
-          <a:xfrm>
-            <a:off x="548640" y="5559552"/>
-            <a:ext cx="11094415" cy="731520"/>
-          </a:xfrm>
-          <a:prstGeom prst="roundRect">
-            <a:avLst>
-              <a:gd name="adj" fmla="val 8000"/>
-            </a:avLst>
-          </a:prstGeom>
-          <a:solidFill>
-            <a:srgbClr val="F0FDFA"/>
-          </a:solidFill>
-          <a:ln w="12700">
-            <a:solidFill>
-              <a:srgbClr val="99F6E4"/>
-            </a:solidFill>
-          </a:ln>
-        </p:spPr>
-        <p:style>
-          <a:lnRef idx="1">
-            <a:schemeClr val="accent1"/>
-          </a:lnRef>
-          <a:fillRef idx="3">
-            <a:schemeClr val="accent1"/>
-          </a:fillRef>
-          <a:effectRef idx="2">
-            <a:schemeClr val="accent1"/>
-          </a:effectRef>
-          <a:fontRef idx="minor">
-            <a:schemeClr val="lt1"/>
-          </a:fontRef>
-        </p:style>
-        <p:txBody>
-          <a:bodyPr rtlCol="0" anchor="ctr"/>
-          <a:lstStyle/>
-          <a:p/>
-        </p:txBody>
-      </p:sp>
-      <p:sp>
-        <p:nvSpPr>
-          <p:cNvPr id="43" name="Oval 42"/>
-          <p:cNvSpPr/>
-          <p:nvPr/>
-        </p:nvSpPr>
-        <p:spPr>
-          <a:xfrm>
-            <a:off x="713232" y="5678424"/>
-            <a:ext cx="493776" cy="493776"/>
-          </a:xfrm>
-          <a:prstGeom prst="ellipse">
-            <a:avLst/>
-          </a:prstGeom>
-          <a:solidFill>
-            <a:srgbClr val="0D9488"/>
-          </a:solidFill>
-          <a:ln>
-            <a:noFill/>
-          </a:ln>
-        </p:spPr>
-        <p:style>
-          <a:lnRef idx="1">
-            <a:schemeClr val="accent1"/>
-          </a:lnRef>
-          <a:fillRef idx="3">
-            <a:schemeClr val="accent1"/>
-          </a:fillRef>
-          <a:effectRef idx="2">
-            <a:schemeClr val="accent1"/>
-          </a:effectRef>
-          <a:fontRef idx="minor">
-            <a:schemeClr val="lt1"/>
-          </a:fontRef>
-        </p:style>
-        <p:txBody>
-          <a:bodyPr rtlCol="0" anchor="ctr"/>
-          <a:lstStyle/>
-          <a:p>
-            <a:pPr algn="ctr"/>
+              <a:t>HoYoSalon Launcher: BẮT ĐẦU · CẬP NHẬT · Chẩn đoán</a:t>
+            </a:r>
           </a:p>
         </p:txBody>
       </p:sp>
       <p:pic>
         <p:nvPicPr>
-          <p:cNvPr id="44" name="Picture 43" descr="check_w.png"/>
+          <p:cNvPr id="4" name="Picture 3" descr="22_launcher.jpg"/>
           <p:cNvPicPr>
             <a:picLocks noChangeAspect="1"/>
           </p:cNvPicPr>
@@ -9049,38 +7467,241 @@
         </p:nvPicPr>
         <p:blipFill>
           <a:blip r:embed="rId2"/>
+          <a:srcRect b="277"/>
           <a:stretch>
             <a:fillRect/>
           </a:stretch>
         </p:blipFill>
         <p:spPr>
           <a:xfrm>
-            <a:off x="831738" y="5796930"/>
-            <a:ext cx="256764" cy="256764"/>
-          </a:xfrm>
-          <a:prstGeom prst="rect">
-            <a:avLst/>
-          </a:prstGeom>
+            <a:off x="548640" y="1463040"/>
+            <a:ext cx="6949440" cy="4114800"/>
+          </a:xfrm>
+          <a:prstGeom prst="roundRect">
+            <a:avLst>
+              <a:gd name="adj" fmla="val 3500"/>
+            </a:avLst>
+          </a:prstGeom>
+          <a:ln w="12700">
+            <a:solidFill>
+              <a:srgbClr val="E2E8F0"/>
+            </a:solidFill>
+          </a:ln>
+          <a:effectLst>
+            <a:outerShdw blurRad="203200" dist="50800" dir="5400000" algn="t" rotWithShape="0">
+              <a:srgbClr val="0F172A">
+                <a:alpha val="16000"/>
+              </a:srgbClr>
+            </a:outerShdw>
+          </a:effectLst>
         </p:spPr>
       </p:pic>
       <p:sp>
         <p:nvSpPr>
-          <p:cNvPr id="45" name="TextBox 44"/>
-          <p:cNvSpPr txBox="1"/>
-          <p:nvPr/>
-        </p:nvSpPr>
-        <p:spPr>
-          <a:xfrm>
-            <a:off x="1371600" y="5669280"/>
-            <a:ext cx="10088575" cy="548640"/>
-          </a:xfrm>
-          <a:prstGeom prst="rect">
-            <a:avLst/>
-          </a:prstGeom>
-          <a:noFill/>
-        </p:spPr>
-        <p:txBody>
-          <a:bodyPr wrap="square" lIns="0" rIns="0" tIns="0" bIns="0" anchor="ctr">
+          <p:cNvPr id="5" name="TextBox 4"/>
+          <p:cNvSpPr txBox="1"/>
+          <p:nvPr/>
+        </p:nvSpPr>
+        <p:spPr>
+          <a:xfrm>
+            <a:off x="7772400" y="1508760"/>
+            <a:ext cx="3870655" cy="4206240"/>
+          </a:xfrm>
+          <a:prstGeom prst="rect">
+            <a:avLst/>
+          </a:prstGeom>
+          <a:noFill/>
+        </p:spPr>
+        <p:txBody>
+          <a:bodyPr wrap="square" lIns="0" rIns="0" tIns="0" bIns="0">
+            <a:spAutoFit/>
+          </a:bodyPr>
+          <a:lstStyle/>
+          <a:p>
+            <a:pPr marL="256032" indent="-256032">
+              <a:lnSpc>
+                <a:spcPct val="105000"/>
+              </a:lnSpc>
+              <a:spcAft>
+                <a:spcPts val="700"/>
+              </a:spcAft>
+              <a:buClr>
+                <a:srgbClr val="0D9488"/>
+              </a:buClr>
+              <a:buFont typeface="Arial"/>
+              <a:buChar char="•"/>
+            </a:pPr>
+            <a:r>
+              <a:rPr sz="1350" b="1">
+                <a:solidFill>
+                  <a:srgbClr val="0F172A"/>
+                </a:solidFill>
+                <a:latin typeface="Calibri"/>
+              </a:rPr>
+              <a:t>BẮT ĐẦU: </a:t>
+            </a:r>
+            <a:r>
+              <a:rPr sz="1350" b="0">
+                <a:solidFill>
+                  <a:srgbClr val="0F172A"/>
+                </a:solidFill>
+                <a:latin typeface="Calibri"/>
+              </a:rPr>
+              <a:t>Docker → CSDL → gói npm → API + giao diện, thanh % theo từng bước, tự mở ứng dụng.</a:t>
+            </a:r>
+          </a:p>
+          <a:p>
+            <a:pPr marL="256032" indent="-256032">
+              <a:lnSpc>
+                <a:spcPct val="105000"/>
+              </a:lnSpc>
+              <a:spcAft>
+                <a:spcPts val="700"/>
+              </a:spcAft>
+              <a:buClr>
+                <a:srgbClr val="0D9488"/>
+              </a:buClr>
+              <a:buFont typeface="Arial"/>
+              <a:buChar char="•"/>
+            </a:pPr>
+            <a:r>
+              <a:rPr sz="1350" b="1">
+                <a:solidFill>
+                  <a:srgbClr val="0F172A"/>
+                </a:solidFill>
+                <a:latin typeface="Calibri"/>
+              </a:rPr>
+              <a:t>CẬP NHẬT vX.Y.Z: </a:t>
+            </a:r>
+            <a:r>
+              <a:rPr sz="1350" b="0">
+                <a:solidFill>
+                  <a:srgbClr val="0F172A"/>
+                </a:solidFill>
+                <a:latin typeface="Calibri"/>
+              </a:rPr>
+              <a:t>thấy thẻ mới trên GitHub là đổi nút; sao lưu CSDL trước migration, lỗi tự quay về bản cũ.</a:t>
+            </a:r>
+          </a:p>
+          <a:p>
+            <a:pPr marL="256032" indent="-256032">
+              <a:lnSpc>
+                <a:spcPct val="105000"/>
+              </a:lnSpc>
+              <a:spcAft>
+                <a:spcPts val="700"/>
+              </a:spcAft>
+              <a:buClr>
+                <a:srgbClr val="0D9488"/>
+              </a:buClr>
+              <a:buFont typeface="Arial"/>
+              <a:buChar char="•"/>
+            </a:pPr>
+            <a:r>
+              <a:rPr sz="1350" b="1">
+                <a:solidFill>
+                  <a:srgbClr val="0F172A"/>
+                </a:solidFill>
+                <a:latin typeface="Calibri"/>
+              </a:rPr>
+              <a:t>Chẩn đoán: </a:t>
+            </a:r>
+            <a:r>
+              <a:rPr sz="1350" b="0">
+                <a:solidFill>
+                  <a:srgbClr val="0F172A"/>
+                </a:solidFill>
+                <a:latin typeface="Calibri"/>
+              </a:rPr>
+              <a:t>log Client / Server / CSDL trực tiếp, xuất system_logs.zip (đã ẩn mật khẩu), sao chép thông tin thiết bị.</a:t>
+            </a:r>
+          </a:p>
+          <a:p>
+            <a:pPr marL="256032" indent="-256032">
+              <a:lnSpc>
+                <a:spcPct val="105000"/>
+              </a:lnSpc>
+              <a:spcAft>
+                <a:spcPts val="700"/>
+              </a:spcAft>
+              <a:buClr>
+                <a:srgbClr val="0D9488"/>
+              </a:buClr>
+              <a:buFont typeface="Arial"/>
+              <a:buChar char="•"/>
+            </a:pPr>
+            <a:r>
+              <a:rPr sz="1350" b="1">
+                <a:solidFill>
+                  <a:srgbClr val="0F172A"/>
+                </a:solidFill>
+                <a:latin typeface="Calibri"/>
+              </a:rPr>
+              <a:t>An toàn: </a:t>
+            </a:r>
+            <a:r>
+              <a:rPr sz="1350" b="0">
+                <a:solidFill>
+                  <a:srgbClr val="0F172A"/>
+                </a:solidFill>
+                <a:latin typeface="Calibri"/>
+              </a:rPr>
+              <a:t>chỉ nghe 127.0.0.1, mã phiên ngẫu nhiên; đóng Launcher không tắt hệ thống.</a:t>
+            </a:r>
+          </a:p>
+          <a:p>
+            <a:pPr marL="256032" indent="-256032">
+              <a:lnSpc>
+                <a:spcPct val="105000"/>
+              </a:lnSpc>
+              <a:spcAft>
+                <a:spcPts val="700"/>
+              </a:spcAft>
+              <a:buClr>
+                <a:srgbClr val="0D9488"/>
+              </a:buClr>
+              <a:buFont typeface="Arial"/>
+              <a:buChar char="•"/>
+            </a:pPr>
+            <a:r>
+              <a:rPr sz="1350" b="1">
+                <a:solidFill>
+                  <a:srgbClr val="0F172A"/>
+                </a:solidFill>
+                <a:latin typeface="Calibri"/>
+              </a:rPr>
+              <a:t>Monorepo gọn: </a:t>
+            </a:r>
+            <a:r>
+              <a:rPr sz="1350" b="0">
+                <a:solidFill>
+                  <a:srgbClr val="0F172A"/>
+                </a:solidFill>
+                <a:latin typeface="Calibri"/>
+              </a:rPr>
+              <a:t>deploy/, docs/{reports,presentations,…}, scripts/{hoyo,lib,windows,unix}.</a:t>
+            </a:r>
+          </a:p>
+        </p:txBody>
+      </p:sp>
+      <p:sp>
+        <p:nvSpPr>
+          <p:cNvPr id="6" name="TextBox 5"/>
+          <p:cNvSpPr txBox="1"/>
+          <p:nvPr/>
+        </p:nvSpPr>
+        <p:spPr>
+          <a:xfrm>
+            <a:off x="548640" y="6446520"/>
+            <a:ext cx="7315200" cy="228600"/>
+          </a:xfrm>
+          <a:prstGeom prst="rect">
+            <a:avLst/>
+          </a:prstGeom>
+          <a:noFill/>
+        </p:spPr>
+        <p:txBody>
+          <a:bodyPr wrap="square" lIns="0" rIns="0" tIns="0" bIns="0" anchor="t">
             <a:spAutoFit/>
           </a:bodyPr>
           <a:lstStyle/>
@@ -9094,13 +7715,55 @@
               </a:spcAft>
             </a:pPr>
             <a:r>
-              <a:rPr sz="1300" b="0" i="0">
-                <a:solidFill>
-                  <a:srgbClr val="0F766E"/>
-                </a:solidFill>
-                <a:latin typeface="Calibri"/>
-              </a:rPr>
-              <a:t>Định nghĩa Hoàn thành: review + merge vào develop · build &amp; lint sạch · test đạt · story đối chiếu trong BACKLOG-MAPPING · chạy được trên staging dựng bằng một lệnh.</a:t>
+              <a:rPr sz="1000" b="0" i="0">
+                <a:solidFill>
+                  <a:srgbClr val="94A3B8"/>
+                </a:solidFill>
+                <a:latin typeface="Calibri"/>
+              </a:rPr>
+              <a:t>Nhóm 3 · TTCS_T926_K2S3_N3 · Hệ thống Đặt lịch và Quản lý Vận hành Salon - Spa</a:t>
+            </a:r>
+          </a:p>
+        </p:txBody>
+      </p:sp>
+      <p:sp>
+        <p:nvSpPr>
+          <p:cNvPr id="7" name="TextBox 6"/>
+          <p:cNvSpPr txBox="1"/>
+          <p:nvPr/>
+        </p:nvSpPr>
+        <p:spPr>
+          <a:xfrm>
+            <a:off x="10271455" y="6446520"/>
+            <a:ext cx="1371600" cy="228600"/>
+          </a:xfrm>
+          <a:prstGeom prst="rect">
+            <a:avLst/>
+          </a:prstGeom>
+          <a:noFill/>
+        </p:spPr>
+        <p:txBody>
+          <a:bodyPr wrap="square" lIns="0" rIns="0" tIns="0" bIns="0" anchor="t">
+            <a:spAutoFit/>
+          </a:bodyPr>
+          <a:lstStyle/>
+          <a:p>
+            <a:pPr algn="r">
+              <a:lnSpc>
+                <a:spcPct val="108000"/>
+              </a:lnSpc>
+              <a:spcAft>
+                <a:spcPts val="400"/>
+              </a:spcAft>
+            </a:pPr>
+            <a:r>
+              <a:rPr sz="1000" b="0" i="0">
+                <a:solidFill>
+                  <a:srgbClr val="94A3B8"/>
+                </a:solidFill>
+                <a:latin typeface="Calibri"/>
+              </a:rPr>
+              <a:t>11 / 13</a:t>
             </a:r>
           </a:p>
         </p:txBody>
@@ -9168,7 +7831,7 @@
                 </a:solidFill>
                 <a:latin typeface="Calibri"/>
               </a:rPr>
-              <a:t>12  ·  DEMO TRỰC TIẾP</a:t>
+              <a:t>12  ·  PHẢN HỒI MENTOR SPRINT 2 · 06/10</a:t>
             </a:r>
           </a:p>
         </p:txBody>
@@ -9210,7 +7873,7 @@
                 </a:solidFill>
                 <a:latin typeface="Calibri"/>
               </a:rPr>
-              <a:t>Kịch bản 6 bước — mỗi bước một vai trò</a:t>
+              <a:t>11 góp ý → 11 nhánh → v1.4.0, có kiểm thử từng mục</a:t>
             </a:r>
           </a:p>
         </p:txBody>
@@ -9223,8 +7886,8 @@
         </p:nvSpPr>
         <p:spPr>
           <a:xfrm>
-            <a:off x="548640" y="1554480"/>
-            <a:ext cx="3529584" cy="2194560"/>
+            <a:off x="548640" y="1417320"/>
+            <a:ext cx="3551834" cy="1051560"/>
           </a:xfrm>
           <a:prstGeom prst="roundRect">
             <a:avLst>
@@ -9267,249 +7930,140 @@
       </p:sp>
       <p:sp>
         <p:nvSpPr>
-          <p:cNvPr id="5" name="Oval 4"/>
+          <p:cNvPr id="5" name="TextBox 4"/>
+          <p:cNvSpPr txBox="1"/>
+          <p:nvPr/>
+        </p:nvSpPr>
+        <p:spPr>
+          <a:xfrm>
+            <a:off x="713232" y="1508760"/>
+            <a:ext cx="457200" cy="411480"/>
+          </a:xfrm>
+          <a:prstGeom prst="rect">
+            <a:avLst/>
+          </a:prstGeom>
+          <a:noFill/>
+        </p:spPr>
+        <p:txBody>
+          <a:bodyPr wrap="square" lIns="0" rIns="0" tIns="0" bIns="0" anchor="t">
+            <a:spAutoFit/>
+          </a:bodyPr>
+          <a:lstStyle/>
+          <a:p>
+            <a:pPr algn="l">
+              <a:lnSpc>
+                <a:spcPct val="108000"/>
+              </a:lnSpc>
+              <a:spcAft>
+                <a:spcPts val="400"/>
+              </a:spcAft>
+            </a:pPr>
+            <a:r>
+              <a:rPr sz="2000" b="1" i="0">
+                <a:solidFill>
+                  <a:srgbClr val="0D9488"/>
+                </a:solidFill>
+                <a:latin typeface="Calibri"/>
+              </a:rPr>
+              <a:t>1</a:t>
+            </a:r>
+          </a:p>
+        </p:txBody>
+      </p:sp>
+      <p:sp>
+        <p:nvSpPr>
+          <p:cNvPr id="6" name="TextBox 5"/>
+          <p:cNvSpPr txBox="1"/>
+          <p:nvPr/>
+        </p:nvSpPr>
+        <p:spPr>
+          <a:xfrm>
+            <a:off x="1170432" y="1527048"/>
+            <a:ext cx="2774594" cy="320040"/>
+          </a:xfrm>
+          <a:prstGeom prst="rect">
+            <a:avLst/>
+          </a:prstGeom>
+          <a:noFill/>
+        </p:spPr>
+        <p:txBody>
+          <a:bodyPr wrap="square" lIns="0" rIns="0" tIns="0" bIns="0" anchor="t">
+            <a:spAutoFit/>
+          </a:bodyPr>
+          <a:lstStyle/>
+          <a:p>
+            <a:pPr algn="l">
+              <a:lnSpc>
+                <a:spcPct val="108000"/>
+              </a:lnSpc>
+              <a:spcAft>
+                <a:spcPts val="400"/>
+              </a:spcAft>
+            </a:pPr>
+            <a:r>
+              <a:rPr sz="1300" b="1" i="0">
+                <a:solidFill>
+                  <a:srgbClr val="0F172A"/>
+                </a:solidFill>
+                <a:latin typeface="Calibri"/>
+              </a:rPr>
+              <a:t>Phân chia lại nhánh GitHub</a:t>
+            </a:r>
+          </a:p>
+        </p:txBody>
+      </p:sp>
+      <p:sp>
+        <p:nvSpPr>
+          <p:cNvPr id="7" name="TextBox 6"/>
+          <p:cNvSpPr txBox="1"/>
+          <p:nvPr/>
+        </p:nvSpPr>
+        <p:spPr>
+          <a:xfrm>
+            <a:off x="1170432" y="1837944"/>
+            <a:ext cx="2774594" cy="594360"/>
+          </a:xfrm>
+          <a:prstGeom prst="rect">
+            <a:avLst/>
+          </a:prstGeom>
+          <a:noFill/>
+        </p:spPr>
+        <p:txBody>
+          <a:bodyPr wrap="square" lIns="0" rIns="0" tIns="0" bIns="0" anchor="t">
+            <a:spAutoFit/>
+          </a:bodyPr>
+          <a:lstStyle/>
+          <a:p>
+            <a:pPr algn="l">
+              <a:lnSpc>
+                <a:spcPct val="108000"/>
+              </a:lnSpc>
+              <a:spcAft>
+                <a:spcPts val="400"/>
+              </a:spcAft>
+            </a:pPr>
+            <a:r>
+              <a:rPr sz="1050" b="0" i="0">
+                <a:solidFill>
+                  <a:srgbClr val="475569"/>
+                </a:solidFill>
+                <a:latin typeface="Calibri"/>
+              </a:rPr>
+              <a:t>main (Production) · develop (Staging) · feature/… · fix/… · docs/…; nhánh cũ lưu thành thẻ archive/…</a:t>
+            </a:r>
+          </a:p>
+        </p:txBody>
+      </p:sp>
+      <p:sp>
+        <p:nvSpPr>
+          <p:cNvPr id="8" name="Rounded Rectangle 7"/>
           <p:cNvSpPr/>
           <p:nvPr/>
         </p:nvSpPr>
         <p:spPr>
           <a:xfrm>
-            <a:off x="804672" y="1810512"/>
-            <a:ext cx="530352" cy="530352"/>
-          </a:xfrm>
-          <a:prstGeom prst="ellipse">
-            <a:avLst/>
-          </a:prstGeom>
-          <a:solidFill>
-            <a:srgbClr val="0D9488"/>
-          </a:solidFill>
-          <a:ln>
-            <a:noFill/>
-          </a:ln>
-        </p:spPr>
-        <p:style>
-          <a:lnRef idx="1">
-            <a:schemeClr val="accent1"/>
-          </a:lnRef>
-          <a:fillRef idx="3">
-            <a:schemeClr val="accent1"/>
-          </a:fillRef>
-          <a:effectRef idx="2">
-            <a:schemeClr val="accent1"/>
-          </a:effectRef>
-          <a:fontRef idx="minor">
-            <a:schemeClr val="lt1"/>
-          </a:fontRef>
-        </p:style>
-        <p:txBody>
-          <a:bodyPr rtlCol="0" anchor="ctr"/>
-          <a:lstStyle/>
-          <a:p>
-            <a:pPr algn="ctr"/>
-          </a:p>
-        </p:txBody>
-      </p:sp>
-      <p:pic>
-        <p:nvPicPr>
-          <p:cNvPr id="6" name="Picture 5" descr="phone_w.png"/>
-          <p:cNvPicPr>
-            <a:picLocks noChangeAspect="1"/>
-          </p:cNvPicPr>
-          <p:nvPr/>
-        </p:nvPicPr>
-        <p:blipFill>
-          <a:blip r:embed="rId2"/>
-          <a:stretch>
-            <a:fillRect/>
-          </a:stretch>
-        </p:blipFill>
-        <p:spPr>
-          <a:xfrm>
-            <a:off x="931956" y="1937796"/>
-            <a:ext cx="275784" cy="275784"/>
-          </a:xfrm>
-          <a:prstGeom prst="rect">
-            <a:avLst/>
-          </a:prstGeom>
-        </p:spPr>
-      </p:pic>
-      <p:sp>
-        <p:nvSpPr>
-          <p:cNvPr id="7" name="TextBox 6"/>
-          <p:cNvSpPr txBox="1"/>
-          <p:nvPr/>
-        </p:nvSpPr>
-        <p:spPr>
-          <a:xfrm>
-            <a:off x="3209544" y="1737360"/>
-            <a:ext cx="640080" cy="640080"/>
-          </a:xfrm>
-          <a:prstGeom prst="rect">
-            <a:avLst/>
-          </a:prstGeom>
-          <a:noFill/>
-        </p:spPr>
-        <p:txBody>
-          <a:bodyPr wrap="square" lIns="0" rIns="0" tIns="0" bIns="0" anchor="t">
-            <a:spAutoFit/>
-          </a:bodyPr>
-          <a:lstStyle/>
-          <a:p>
-            <a:pPr algn="r">
-              <a:lnSpc>
-                <a:spcPct val="108000"/>
-              </a:lnSpc>
-              <a:spcAft>
-                <a:spcPts val="400"/>
-              </a:spcAft>
-            </a:pPr>
-            <a:r>
-              <a:rPr sz="3600" b="1" i="0">
-                <a:solidFill>
-                  <a:srgbClr val="CCFBF1"/>
-                </a:solidFill>
-                <a:latin typeface="Calibri"/>
-              </a:rPr>
-              <a:t>1</a:t>
-            </a:r>
-          </a:p>
-        </p:txBody>
-      </p:sp>
-      <p:sp>
-        <p:nvSpPr>
-          <p:cNvPr id="8" name="TextBox 7"/>
-          <p:cNvSpPr txBox="1"/>
-          <p:nvPr/>
-        </p:nvSpPr>
-        <p:spPr>
-          <a:xfrm>
-            <a:off x="804672" y="2468880"/>
-            <a:ext cx="3072384" cy="320040"/>
-          </a:xfrm>
-          <a:prstGeom prst="rect">
-            <a:avLst/>
-          </a:prstGeom>
-          <a:noFill/>
-        </p:spPr>
-        <p:txBody>
-          <a:bodyPr wrap="square" lIns="0" rIns="0" tIns="0" bIns="0" anchor="t">
-            <a:spAutoFit/>
-          </a:bodyPr>
-          <a:lstStyle/>
-          <a:p>
-            <a:pPr algn="l">
-              <a:lnSpc>
-                <a:spcPct val="108000"/>
-              </a:lnSpc>
-              <a:spcAft>
-                <a:spcPts val="400"/>
-              </a:spcAft>
-            </a:pPr>
-            <a:r>
-              <a:rPr sz="1700" b="1" i="0">
-                <a:solidFill>
-                  <a:srgbClr val="0F172A"/>
-                </a:solidFill>
-                <a:latin typeface="Calibri"/>
-              </a:rPr>
-              <a:t>Khách đặt lịch</a:t>
-            </a:r>
-          </a:p>
-        </p:txBody>
-      </p:sp>
-      <p:sp>
-        <p:nvSpPr>
-          <p:cNvPr id="9" name="TextBox 8"/>
-          <p:cNvSpPr txBox="1"/>
-          <p:nvPr/>
-        </p:nvSpPr>
-        <p:spPr>
-          <a:xfrm>
-            <a:off x="804672" y="2798064"/>
-            <a:ext cx="3072384" cy="274320"/>
-          </a:xfrm>
-          <a:prstGeom prst="rect">
-            <a:avLst/>
-          </a:prstGeom>
-          <a:noFill/>
-        </p:spPr>
-        <p:txBody>
-          <a:bodyPr wrap="square" lIns="0" rIns="0" tIns="0" bIns="0" anchor="t">
-            <a:spAutoFit/>
-          </a:bodyPr>
-          <a:lstStyle/>
-          <a:p>
-            <a:pPr algn="l">
-              <a:lnSpc>
-                <a:spcPct val="108000"/>
-              </a:lnSpc>
-              <a:spcAft>
-                <a:spcPts val="400"/>
-              </a:spcAft>
-            </a:pPr>
-            <a:r>
-              <a:rPr sz="1200" b="1" i="0">
-                <a:solidFill>
-                  <a:srgbClr val="0F766E"/>
-                </a:solidFill>
-                <a:latin typeface="Calibri"/>
-              </a:rPr>
-              <a:t>Cửa sổ ẩn danh · /dat-lich</a:t>
-            </a:r>
-          </a:p>
-        </p:txBody>
-      </p:sp>
-      <p:sp>
-        <p:nvSpPr>
-          <p:cNvPr id="10" name="TextBox 9"/>
-          <p:cNvSpPr txBox="1"/>
-          <p:nvPr/>
-        </p:nvSpPr>
-        <p:spPr>
-          <a:xfrm>
-            <a:off x="804672" y="3090672"/>
-            <a:ext cx="3072384" cy="640080"/>
-          </a:xfrm>
-          <a:prstGeom prst="rect">
-            <a:avLst/>
-          </a:prstGeom>
-          <a:noFill/>
-        </p:spPr>
-        <p:txBody>
-          <a:bodyPr wrap="square" lIns="0" rIns="0" tIns="0" bIns="0" anchor="t">
-            <a:spAutoFit/>
-          </a:bodyPr>
-          <a:lstStyle/>
-          <a:p>
-            <a:pPr algn="l">
-              <a:lnSpc>
-                <a:spcPct val="108000"/>
-              </a:lnSpc>
-              <a:spcAft>
-                <a:spcPts val="400"/>
-              </a:spcAft>
-            </a:pPr>
-            <a:r>
-              <a:rPr sz="1250" b="0" i="0">
-                <a:solidFill>
-                  <a:srgbClr val="475569"/>
-                </a:solidFill>
-                <a:latin typeface="Calibri"/>
-              </a:rPr>
-              <a:t>Cắt tóc nam + Nhuộm → khung giờ 150 phút → mã 8 ký tự, email ở Maildev</a:t>
-            </a:r>
-          </a:p>
-        </p:txBody>
-      </p:sp>
-      <p:sp>
-        <p:nvSpPr>
-          <p:cNvPr id="11" name="Rounded Rectangle 10"/>
-          <p:cNvSpPr/>
-          <p:nvPr/>
-        </p:nvSpPr>
-        <p:spPr>
-          <a:xfrm>
-            <a:off x="4315968" y="1554480"/>
-            <a:ext cx="3529584" cy="2194560"/>
+            <a:off x="4319930" y="1417320"/>
+            <a:ext cx="3551834" cy="1051560"/>
           </a:xfrm>
           <a:prstGeom prst="roundRect">
             <a:avLst>
@@ -9552,249 +8106,140 @@
       </p:sp>
       <p:sp>
         <p:nvSpPr>
-          <p:cNvPr id="12" name="Oval 11"/>
+          <p:cNvPr id="9" name="TextBox 8"/>
+          <p:cNvSpPr txBox="1"/>
+          <p:nvPr/>
+        </p:nvSpPr>
+        <p:spPr>
+          <a:xfrm>
+            <a:off x="4484522" y="1508760"/>
+            <a:ext cx="457200" cy="411480"/>
+          </a:xfrm>
+          <a:prstGeom prst="rect">
+            <a:avLst/>
+          </a:prstGeom>
+          <a:noFill/>
+        </p:spPr>
+        <p:txBody>
+          <a:bodyPr wrap="square" lIns="0" rIns="0" tIns="0" bIns="0" anchor="t">
+            <a:spAutoFit/>
+          </a:bodyPr>
+          <a:lstStyle/>
+          <a:p>
+            <a:pPr algn="l">
+              <a:lnSpc>
+                <a:spcPct val="108000"/>
+              </a:lnSpc>
+              <a:spcAft>
+                <a:spcPts val="400"/>
+              </a:spcAft>
+            </a:pPr>
+            <a:r>
+              <a:rPr sz="2000" b="1" i="0">
+                <a:solidFill>
+                  <a:srgbClr val="0D9488"/>
+                </a:solidFill>
+                <a:latin typeface="Calibri"/>
+              </a:rPr>
+              <a:t>2</a:t>
+            </a:r>
+          </a:p>
+        </p:txBody>
+      </p:sp>
+      <p:sp>
+        <p:nvSpPr>
+          <p:cNvPr id="10" name="TextBox 9"/>
+          <p:cNvSpPr txBox="1"/>
+          <p:nvPr/>
+        </p:nvSpPr>
+        <p:spPr>
+          <a:xfrm>
+            <a:off x="4941722" y="1527048"/>
+            <a:ext cx="2774594" cy="320040"/>
+          </a:xfrm>
+          <a:prstGeom prst="rect">
+            <a:avLst/>
+          </a:prstGeom>
+          <a:noFill/>
+        </p:spPr>
+        <p:txBody>
+          <a:bodyPr wrap="square" lIns="0" rIns="0" tIns="0" bIns="0" anchor="t">
+            <a:spAutoFit/>
+          </a:bodyPr>
+          <a:lstStyle/>
+          <a:p>
+            <a:pPr algn="l">
+              <a:lnSpc>
+                <a:spcPct val="108000"/>
+              </a:lnSpc>
+              <a:spcAft>
+                <a:spcPts val="400"/>
+              </a:spcAft>
+            </a:pPr>
+            <a:r>
+              <a:rPr sz="1300" b="1" i="0">
+                <a:solidFill>
+                  <a:srgbClr val="0F172A"/>
+                </a:solidFill>
+                <a:latin typeface="Calibri"/>
+              </a:rPr>
+              <a:t>Bảng ca làm rối mắt</a:t>
+            </a:r>
+          </a:p>
+        </p:txBody>
+      </p:sp>
+      <p:sp>
+        <p:nvSpPr>
+          <p:cNvPr id="11" name="TextBox 10"/>
+          <p:cNvSpPr txBox="1"/>
+          <p:nvPr/>
+        </p:nvSpPr>
+        <p:spPr>
+          <a:xfrm>
+            <a:off x="4941722" y="1837944"/>
+            <a:ext cx="2774594" cy="594360"/>
+          </a:xfrm>
+          <a:prstGeom prst="rect">
+            <a:avLst/>
+          </a:prstGeom>
+          <a:noFill/>
+        </p:spPr>
+        <p:txBody>
+          <a:bodyPr wrap="square" lIns="0" rIns="0" tIns="0" bIns="0" anchor="t">
+            <a:spAutoFit/>
+          </a:bodyPr>
+          <a:lstStyle/>
+          <a:p>
+            <a:pPr algn="l">
+              <a:lnSpc>
+                <a:spcPct val="108000"/>
+              </a:lnSpc>
+              <a:spcAft>
+                <a:spcPts val="400"/>
+              </a:spcAft>
+            </a:pPr>
+            <a:r>
+              <a:rPr sz="1050" b="0" i="0">
+                <a:solidFill>
+                  <a:srgbClr val="475569"/>
+                </a:solidFill>
+                <a:latin typeface="Calibri"/>
+              </a:rPr>
+              <a:t>Lưới thợ × ngày, ca tô màu theo buổi, nút ẩn tới khi rê chuột, đếm thợ trực</a:t>
+            </a:r>
+          </a:p>
+        </p:txBody>
+      </p:sp>
+      <p:sp>
+        <p:nvSpPr>
+          <p:cNvPr id="12" name="Rounded Rectangle 11"/>
           <p:cNvSpPr/>
           <p:nvPr/>
         </p:nvSpPr>
         <p:spPr>
           <a:xfrm>
-            <a:off x="4572000" y="1810512"/>
-            <a:ext cx="530352" cy="530352"/>
-          </a:xfrm>
-          <a:prstGeom prst="ellipse">
-            <a:avLst/>
-          </a:prstGeom>
-          <a:solidFill>
-            <a:srgbClr val="0D9488"/>
-          </a:solidFill>
-          <a:ln>
-            <a:noFill/>
-          </a:ln>
-        </p:spPr>
-        <p:style>
-          <a:lnRef idx="1">
-            <a:schemeClr val="accent1"/>
-          </a:lnRef>
-          <a:fillRef idx="3">
-            <a:schemeClr val="accent1"/>
-          </a:fillRef>
-          <a:effectRef idx="2">
-            <a:schemeClr val="accent1"/>
-          </a:effectRef>
-          <a:fontRef idx="minor">
-            <a:schemeClr val="lt1"/>
-          </a:fontRef>
-        </p:style>
-        <p:txBody>
-          <a:bodyPr rtlCol="0" anchor="ctr"/>
-          <a:lstStyle/>
-          <a:p>
-            <a:pPr algn="ctr"/>
-          </a:p>
-        </p:txBody>
-      </p:sp>
-      <p:pic>
-        <p:nvPicPr>
-          <p:cNvPr id="13" name="Picture 12" descr="lock_w.png"/>
-          <p:cNvPicPr>
-            <a:picLocks noChangeAspect="1"/>
-          </p:cNvPicPr>
-          <p:nvPr/>
-        </p:nvPicPr>
-        <p:blipFill>
-          <a:blip r:embed="rId3"/>
-          <a:stretch>
-            <a:fillRect/>
-          </a:stretch>
-        </p:blipFill>
-        <p:spPr>
-          <a:xfrm>
-            <a:off x="4699284" y="1937796"/>
-            <a:ext cx="275784" cy="275784"/>
-          </a:xfrm>
-          <a:prstGeom prst="rect">
-            <a:avLst/>
-          </a:prstGeom>
-        </p:spPr>
-      </p:pic>
-      <p:sp>
-        <p:nvSpPr>
-          <p:cNvPr id="14" name="TextBox 13"/>
-          <p:cNvSpPr txBox="1"/>
-          <p:nvPr/>
-        </p:nvSpPr>
-        <p:spPr>
-          <a:xfrm>
-            <a:off x="6976872" y="1737360"/>
-            <a:ext cx="640080" cy="640080"/>
-          </a:xfrm>
-          <a:prstGeom prst="rect">
-            <a:avLst/>
-          </a:prstGeom>
-          <a:noFill/>
-        </p:spPr>
-        <p:txBody>
-          <a:bodyPr wrap="square" lIns="0" rIns="0" tIns="0" bIns="0" anchor="t">
-            <a:spAutoFit/>
-          </a:bodyPr>
-          <a:lstStyle/>
-          <a:p>
-            <a:pPr algn="r">
-              <a:lnSpc>
-                <a:spcPct val="108000"/>
-              </a:lnSpc>
-              <a:spcAft>
-                <a:spcPts val="400"/>
-              </a:spcAft>
-            </a:pPr>
-            <a:r>
-              <a:rPr sz="3600" b="1" i="0">
-                <a:solidFill>
-                  <a:srgbClr val="CCFBF1"/>
-                </a:solidFill>
-                <a:latin typeface="Calibri"/>
-              </a:rPr>
-              <a:t>2</a:t>
-            </a:r>
-          </a:p>
-        </p:txBody>
-      </p:sp>
-      <p:sp>
-        <p:nvSpPr>
-          <p:cNvPr id="15" name="TextBox 14"/>
-          <p:cNvSpPr txBox="1"/>
-          <p:nvPr/>
-        </p:nvSpPr>
-        <p:spPr>
-          <a:xfrm>
-            <a:off x="4572000" y="2468880"/>
-            <a:ext cx="3072384" cy="320040"/>
-          </a:xfrm>
-          <a:prstGeom prst="rect">
-            <a:avLst/>
-          </a:prstGeom>
-          <a:noFill/>
-        </p:spPr>
-        <p:txBody>
-          <a:bodyPr wrap="square" lIns="0" rIns="0" tIns="0" bIns="0" anchor="t">
-            <a:spAutoFit/>
-          </a:bodyPr>
-          <a:lstStyle/>
-          <a:p>
-            <a:pPr algn="l">
-              <a:lnSpc>
-                <a:spcPct val="108000"/>
-              </a:lnSpc>
-              <a:spcAft>
-                <a:spcPts val="400"/>
-              </a:spcAft>
-            </a:pPr>
-            <a:r>
-              <a:rPr sz="1700" b="1" i="0">
-                <a:solidFill>
-                  <a:srgbClr val="0F172A"/>
-                </a:solidFill>
-                <a:latin typeface="Calibri"/>
-              </a:rPr>
-              <a:t>Chống đặt trùng</a:t>
-            </a:r>
-          </a:p>
-        </p:txBody>
-      </p:sp>
-      <p:sp>
-        <p:nvSpPr>
-          <p:cNvPr id="16" name="TextBox 15"/>
-          <p:cNvSpPr txBox="1"/>
-          <p:nvPr/>
-        </p:nvSpPr>
-        <p:spPr>
-          <a:xfrm>
-            <a:off x="4572000" y="2798064"/>
-            <a:ext cx="3072384" cy="274320"/>
-          </a:xfrm>
-          <a:prstGeom prst="rect">
-            <a:avLst/>
-          </a:prstGeom>
-          <a:noFill/>
-        </p:spPr>
-        <p:txBody>
-          <a:bodyPr wrap="square" lIns="0" rIns="0" tIns="0" bIns="0" anchor="t">
-            <a:spAutoFit/>
-          </a:bodyPr>
-          <a:lstStyle/>
-          <a:p>
-            <a:pPr algn="l">
-              <a:lnSpc>
-                <a:spcPct val="108000"/>
-              </a:lnSpc>
-              <a:spcAft>
-                <a:spcPts val="400"/>
-              </a:spcAft>
-            </a:pPr>
-            <a:r>
-              <a:rPr sz="1200" b="1" i="0">
-                <a:solidFill>
-                  <a:srgbClr val="0F766E"/>
-                </a:solidFill>
-                <a:latin typeface="Calibri"/>
-              </a:rPr>
-              <a:t>Terminal</a:t>
-            </a:r>
-          </a:p>
-        </p:txBody>
-      </p:sp>
-      <p:sp>
-        <p:nvSpPr>
-          <p:cNvPr id="17" name="TextBox 16"/>
-          <p:cNvSpPr txBox="1"/>
-          <p:nvPr/>
-        </p:nvSpPr>
-        <p:spPr>
-          <a:xfrm>
-            <a:off x="4572000" y="3090672"/>
-            <a:ext cx="3072384" cy="640080"/>
-          </a:xfrm>
-          <a:prstGeom prst="rect">
-            <a:avLst/>
-          </a:prstGeom>
-          <a:noFill/>
-        </p:spPr>
-        <p:txBody>
-          <a:bodyPr wrap="square" lIns="0" rIns="0" tIns="0" bIns="0" anchor="t">
-            <a:spAutoFit/>
-          </a:bodyPr>
-          <a:lstStyle/>
-          <a:p>
-            <a:pPr algn="l">
-              <a:lnSpc>
-                <a:spcPct val="108000"/>
-              </a:lnSpc>
-              <a:spcAft>
-                <a:spcPts val="400"/>
-              </a:spcAft>
-            </a:pPr>
-            <a:r>
-              <a:rPr sz="1250" b="0" i="0">
-                <a:solidFill>
-                  <a:srgbClr val="475569"/>
-                </a:solidFill>
-                <a:latin typeface="Calibri"/>
-              </a:rPr>
-              <a:t>npm run test:e2e -- booking-concurrency → 1 thành công / 19 nhận 409</a:t>
-            </a:r>
-          </a:p>
-        </p:txBody>
-      </p:sp>
-      <p:sp>
-        <p:nvSpPr>
-          <p:cNvPr id="18" name="Rounded Rectangle 17"/>
-          <p:cNvSpPr/>
-          <p:nvPr/>
-        </p:nvSpPr>
-        <p:spPr>
-          <a:xfrm>
-            <a:off x="8083296" y="1554480"/>
-            <a:ext cx="3529584" cy="2194560"/>
+            <a:off x="8091220" y="1417320"/>
+            <a:ext cx="3551834" cy="1051560"/>
           </a:xfrm>
           <a:prstGeom prst="roundRect">
             <a:avLst>
@@ -9837,249 +8282,140 @@
       </p:sp>
       <p:sp>
         <p:nvSpPr>
-          <p:cNvPr id="19" name="Oval 18"/>
+          <p:cNvPr id="13" name="TextBox 12"/>
+          <p:cNvSpPr txBox="1"/>
+          <p:nvPr/>
+        </p:nvSpPr>
+        <p:spPr>
+          <a:xfrm>
+            <a:off x="8255812" y="1508760"/>
+            <a:ext cx="457200" cy="411480"/>
+          </a:xfrm>
+          <a:prstGeom prst="rect">
+            <a:avLst/>
+          </a:prstGeom>
+          <a:noFill/>
+        </p:spPr>
+        <p:txBody>
+          <a:bodyPr wrap="square" lIns="0" rIns="0" tIns="0" bIns="0" anchor="t">
+            <a:spAutoFit/>
+          </a:bodyPr>
+          <a:lstStyle/>
+          <a:p>
+            <a:pPr algn="l">
+              <a:lnSpc>
+                <a:spcPct val="108000"/>
+              </a:lnSpc>
+              <a:spcAft>
+                <a:spcPts val="400"/>
+              </a:spcAft>
+            </a:pPr>
+            <a:r>
+              <a:rPr sz="2000" b="1" i="0">
+                <a:solidFill>
+                  <a:srgbClr val="0D9488"/>
+                </a:solidFill>
+                <a:latin typeface="Calibri"/>
+              </a:rPr>
+              <a:t>3</a:t>
+            </a:r>
+          </a:p>
+        </p:txBody>
+      </p:sp>
+      <p:sp>
+        <p:nvSpPr>
+          <p:cNvPr id="14" name="TextBox 13"/>
+          <p:cNvSpPr txBox="1"/>
+          <p:nvPr/>
+        </p:nvSpPr>
+        <p:spPr>
+          <a:xfrm>
+            <a:off x="8713012" y="1527048"/>
+            <a:ext cx="2774594" cy="320040"/>
+          </a:xfrm>
+          <a:prstGeom prst="rect">
+            <a:avLst/>
+          </a:prstGeom>
+          <a:noFill/>
+        </p:spPr>
+        <p:txBody>
+          <a:bodyPr wrap="square" lIns="0" rIns="0" tIns="0" bIns="0" anchor="t">
+            <a:spAutoFit/>
+          </a:bodyPr>
+          <a:lstStyle/>
+          <a:p>
+            <a:pPr algn="l">
+              <a:lnSpc>
+                <a:spcPct val="108000"/>
+              </a:lnSpc>
+              <a:spcAft>
+                <a:spcPts val="400"/>
+              </a:spcAft>
+            </a:pPr>
+            <a:r>
+              <a:rPr sz="1300" b="1" i="0">
+                <a:solidFill>
+                  <a:srgbClr val="0F172A"/>
+                </a:solidFill>
+                <a:latin typeface="Calibri"/>
+              </a:rPr>
+              <a:t>Chọn giờ 24 giờ</a:t>
+            </a:r>
+          </a:p>
+        </p:txBody>
+      </p:sp>
+      <p:sp>
+        <p:nvSpPr>
+          <p:cNvPr id="15" name="TextBox 14"/>
+          <p:cNvSpPr txBox="1"/>
+          <p:nvPr/>
+        </p:nvSpPr>
+        <p:spPr>
+          <a:xfrm>
+            <a:off x="8713012" y="1837944"/>
+            <a:ext cx="2774594" cy="594360"/>
+          </a:xfrm>
+          <a:prstGeom prst="rect">
+            <a:avLst/>
+          </a:prstGeom>
+          <a:noFill/>
+        </p:spPr>
+        <p:txBody>
+          <a:bodyPr wrap="square" lIns="0" rIns="0" tIns="0" bIns="0" anchor="t">
+            <a:spAutoFit/>
+          </a:bodyPr>
+          <a:lstStyle/>
+          <a:p>
+            <a:pPr algn="l">
+              <a:lnSpc>
+                <a:spcPct val="108000"/>
+              </a:lnSpc>
+              <a:spcAft>
+                <a:spcPts val="400"/>
+              </a:spcAft>
+            </a:pPr>
+            <a:r>
+              <a:rPr sz="1050" b="0" i="0">
+                <a:solidFill>
+                  <a:srgbClr val="475569"/>
+                </a:solidFill>
+                <a:latin typeface="Calibri"/>
+              </a:rPr>
+              <a:t>TimeSelect24: 00:00 → 23:45, bước 15 phút, không phụ thuộc SA/CH</a:t>
+            </a:r>
+          </a:p>
+        </p:txBody>
+      </p:sp>
+      <p:sp>
+        <p:nvSpPr>
+          <p:cNvPr id="16" name="Rounded Rectangle 15"/>
           <p:cNvSpPr/>
           <p:nvPr/>
         </p:nvSpPr>
         <p:spPr>
           <a:xfrm>
-            <a:off x="8339328" y="1810512"/>
-            <a:ext cx="530352" cy="530352"/>
-          </a:xfrm>
-          <a:prstGeom prst="ellipse">
-            <a:avLst/>
-          </a:prstGeom>
-          <a:solidFill>
-            <a:srgbClr val="0D9488"/>
-          </a:solidFill>
-          <a:ln>
-            <a:noFill/>
-          </a:ln>
-        </p:spPr>
-        <p:style>
-          <a:lnRef idx="1">
-            <a:schemeClr val="accent1"/>
-          </a:lnRef>
-          <a:fillRef idx="3">
-            <a:schemeClr val="accent1"/>
-          </a:fillRef>
-          <a:effectRef idx="2">
-            <a:schemeClr val="accent1"/>
-          </a:effectRef>
-          <a:fontRef idx="minor">
-            <a:schemeClr val="lt1"/>
-          </a:fontRef>
-        </p:style>
-        <p:txBody>
-          <a:bodyPr rtlCol="0" anchor="ctr"/>
-          <a:lstStyle/>
-          <a:p>
-            <a:pPr algn="ctr"/>
-          </a:p>
-        </p:txBody>
-      </p:sp>
-      <p:pic>
-        <p:nvPicPr>
-          <p:cNvPr id="20" name="Picture 19" descr="calendar_w.png"/>
-          <p:cNvPicPr>
-            <a:picLocks noChangeAspect="1"/>
-          </p:cNvPicPr>
-          <p:nvPr/>
-        </p:nvPicPr>
-        <p:blipFill>
-          <a:blip r:embed="rId4"/>
-          <a:stretch>
-            <a:fillRect/>
-          </a:stretch>
-        </p:blipFill>
-        <p:spPr>
-          <a:xfrm>
-            <a:off x="8466612" y="1937796"/>
-            <a:ext cx="275784" cy="275784"/>
-          </a:xfrm>
-          <a:prstGeom prst="rect">
-            <a:avLst/>
-          </a:prstGeom>
-        </p:spPr>
-      </p:pic>
-      <p:sp>
-        <p:nvSpPr>
-          <p:cNvPr id="21" name="TextBox 20"/>
-          <p:cNvSpPr txBox="1"/>
-          <p:nvPr/>
-        </p:nvSpPr>
-        <p:spPr>
-          <a:xfrm>
-            <a:off x="10744200" y="1737360"/>
-            <a:ext cx="640080" cy="640080"/>
-          </a:xfrm>
-          <a:prstGeom prst="rect">
-            <a:avLst/>
-          </a:prstGeom>
-          <a:noFill/>
-        </p:spPr>
-        <p:txBody>
-          <a:bodyPr wrap="square" lIns="0" rIns="0" tIns="0" bIns="0" anchor="t">
-            <a:spAutoFit/>
-          </a:bodyPr>
-          <a:lstStyle/>
-          <a:p>
-            <a:pPr algn="r">
-              <a:lnSpc>
-                <a:spcPct val="108000"/>
-              </a:lnSpc>
-              <a:spcAft>
-                <a:spcPts val="400"/>
-              </a:spcAft>
-            </a:pPr>
-            <a:r>
-              <a:rPr sz="3600" b="1" i="0">
-                <a:solidFill>
-                  <a:srgbClr val="CCFBF1"/>
-                </a:solidFill>
-                <a:latin typeface="Calibri"/>
-              </a:rPr>
-              <a:t>3</a:t>
-            </a:r>
-          </a:p>
-        </p:txBody>
-      </p:sp>
-      <p:sp>
-        <p:nvSpPr>
-          <p:cNvPr id="22" name="TextBox 21"/>
-          <p:cNvSpPr txBox="1"/>
-          <p:nvPr/>
-        </p:nvSpPr>
-        <p:spPr>
-          <a:xfrm>
-            <a:off x="8339328" y="2468880"/>
-            <a:ext cx="3072384" cy="320040"/>
-          </a:xfrm>
-          <a:prstGeom prst="rect">
-            <a:avLst/>
-          </a:prstGeom>
-          <a:noFill/>
-        </p:spPr>
-        <p:txBody>
-          <a:bodyPr wrap="square" lIns="0" rIns="0" tIns="0" bIns="0" anchor="t">
-            <a:spAutoFit/>
-          </a:bodyPr>
-          <a:lstStyle/>
-          <a:p>
-            <a:pPr algn="l">
-              <a:lnSpc>
-                <a:spcPct val="108000"/>
-              </a:lnSpc>
-              <a:spcAft>
-                <a:spcPts val="400"/>
-              </a:spcAft>
-            </a:pPr>
-            <a:r>
-              <a:rPr sz="1700" b="1" i="0">
-                <a:solidFill>
-                  <a:srgbClr val="0F172A"/>
-                </a:solidFill>
-                <a:latin typeface="Calibri"/>
-              </a:rPr>
-              <a:t>Lễ tân điều phối</a:t>
-            </a:r>
-          </a:p>
-        </p:txBody>
-      </p:sp>
-      <p:sp>
-        <p:nvSpPr>
-          <p:cNvPr id="23" name="TextBox 22"/>
-          <p:cNvSpPr txBox="1"/>
-          <p:nvPr/>
-        </p:nvSpPr>
-        <p:spPr>
-          <a:xfrm>
-            <a:off x="8339328" y="2798064"/>
-            <a:ext cx="3072384" cy="274320"/>
-          </a:xfrm>
-          <a:prstGeom prst="rect">
-            <a:avLst/>
-          </a:prstGeom>
-          <a:noFill/>
-        </p:spPr>
-        <p:txBody>
-          <a:bodyPr wrap="square" lIns="0" rIns="0" tIns="0" bIns="0" anchor="t">
-            <a:spAutoFit/>
-          </a:bodyPr>
-          <a:lstStyle/>
-          <a:p>
-            <a:pPr algn="l">
-              <a:lnSpc>
-                <a:spcPct val="108000"/>
-              </a:lnSpc>
-              <a:spcAft>
-                <a:spcPts val="400"/>
-              </a:spcAft>
-            </a:pPr>
-            <a:r>
-              <a:rPr sz="1200" b="1" i="0">
-                <a:solidFill>
-                  <a:srgbClr val="0F766E"/>
-                </a:solidFill>
-                <a:latin typeface="Calibri"/>
-              </a:rPr>
-              <a:t>reception@salon.vn</a:t>
-            </a:r>
-          </a:p>
-        </p:txBody>
-      </p:sp>
-      <p:sp>
-        <p:nvSpPr>
-          <p:cNvPr id="24" name="TextBox 23"/>
-          <p:cNvSpPr txBox="1"/>
-          <p:nvPr/>
-        </p:nvSpPr>
-        <p:spPr>
-          <a:xfrm>
-            <a:off x="8339328" y="3090672"/>
-            <a:ext cx="3072384" cy="640080"/>
-          </a:xfrm>
-          <a:prstGeom prst="rect">
-            <a:avLst/>
-          </a:prstGeom>
-          <a:noFill/>
-        </p:spPr>
-        <p:txBody>
-          <a:bodyPr wrap="square" lIns="0" rIns="0" tIns="0" bIns="0" anchor="t">
-            <a:spAutoFit/>
-          </a:bodyPr>
-          <a:lstStyle/>
-          <a:p>
-            <a:pPr algn="l">
-              <a:lnSpc>
-                <a:spcPct val="108000"/>
-              </a:lnSpc>
-              <a:spcAft>
-                <a:spcPts val="400"/>
-              </a:spcAft>
-            </a:pPr>
-            <a:r>
-              <a:rPr sz="1250" b="0" i="0">
-                <a:solidFill>
-                  <a:srgbClr val="475569"/>
-                </a:solidFill>
-                <a:latin typeface="Calibri"/>
-              </a:rPr>
-              <a:t>Xác nhận lịch vừa đặt, tạo khách vãng lai, check-in trên Lịch ngày</a:t>
-            </a:r>
-          </a:p>
-        </p:txBody>
-      </p:sp>
-      <p:sp>
-        <p:nvSpPr>
-          <p:cNvPr id="25" name="Rounded Rectangle 24"/>
-          <p:cNvSpPr/>
-          <p:nvPr/>
-        </p:nvSpPr>
-        <p:spPr>
-          <a:xfrm>
-            <a:off x="548640" y="3977640"/>
-            <a:ext cx="3529584" cy="2194560"/>
+            <a:off x="548640" y="2578608"/>
+            <a:ext cx="3551834" cy="1051560"/>
           </a:xfrm>
           <a:prstGeom prst="roundRect">
             <a:avLst>
@@ -10122,249 +8458,140 @@
       </p:sp>
       <p:sp>
         <p:nvSpPr>
-          <p:cNvPr id="26" name="Oval 25"/>
+          <p:cNvPr id="17" name="TextBox 16"/>
+          <p:cNvSpPr txBox="1"/>
+          <p:nvPr/>
+        </p:nvSpPr>
+        <p:spPr>
+          <a:xfrm>
+            <a:off x="713232" y="2670048"/>
+            <a:ext cx="457200" cy="411480"/>
+          </a:xfrm>
+          <a:prstGeom prst="rect">
+            <a:avLst/>
+          </a:prstGeom>
+          <a:noFill/>
+        </p:spPr>
+        <p:txBody>
+          <a:bodyPr wrap="square" lIns="0" rIns="0" tIns="0" bIns="0" anchor="t">
+            <a:spAutoFit/>
+          </a:bodyPr>
+          <a:lstStyle/>
+          <a:p>
+            <a:pPr algn="l">
+              <a:lnSpc>
+                <a:spcPct val="108000"/>
+              </a:lnSpc>
+              <a:spcAft>
+                <a:spcPts val="400"/>
+              </a:spcAft>
+            </a:pPr>
+            <a:r>
+              <a:rPr sz="2000" b="1" i="0">
+                <a:solidFill>
+                  <a:srgbClr val="0D9488"/>
+                </a:solidFill>
+                <a:latin typeface="Calibri"/>
+              </a:rPr>
+              <a:t>4</a:t>
+            </a:r>
+          </a:p>
+        </p:txBody>
+      </p:sp>
+      <p:sp>
+        <p:nvSpPr>
+          <p:cNvPr id="18" name="TextBox 17"/>
+          <p:cNvSpPr txBox="1"/>
+          <p:nvPr/>
+        </p:nvSpPr>
+        <p:spPr>
+          <a:xfrm>
+            <a:off x="1170432" y="2688336"/>
+            <a:ext cx="2774594" cy="320040"/>
+          </a:xfrm>
+          <a:prstGeom prst="rect">
+            <a:avLst/>
+          </a:prstGeom>
+          <a:noFill/>
+        </p:spPr>
+        <p:txBody>
+          <a:bodyPr wrap="square" lIns="0" rIns="0" tIns="0" bIns="0" anchor="t">
+            <a:spAutoFit/>
+          </a:bodyPr>
+          <a:lstStyle/>
+          <a:p>
+            <a:pPr algn="l">
+              <a:lnSpc>
+                <a:spcPct val="108000"/>
+              </a:lnSpc>
+              <a:spcAft>
+                <a:spcPts val="400"/>
+              </a:spcAft>
+            </a:pPr>
+            <a:r>
+              <a:rPr sz="1300" b="1" i="0">
+                <a:solidFill>
+                  <a:srgbClr val="0F172A"/>
+                </a:solidFill>
+                <a:latin typeface="Calibri"/>
+              </a:rPr>
+              <a:t>AI phân tích khung giờ đặt lịch</a:t>
+            </a:r>
+          </a:p>
+        </p:txBody>
+      </p:sp>
+      <p:sp>
+        <p:nvSpPr>
+          <p:cNvPr id="19" name="TextBox 18"/>
+          <p:cNvSpPr txBox="1"/>
+          <p:nvPr/>
+        </p:nvSpPr>
+        <p:spPr>
+          <a:xfrm>
+            <a:off x="1170432" y="2999232"/>
+            <a:ext cx="2774594" cy="594360"/>
+          </a:xfrm>
+          <a:prstGeom prst="rect">
+            <a:avLst/>
+          </a:prstGeom>
+          <a:noFill/>
+        </p:spPr>
+        <p:txBody>
+          <a:bodyPr wrap="square" lIns="0" rIns="0" tIns="0" bIns="0" anchor="t">
+            <a:spAutoFit/>
+          </a:bodyPr>
+          <a:lstStyle/>
+          <a:p>
+            <a:pPr algn="l">
+              <a:lnSpc>
+                <a:spcPct val="108000"/>
+              </a:lnSpc>
+              <a:spcAft>
+                <a:spcPts val="400"/>
+              </a:spcAft>
+            </a:pPr>
+            <a:r>
+              <a:rPr sz="1050" b="0" i="0">
+                <a:solidFill>
+                  <a:srgbClr val="475569"/>
+                </a:solidFill>
+                <a:latin typeface="Calibri"/>
+              </a:rPr>
+              <a:t>Trợ lý xếp lịch chấm điểm sớm · vừa khít · cân bằng thợ, có lý do, 1 cú nhấp điền sẵn</a:t>
+            </a:r>
+          </a:p>
+        </p:txBody>
+      </p:sp>
+      <p:sp>
+        <p:nvSpPr>
+          <p:cNvPr id="20" name="Rounded Rectangle 19"/>
           <p:cNvSpPr/>
           <p:nvPr/>
         </p:nvSpPr>
         <p:spPr>
           <a:xfrm>
-            <a:off x="804672" y="4233672"/>
-            <a:ext cx="530352" cy="530352"/>
-          </a:xfrm>
-          <a:prstGeom prst="ellipse">
-            <a:avLst/>
-          </a:prstGeom>
-          <a:solidFill>
-            <a:srgbClr val="0D9488"/>
-          </a:solidFill>
-          <a:ln>
-            <a:noFill/>
-          </a:ln>
-        </p:spPr>
-        <p:style>
-          <a:lnRef idx="1">
-            <a:schemeClr val="accent1"/>
-          </a:lnRef>
-          <a:fillRef idx="3">
-            <a:schemeClr val="accent1"/>
-          </a:fillRef>
-          <a:effectRef idx="2">
-            <a:schemeClr val="accent1"/>
-          </a:effectRef>
-          <a:fontRef idx="minor">
-            <a:schemeClr val="lt1"/>
-          </a:fontRef>
-        </p:style>
-        <p:txBody>
-          <a:bodyPr rtlCol="0" anchor="ctr"/>
-          <a:lstStyle/>
-          <a:p>
-            <a:pPr algn="ctr"/>
-          </a:p>
-        </p:txBody>
-      </p:sp>
-      <p:pic>
-        <p:nvPicPr>
-          <p:cNvPr id="27" name="Picture 26" descr="scissors_w.png"/>
-          <p:cNvPicPr>
-            <a:picLocks noChangeAspect="1"/>
-          </p:cNvPicPr>
-          <p:nvPr/>
-        </p:nvPicPr>
-        <p:blipFill>
-          <a:blip r:embed="rId5"/>
-          <a:stretch>
-            <a:fillRect/>
-          </a:stretch>
-        </p:blipFill>
-        <p:spPr>
-          <a:xfrm>
-            <a:off x="931956" y="4360956"/>
-            <a:ext cx="275784" cy="275784"/>
-          </a:xfrm>
-          <a:prstGeom prst="rect">
-            <a:avLst/>
-          </a:prstGeom>
-        </p:spPr>
-      </p:pic>
-      <p:sp>
-        <p:nvSpPr>
-          <p:cNvPr id="28" name="TextBox 27"/>
-          <p:cNvSpPr txBox="1"/>
-          <p:nvPr/>
-        </p:nvSpPr>
-        <p:spPr>
-          <a:xfrm>
-            <a:off x="3209544" y="4160520"/>
-            <a:ext cx="640080" cy="640080"/>
-          </a:xfrm>
-          <a:prstGeom prst="rect">
-            <a:avLst/>
-          </a:prstGeom>
-          <a:noFill/>
-        </p:spPr>
-        <p:txBody>
-          <a:bodyPr wrap="square" lIns="0" rIns="0" tIns="0" bIns="0" anchor="t">
-            <a:spAutoFit/>
-          </a:bodyPr>
-          <a:lstStyle/>
-          <a:p>
-            <a:pPr algn="r">
-              <a:lnSpc>
-                <a:spcPct val="108000"/>
-              </a:lnSpc>
-              <a:spcAft>
-                <a:spcPts val="400"/>
-              </a:spcAft>
-            </a:pPr>
-            <a:r>
-              <a:rPr sz="3600" b="1" i="0">
-                <a:solidFill>
-                  <a:srgbClr val="CCFBF1"/>
-                </a:solidFill>
-                <a:latin typeface="Calibri"/>
-              </a:rPr>
-              <a:t>4</a:t>
-            </a:r>
-          </a:p>
-        </p:txBody>
-      </p:sp>
-      <p:sp>
-        <p:nvSpPr>
-          <p:cNvPr id="29" name="TextBox 28"/>
-          <p:cNvSpPr txBox="1"/>
-          <p:nvPr/>
-        </p:nvSpPr>
-        <p:spPr>
-          <a:xfrm>
-            <a:off x="804672" y="4892040"/>
-            <a:ext cx="3072384" cy="320040"/>
-          </a:xfrm>
-          <a:prstGeom prst="rect">
-            <a:avLst/>
-          </a:prstGeom>
-          <a:noFill/>
-        </p:spPr>
-        <p:txBody>
-          <a:bodyPr wrap="square" lIns="0" rIns="0" tIns="0" bIns="0" anchor="t">
-            <a:spAutoFit/>
-          </a:bodyPr>
-          <a:lstStyle/>
-          <a:p>
-            <a:pPr algn="l">
-              <a:lnSpc>
-                <a:spcPct val="108000"/>
-              </a:lnSpc>
-              <a:spcAft>
-                <a:spcPts val="400"/>
-              </a:spcAft>
-            </a:pPr>
-            <a:r>
-              <a:rPr sz="1700" b="1" i="0">
-                <a:solidFill>
-                  <a:srgbClr val="0F172A"/>
-                </a:solidFill>
-                <a:latin typeface="Calibri"/>
-              </a:rPr>
-              <a:t>Thợ phục vụ</a:t>
-            </a:r>
-          </a:p>
-        </p:txBody>
-      </p:sp>
-      <p:sp>
-        <p:nvSpPr>
-          <p:cNvPr id="30" name="TextBox 29"/>
-          <p:cNvSpPr txBox="1"/>
-          <p:nvPr/>
-        </p:nvSpPr>
-        <p:spPr>
-          <a:xfrm>
-            <a:off x="804672" y="5221224"/>
-            <a:ext cx="3072384" cy="274320"/>
-          </a:xfrm>
-          <a:prstGeom prst="rect">
-            <a:avLst/>
-          </a:prstGeom>
-          <a:noFill/>
-        </p:spPr>
-        <p:txBody>
-          <a:bodyPr wrap="square" lIns="0" rIns="0" tIns="0" bIns="0" anchor="t">
-            <a:spAutoFit/>
-          </a:bodyPr>
-          <a:lstStyle/>
-          <a:p>
-            <a:pPr algn="l">
-              <a:lnSpc>
-                <a:spcPct val="108000"/>
-              </a:lnSpc>
-              <a:spcAft>
-                <a:spcPts val="400"/>
-              </a:spcAft>
-            </a:pPr>
-            <a:r>
-              <a:rPr sz="1200" b="1" i="0">
-                <a:solidFill>
-                  <a:srgbClr val="0F766E"/>
-                </a:solidFill>
-                <a:latin typeface="Calibri"/>
-              </a:rPr>
-              <a:t>stylist1@salon.vn</a:t>
-            </a:r>
-          </a:p>
-        </p:txBody>
-      </p:sp>
-      <p:sp>
-        <p:nvSpPr>
-          <p:cNvPr id="31" name="TextBox 30"/>
-          <p:cNvSpPr txBox="1"/>
-          <p:nvPr/>
-        </p:nvSpPr>
-        <p:spPr>
-          <a:xfrm>
-            <a:off x="804672" y="5513832"/>
-            <a:ext cx="3072384" cy="640080"/>
-          </a:xfrm>
-          <a:prstGeom prst="rect">
-            <a:avLst/>
-          </a:prstGeom>
-          <a:noFill/>
-        </p:spPr>
-        <p:txBody>
-          <a:bodyPr wrap="square" lIns="0" rIns="0" tIns="0" bIns="0" anchor="t">
-            <a:spAutoFit/>
-          </a:bodyPr>
-          <a:lstStyle/>
-          <a:p>
-            <a:pPr algn="l">
-              <a:lnSpc>
-                <a:spcPct val="108000"/>
-              </a:lnSpc>
-              <a:spcAft>
-                <a:spcPts val="400"/>
-              </a:spcAft>
-            </a:pPr>
-            <a:r>
-              <a:rPr sz="1250" b="0" i="0">
-                <a:solidFill>
-                  <a:srgbClr val="475569"/>
-                </a:solidFill>
-                <a:latin typeface="Calibri"/>
-              </a:rPr>
-              <a:t>Bắt đầu → Hoàn tất; SĐT khách hiển thị 098***1234; ghi chú kỹ thuật</a:t>
-            </a:r>
-          </a:p>
-        </p:txBody>
-      </p:sp>
-      <p:sp>
-        <p:nvSpPr>
-          <p:cNvPr id="32" name="Rounded Rectangle 31"/>
-          <p:cNvSpPr/>
-          <p:nvPr/>
-        </p:nvSpPr>
-        <p:spPr>
-          <a:xfrm>
-            <a:off x="4315968" y="3977640"/>
-            <a:ext cx="3529584" cy="2194560"/>
+            <a:off x="4319930" y="2578608"/>
+            <a:ext cx="3551834" cy="1051560"/>
           </a:xfrm>
           <a:prstGeom prst="roundRect">
             <a:avLst>
@@ -10407,249 +8634,140 @@
       </p:sp>
       <p:sp>
         <p:nvSpPr>
-          <p:cNvPr id="33" name="Oval 32"/>
+          <p:cNvPr id="21" name="TextBox 20"/>
+          <p:cNvSpPr txBox="1"/>
+          <p:nvPr/>
+        </p:nvSpPr>
+        <p:spPr>
+          <a:xfrm>
+            <a:off x="4484522" y="2670048"/>
+            <a:ext cx="457200" cy="411480"/>
+          </a:xfrm>
+          <a:prstGeom prst="rect">
+            <a:avLst/>
+          </a:prstGeom>
+          <a:noFill/>
+        </p:spPr>
+        <p:txBody>
+          <a:bodyPr wrap="square" lIns="0" rIns="0" tIns="0" bIns="0" anchor="t">
+            <a:spAutoFit/>
+          </a:bodyPr>
+          <a:lstStyle/>
+          <a:p>
+            <a:pPr algn="l">
+              <a:lnSpc>
+                <a:spcPct val="108000"/>
+              </a:lnSpc>
+              <a:spcAft>
+                <a:spcPts val="400"/>
+              </a:spcAft>
+            </a:pPr>
+            <a:r>
+              <a:rPr sz="2000" b="1" i="0">
+                <a:solidFill>
+                  <a:srgbClr val="0D9488"/>
+                </a:solidFill>
+                <a:latin typeface="Calibri"/>
+              </a:rPr>
+              <a:t>5</a:t>
+            </a:r>
+          </a:p>
+        </p:txBody>
+      </p:sp>
+      <p:sp>
+        <p:nvSpPr>
+          <p:cNvPr id="22" name="TextBox 21"/>
+          <p:cNvSpPr txBox="1"/>
+          <p:nvPr/>
+        </p:nvSpPr>
+        <p:spPr>
+          <a:xfrm>
+            <a:off x="4941722" y="2688336"/>
+            <a:ext cx="2774594" cy="320040"/>
+          </a:xfrm>
+          <a:prstGeom prst="rect">
+            <a:avLst/>
+          </a:prstGeom>
+          <a:noFill/>
+        </p:spPr>
+        <p:txBody>
+          <a:bodyPr wrap="square" lIns="0" rIns="0" tIns="0" bIns="0" anchor="t">
+            <a:spAutoFit/>
+          </a:bodyPr>
+          <a:lstStyle/>
+          <a:p>
+            <a:pPr algn="l">
+              <a:lnSpc>
+                <a:spcPct val="108000"/>
+              </a:lnSpc>
+              <a:spcAft>
+                <a:spcPts val="400"/>
+              </a:spcAft>
+            </a:pPr>
+            <a:r>
+              <a:rPr sz="1300" b="1" i="0">
+                <a:solidFill>
+                  <a:srgbClr val="0F172A"/>
+                </a:solidFill>
+                <a:latin typeface="Calibri"/>
+              </a:rPr>
+              <a:t>AI sinh ngày lễ cả năm</a:t>
+            </a:r>
+          </a:p>
+        </p:txBody>
+      </p:sp>
+      <p:sp>
+        <p:nvSpPr>
+          <p:cNvPr id="23" name="TextBox 22"/>
+          <p:cNvSpPr txBox="1"/>
+          <p:nvPr/>
+        </p:nvSpPr>
+        <p:spPr>
+          <a:xfrm>
+            <a:off x="4941722" y="2999232"/>
+            <a:ext cx="2774594" cy="594360"/>
+          </a:xfrm>
+          <a:prstGeom prst="rect">
+            <a:avLst/>
+          </a:prstGeom>
+          <a:noFill/>
+        </p:spPr>
+        <p:txBody>
+          <a:bodyPr wrap="square" lIns="0" rIns="0" tIns="0" bIns="0" anchor="t">
+            <a:spAutoFit/>
+          </a:bodyPr>
+          <a:lstStyle/>
+          <a:p>
+            <a:pPr algn="l">
+              <a:lnSpc>
+                <a:spcPct val="108000"/>
+              </a:lnSpc>
+              <a:spcAft>
+                <a:spcPts val="400"/>
+              </a:spcAft>
+            </a:pPr>
+            <a:r>
+              <a:rPr sz="1050" b="0" i="0">
+                <a:solidFill>
+                  <a:srgbClr val="475569"/>
+                </a:solidFill>
+                <a:latin typeface="Calibri"/>
+              </a:rPr>
+              <a:t>Âm lịch thiên văn + Bộ luật Lao động; không chèn lên lịch khách</a:t>
+            </a:r>
+          </a:p>
+        </p:txBody>
+      </p:sp>
+      <p:sp>
+        <p:nvSpPr>
+          <p:cNvPr id="24" name="Rounded Rectangle 23"/>
           <p:cNvSpPr/>
           <p:nvPr/>
         </p:nvSpPr>
         <p:spPr>
           <a:xfrm>
-            <a:off x="4572000" y="4233672"/>
-            <a:ext cx="530352" cy="530352"/>
-          </a:xfrm>
-          <a:prstGeom prst="ellipse">
-            <a:avLst/>
-          </a:prstGeom>
-          <a:solidFill>
-            <a:srgbClr val="0D9488"/>
-          </a:solidFill>
-          <a:ln>
-            <a:noFill/>
-          </a:ln>
-        </p:spPr>
-        <p:style>
-          <a:lnRef idx="1">
-            <a:schemeClr val="accent1"/>
-          </a:lnRef>
-          <a:fillRef idx="3">
-            <a:schemeClr val="accent1"/>
-          </a:fillRef>
-          <a:effectRef idx="2">
-            <a:schemeClr val="accent1"/>
-          </a:effectRef>
-          <a:fontRef idx="minor">
-            <a:schemeClr val="lt1"/>
-          </a:fontRef>
-        </p:style>
-        <p:txBody>
-          <a:bodyPr rtlCol="0" anchor="ctr"/>
-          <a:lstStyle/>
-          <a:p>
-            <a:pPr algn="ctr"/>
-          </a:p>
-        </p:txBody>
-      </p:sp>
-      <p:pic>
-        <p:nvPicPr>
-          <p:cNvPr id="34" name="Picture 33" descr="receipt_w.png"/>
-          <p:cNvPicPr>
-            <a:picLocks noChangeAspect="1"/>
-          </p:cNvPicPr>
-          <p:nvPr/>
-        </p:nvPicPr>
-        <p:blipFill>
-          <a:blip r:embed="rId6"/>
-          <a:stretch>
-            <a:fillRect/>
-          </a:stretch>
-        </p:blipFill>
-        <p:spPr>
-          <a:xfrm>
-            <a:off x="4699284" y="4360956"/>
-            <a:ext cx="275784" cy="275784"/>
-          </a:xfrm>
-          <a:prstGeom prst="rect">
-            <a:avLst/>
-          </a:prstGeom>
-        </p:spPr>
-      </p:pic>
-      <p:sp>
-        <p:nvSpPr>
-          <p:cNvPr id="35" name="TextBox 34"/>
-          <p:cNvSpPr txBox="1"/>
-          <p:nvPr/>
-        </p:nvSpPr>
-        <p:spPr>
-          <a:xfrm>
-            <a:off x="6976872" y="4160520"/>
-            <a:ext cx="640080" cy="640080"/>
-          </a:xfrm>
-          <a:prstGeom prst="rect">
-            <a:avLst/>
-          </a:prstGeom>
-          <a:noFill/>
-        </p:spPr>
-        <p:txBody>
-          <a:bodyPr wrap="square" lIns="0" rIns="0" tIns="0" bIns="0" anchor="t">
-            <a:spAutoFit/>
-          </a:bodyPr>
-          <a:lstStyle/>
-          <a:p>
-            <a:pPr algn="r">
-              <a:lnSpc>
-                <a:spcPct val="108000"/>
-              </a:lnSpc>
-              <a:spcAft>
-                <a:spcPts val="400"/>
-              </a:spcAft>
-            </a:pPr>
-            <a:r>
-              <a:rPr sz="3600" b="1" i="0">
-                <a:solidFill>
-                  <a:srgbClr val="CCFBF1"/>
-                </a:solidFill>
-                <a:latin typeface="Calibri"/>
-              </a:rPr>
-              <a:t>5</a:t>
-            </a:r>
-          </a:p>
-        </p:txBody>
-      </p:sp>
-      <p:sp>
-        <p:nvSpPr>
-          <p:cNvPr id="36" name="TextBox 35"/>
-          <p:cNvSpPr txBox="1"/>
-          <p:nvPr/>
-        </p:nvSpPr>
-        <p:spPr>
-          <a:xfrm>
-            <a:off x="4572000" y="4892040"/>
-            <a:ext cx="3072384" cy="320040"/>
-          </a:xfrm>
-          <a:prstGeom prst="rect">
-            <a:avLst/>
-          </a:prstGeom>
-          <a:noFill/>
-        </p:spPr>
-        <p:txBody>
-          <a:bodyPr wrap="square" lIns="0" rIns="0" tIns="0" bIns="0" anchor="t">
-            <a:spAutoFit/>
-          </a:bodyPr>
-          <a:lstStyle/>
-          <a:p>
-            <a:pPr algn="l">
-              <a:lnSpc>
-                <a:spcPct val="108000"/>
-              </a:lnSpc>
-              <a:spcAft>
-                <a:spcPts val="400"/>
-              </a:spcAft>
-            </a:pPr>
-            <a:r>
-              <a:rPr sz="1700" b="1" i="0">
-                <a:solidFill>
-                  <a:srgbClr val="0F172A"/>
-                </a:solidFill>
-                <a:latin typeface="Calibri"/>
-              </a:rPr>
-              <a:t>Thu tiền</a:t>
-            </a:r>
-          </a:p>
-        </p:txBody>
-      </p:sp>
-      <p:sp>
-        <p:nvSpPr>
-          <p:cNvPr id="37" name="TextBox 36"/>
-          <p:cNvSpPr txBox="1"/>
-          <p:nvPr/>
-        </p:nvSpPr>
-        <p:spPr>
-          <a:xfrm>
-            <a:off x="4572000" y="5221224"/>
-            <a:ext cx="3072384" cy="274320"/>
-          </a:xfrm>
-          <a:prstGeom prst="rect">
-            <a:avLst/>
-          </a:prstGeom>
-          <a:noFill/>
-        </p:spPr>
-        <p:txBody>
-          <a:bodyPr wrap="square" lIns="0" rIns="0" tIns="0" bIns="0" anchor="t">
-            <a:spAutoFit/>
-          </a:bodyPr>
-          <a:lstStyle/>
-          <a:p>
-            <a:pPr algn="l">
-              <a:lnSpc>
-                <a:spcPct val="108000"/>
-              </a:lnSpc>
-              <a:spcAft>
-                <a:spcPts val="400"/>
-              </a:spcAft>
-            </a:pPr>
-            <a:r>
-              <a:rPr sz="1200" b="1" i="0">
-                <a:solidFill>
-                  <a:srgbClr val="0F766E"/>
-                </a:solidFill>
-                <a:latin typeface="Calibri"/>
-              </a:rPr>
-              <a:t>reception@salon.vn</a:t>
-            </a:r>
-          </a:p>
-        </p:txBody>
-      </p:sp>
-      <p:sp>
-        <p:nvSpPr>
-          <p:cNvPr id="38" name="TextBox 37"/>
-          <p:cNvSpPr txBox="1"/>
-          <p:nvPr/>
-        </p:nvSpPr>
-        <p:spPr>
-          <a:xfrm>
-            <a:off x="4572000" y="5513832"/>
-            <a:ext cx="3072384" cy="640080"/>
-          </a:xfrm>
-          <a:prstGeom prst="rect">
-            <a:avLst/>
-          </a:prstGeom>
-          <a:noFill/>
-        </p:spPr>
-        <p:txBody>
-          <a:bodyPr wrap="square" lIns="0" rIns="0" tIns="0" bIns="0" anchor="t">
-            <a:spAutoFit/>
-          </a:bodyPr>
-          <a:lstStyle/>
-          <a:p>
-            <a:pPr algn="l">
-              <a:lnSpc>
-                <a:spcPct val="108000"/>
-              </a:lnSpc>
-              <a:spcAft>
-                <a:spcPts val="400"/>
-              </a:spcAft>
-            </a:pPr>
-            <a:r>
-              <a:rPr sz="1250" b="0" i="0">
-                <a:solidFill>
-                  <a:srgbClr val="475569"/>
-                </a:solidFill>
-                <a:latin typeface="Calibri"/>
-              </a:rPr>
-              <a:t>Lập phiếu, mã NGAYTHUONG10 → 963.000 đ, đóng phiếu → email đánh giá</a:t>
-            </a:r>
-          </a:p>
-        </p:txBody>
-      </p:sp>
-      <p:sp>
-        <p:nvSpPr>
-          <p:cNvPr id="39" name="Rounded Rectangle 38"/>
-          <p:cNvSpPr/>
-          <p:nvPr/>
-        </p:nvSpPr>
-        <p:spPr>
-          <a:xfrm>
-            <a:off x="8083296" y="3977640"/>
-            <a:ext cx="3529584" cy="2194560"/>
+            <a:off x="8091220" y="2578608"/>
+            <a:ext cx="3551834" cy="1051560"/>
           </a:xfrm>
           <a:prstGeom prst="roundRect">
             <a:avLst>
@@ -10692,24 +8810,159 @@
       </p:sp>
       <p:sp>
         <p:nvSpPr>
-          <p:cNvPr id="40" name="Oval 39"/>
+          <p:cNvPr id="25" name="TextBox 24"/>
+          <p:cNvSpPr txBox="1"/>
+          <p:nvPr/>
+        </p:nvSpPr>
+        <p:spPr>
+          <a:xfrm>
+            <a:off x="8255812" y="2670048"/>
+            <a:ext cx="457200" cy="411480"/>
+          </a:xfrm>
+          <a:prstGeom prst="rect">
+            <a:avLst/>
+          </a:prstGeom>
+          <a:noFill/>
+        </p:spPr>
+        <p:txBody>
+          <a:bodyPr wrap="square" lIns="0" rIns="0" tIns="0" bIns="0" anchor="t">
+            <a:spAutoFit/>
+          </a:bodyPr>
+          <a:lstStyle/>
+          <a:p>
+            <a:pPr algn="l">
+              <a:lnSpc>
+                <a:spcPct val="108000"/>
+              </a:lnSpc>
+              <a:spcAft>
+                <a:spcPts val="400"/>
+              </a:spcAft>
+            </a:pPr>
+            <a:r>
+              <a:rPr sz="2000" b="1" i="0">
+                <a:solidFill>
+                  <a:srgbClr val="0D9488"/>
+                </a:solidFill>
+                <a:latin typeface="Calibri"/>
+              </a:rPr>
+              <a:t>6</a:t>
+            </a:r>
+          </a:p>
+        </p:txBody>
+      </p:sp>
+      <p:sp>
+        <p:nvSpPr>
+          <p:cNvPr id="26" name="TextBox 25"/>
+          <p:cNvSpPr txBox="1"/>
+          <p:nvPr/>
+        </p:nvSpPr>
+        <p:spPr>
+          <a:xfrm>
+            <a:off x="8713012" y="2688336"/>
+            <a:ext cx="2774594" cy="320040"/>
+          </a:xfrm>
+          <a:prstGeom prst="rect">
+            <a:avLst/>
+          </a:prstGeom>
+          <a:noFill/>
+        </p:spPr>
+        <p:txBody>
+          <a:bodyPr wrap="square" lIns="0" rIns="0" tIns="0" bIns="0" anchor="t">
+            <a:spAutoFit/>
+          </a:bodyPr>
+          <a:lstStyle/>
+          <a:p>
+            <a:pPr algn="l">
+              <a:lnSpc>
+                <a:spcPct val="108000"/>
+              </a:lnSpc>
+              <a:spcAft>
+                <a:spcPts val="400"/>
+              </a:spcAft>
+            </a:pPr>
+            <a:r>
+              <a:rPr sz="1300" b="1" i="0">
+                <a:solidFill>
+                  <a:srgbClr val="0F172A"/>
+                </a:solidFill>
+                <a:latin typeface="Calibri"/>
+              </a:rPr>
+              <a:t>Thợ tự đăng ký lịch, quản lý duyệt</a:t>
+            </a:r>
+          </a:p>
+        </p:txBody>
+      </p:sp>
+      <p:sp>
+        <p:nvSpPr>
+          <p:cNvPr id="27" name="TextBox 26"/>
+          <p:cNvSpPr txBox="1"/>
+          <p:nvPr/>
+        </p:nvSpPr>
+        <p:spPr>
+          <a:xfrm>
+            <a:off x="8713012" y="2999232"/>
+            <a:ext cx="2774594" cy="594360"/>
+          </a:xfrm>
+          <a:prstGeom prst="rect">
+            <a:avLst/>
+          </a:prstGeom>
+          <a:noFill/>
+        </p:spPr>
+        <p:txBody>
+          <a:bodyPr wrap="square" lIns="0" rIns="0" tIns="0" bIns="0" anchor="t">
+            <a:spAutoFit/>
+          </a:bodyPr>
+          <a:lstStyle/>
+          <a:p>
+            <a:pPr algn="l">
+              <a:lnSpc>
+                <a:spcPct val="108000"/>
+              </a:lnSpc>
+              <a:spcAft>
+                <a:spcPts val="400"/>
+              </a:spcAft>
+            </a:pPr>
+            <a:r>
+              <a:rPr sz="1050" b="0" i="0">
+                <a:solidFill>
+                  <a:srgbClr val="475569"/>
+                </a:solidFill>
+                <a:latin typeface="Calibri"/>
+              </a:rPr>
+              <a:t>Đăng ký cả tuần; duyệt / sửa giờ / từ chối / duyệt tất cả</a:t>
+            </a:r>
+          </a:p>
+        </p:txBody>
+      </p:sp>
+      <p:sp>
+        <p:nvSpPr>
+          <p:cNvPr id="28" name="Rounded Rectangle 27"/>
           <p:cNvSpPr/>
           <p:nvPr/>
         </p:nvSpPr>
         <p:spPr>
           <a:xfrm>
-            <a:off x="8339328" y="4233672"/>
-            <a:ext cx="530352" cy="530352"/>
-          </a:xfrm>
-          <a:prstGeom prst="ellipse">
-            <a:avLst/>
+            <a:off x="548640" y="3739896"/>
+            <a:ext cx="3551834" cy="1051560"/>
+          </a:xfrm>
+          <a:prstGeom prst="roundRect">
+            <a:avLst>
+              <a:gd name="adj" fmla="val 8000"/>
+            </a:avLst>
           </a:prstGeom>
           <a:solidFill>
-            <a:srgbClr val="0D9488"/>
+            <a:srgbClr val="FFFFFF"/>
           </a:solidFill>
           <a:ln>
             <a:noFill/>
           </a:ln>
+          <a:effectLst>
+            <a:outerShdw blurRad="152400" dist="38100" dir="5400000" algn="t" rotWithShape="0">
+              <a:srgbClr val="0F172A">
+                <a:alpha val="14000"/>
+              </a:srgbClr>
+            </a:outerShdw>
+          </a:effectLst>
         </p:spPr>
         <p:style>
           <a:lnRef idx="1">
@@ -10728,35 +8981,579 @@
         <p:txBody>
           <a:bodyPr rtlCol="0" anchor="ctr"/>
           <a:lstStyle/>
-          <a:p>
-            <a:pPr algn="ctr"/>
-          </a:p>
-        </p:txBody>
-      </p:sp>
-      <p:pic>
-        <p:nvPicPr>
-          <p:cNvPr id="41" name="Picture 40" descr="chart_w.png"/>
-          <p:cNvPicPr>
-            <a:picLocks noChangeAspect="1"/>
-          </p:cNvPicPr>
-          <p:nvPr/>
-        </p:nvPicPr>
-        <p:blipFill>
-          <a:blip r:embed="rId7"/>
-          <a:stretch>
-            <a:fillRect/>
-          </a:stretch>
-        </p:blipFill>
-        <p:spPr>
-          <a:xfrm>
-            <a:off x="8466612" y="4360956"/>
-            <a:ext cx="275784" cy="275784"/>
-          </a:xfrm>
-          <a:prstGeom prst="rect">
-            <a:avLst/>
-          </a:prstGeom>
-        </p:spPr>
-      </p:pic>
+          <a:p/>
+        </p:txBody>
+      </p:sp>
+      <p:sp>
+        <p:nvSpPr>
+          <p:cNvPr id="29" name="TextBox 28"/>
+          <p:cNvSpPr txBox="1"/>
+          <p:nvPr/>
+        </p:nvSpPr>
+        <p:spPr>
+          <a:xfrm>
+            <a:off x="713232" y="3831336"/>
+            <a:ext cx="457200" cy="411480"/>
+          </a:xfrm>
+          <a:prstGeom prst="rect">
+            <a:avLst/>
+          </a:prstGeom>
+          <a:noFill/>
+        </p:spPr>
+        <p:txBody>
+          <a:bodyPr wrap="square" lIns="0" rIns="0" tIns="0" bIns="0" anchor="t">
+            <a:spAutoFit/>
+          </a:bodyPr>
+          <a:lstStyle/>
+          <a:p>
+            <a:pPr algn="l">
+              <a:lnSpc>
+                <a:spcPct val="108000"/>
+              </a:lnSpc>
+              <a:spcAft>
+                <a:spcPts val="400"/>
+              </a:spcAft>
+            </a:pPr>
+            <a:r>
+              <a:rPr sz="2000" b="1" i="0">
+                <a:solidFill>
+                  <a:srgbClr val="0D9488"/>
+                </a:solidFill>
+                <a:latin typeface="Calibri"/>
+              </a:rPr>
+              <a:t>7</a:t>
+            </a:r>
+          </a:p>
+        </p:txBody>
+      </p:sp>
+      <p:sp>
+        <p:nvSpPr>
+          <p:cNvPr id="30" name="TextBox 29"/>
+          <p:cNvSpPr txBox="1"/>
+          <p:nvPr/>
+        </p:nvSpPr>
+        <p:spPr>
+          <a:xfrm>
+            <a:off x="1170432" y="3849624"/>
+            <a:ext cx="2774594" cy="320040"/>
+          </a:xfrm>
+          <a:prstGeom prst="rect">
+            <a:avLst/>
+          </a:prstGeom>
+          <a:noFill/>
+        </p:spPr>
+        <p:txBody>
+          <a:bodyPr wrap="square" lIns="0" rIns="0" tIns="0" bIns="0" anchor="t">
+            <a:spAutoFit/>
+          </a:bodyPr>
+          <a:lstStyle/>
+          <a:p>
+            <a:pPr algn="l">
+              <a:lnSpc>
+                <a:spcPct val="108000"/>
+              </a:lnSpc>
+              <a:spcAft>
+                <a:spcPts val="400"/>
+              </a:spcAft>
+            </a:pPr>
+            <a:r>
+              <a:rPr sz="1300" b="1" i="0">
+                <a:solidFill>
+                  <a:srgbClr val="0F172A"/>
+                </a:solidFill>
+                <a:latin typeface="Calibri"/>
+              </a:rPr>
+              <a:t>Chân trang đủ thông tin</a:t>
+            </a:r>
+          </a:p>
+        </p:txBody>
+      </p:sp>
+      <p:sp>
+        <p:nvSpPr>
+          <p:cNvPr id="31" name="TextBox 30"/>
+          <p:cNvSpPr txBox="1"/>
+          <p:nvPr/>
+        </p:nvSpPr>
+        <p:spPr>
+          <a:xfrm>
+            <a:off x="1170432" y="4160520"/>
+            <a:ext cx="2774594" cy="594360"/>
+          </a:xfrm>
+          <a:prstGeom prst="rect">
+            <a:avLst/>
+          </a:prstGeom>
+          <a:noFill/>
+        </p:spPr>
+        <p:txBody>
+          <a:bodyPr wrap="square" lIns="0" rIns="0" tIns="0" bIns="0" anchor="t">
+            <a:spAutoFit/>
+          </a:bodyPr>
+          <a:lstStyle/>
+          <a:p>
+            <a:pPr algn="l">
+              <a:lnSpc>
+                <a:spcPct val="108000"/>
+              </a:lnSpc>
+              <a:spcAft>
+                <a:spcPts val="400"/>
+              </a:spcAft>
+            </a:pPr>
+            <a:r>
+              <a:rPr sz="1050" b="0" i="0">
+                <a:solidFill>
+                  <a:srgbClr val="475569"/>
+                </a:solidFill>
+                <a:latin typeface="Calibri"/>
+              </a:rPr>
+              <a:t>Nền tối; Facebook, Zalo, chỉ đường, hotline, email, giờ mở cửa, đội ngũ chuyên viên</a:t>
+            </a:r>
+          </a:p>
+        </p:txBody>
+      </p:sp>
+      <p:sp>
+        <p:nvSpPr>
+          <p:cNvPr id="32" name="Rounded Rectangle 31"/>
+          <p:cNvSpPr/>
+          <p:nvPr/>
+        </p:nvSpPr>
+        <p:spPr>
+          <a:xfrm>
+            <a:off x="4319930" y="3739896"/>
+            <a:ext cx="3551834" cy="1051560"/>
+          </a:xfrm>
+          <a:prstGeom prst="roundRect">
+            <a:avLst>
+              <a:gd name="adj" fmla="val 8000"/>
+            </a:avLst>
+          </a:prstGeom>
+          <a:solidFill>
+            <a:srgbClr val="FFFFFF"/>
+          </a:solidFill>
+          <a:ln>
+            <a:noFill/>
+          </a:ln>
+          <a:effectLst>
+            <a:outerShdw blurRad="152400" dist="38100" dir="5400000" algn="t" rotWithShape="0">
+              <a:srgbClr val="0F172A">
+                <a:alpha val="14000"/>
+              </a:srgbClr>
+            </a:outerShdw>
+          </a:effectLst>
+        </p:spPr>
+        <p:style>
+          <a:lnRef idx="1">
+            <a:schemeClr val="accent1"/>
+          </a:lnRef>
+          <a:fillRef idx="3">
+            <a:schemeClr val="accent1"/>
+          </a:fillRef>
+          <a:effectRef idx="2">
+            <a:schemeClr val="accent1"/>
+          </a:effectRef>
+          <a:fontRef idx="minor">
+            <a:schemeClr val="lt1"/>
+          </a:fontRef>
+        </p:style>
+        <p:txBody>
+          <a:bodyPr rtlCol="0" anchor="ctr"/>
+          <a:lstStyle/>
+          <a:p/>
+        </p:txBody>
+      </p:sp>
+      <p:sp>
+        <p:nvSpPr>
+          <p:cNvPr id="33" name="TextBox 32"/>
+          <p:cNvSpPr txBox="1"/>
+          <p:nvPr/>
+        </p:nvSpPr>
+        <p:spPr>
+          <a:xfrm>
+            <a:off x="4484522" y="3831336"/>
+            <a:ext cx="457200" cy="411480"/>
+          </a:xfrm>
+          <a:prstGeom prst="rect">
+            <a:avLst/>
+          </a:prstGeom>
+          <a:noFill/>
+        </p:spPr>
+        <p:txBody>
+          <a:bodyPr wrap="square" lIns="0" rIns="0" tIns="0" bIns="0" anchor="t">
+            <a:spAutoFit/>
+          </a:bodyPr>
+          <a:lstStyle/>
+          <a:p>
+            <a:pPr algn="l">
+              <a:lnSpc>
+                <a:spcPct val="108000"/>
+              </a:lnSpc>
+              <a:spcAft>
+                <a:spcPts val="400"/>
+              </a:spcAft>
+            </a:pPr>
+            <a:r>
+              <a:rPr sz="2000" b="1" i="0">
+                <a:solidFill>
+                  <a:srgbClr val="0D9488"/>
+                </a:solidFill>
+                <a:latin typeface="Calibri"/>
+              </a:rPr>
+              <a:t>8</a:t>
+            </a:r>
+          </a:p>
+        </p:txBody>
+      </p:sp>
+      <p:sp>
+        <p:nvSpPr>
+          <p:cNvPr id="34" name="TextBox 33"/>
+          <p:cNvSpPr txBox="1"/>
+          <p:nvPr/>
+        </p:nvSpPr>
+        <p:spPr>
+          <a:xfrm>
+            <a:off x="4941722" y="3849624"/>
+            <a:ext cx="2774594" cy="320040"/>
+          </a:xfrm>
+          <a:prstGeom prst="rect">
+            <a:avLst/>
+          </a:prstGeom>
+          <a:noFill/>
+        </p:spPr>
+        <p:txBody>
+          <a:bodyPr wrap="square" lIns="0" rIns="0" tIns="0" bIns="0" anchor="t">
+            <a:spAutoFit/>
+          </a:bodyPr>
+          <a:lstStyle/>
+          <a:p>
+            <a:pPr algn="l">
+              <a:lnSpc>
+                <a:spcPct val="108000"/>
+              </a:lnSpc>
+              <a:spcAft>
+                <a:spcPts val="400"/>
+              </a:spcAft>
+            </a:pPr>
+            <a:r>
+              <a:rPr sz="1300" b="1" i="0">
+                <a:solidFill>
+                  <a:srgbClr val="0F172A"/>
+                </a:solidFill>
+                <a:latin typeface="Calibri"/>
+              </a:rPr>
+              <a:t>Hiển thị dày hơn</a:t>
+            </a:r>
+          </a:p>
+        </p:txBody>
+      </p:sp>
+      <p:sp>
+        <p:nvSpPr>
+          <p:cNvPr id="35" name="TextBox 34"/>
+          <p:cNvSpPr txBox="1"/>
+          <p:nvPr/>
+        </p:nvSpPr>
+        <p:spPr>
+          <a:xfrm>
+            <a:off x="4941722" y="4160520"/>
+            <a:ext cx="2774594" cy="594360"/>
+          </a:xfrm>
+          <a:prstGeom prst="rect">
+            <a:avLst/>
+          </a:prstGeom>
+          <a:noFill/>
+        </p:spPr>
+        <p:txBody>
+          <a:bodyPr wrap="square" lIns="0" rIns="0" tIns="0" bIns="0" anchor="t">
+            <a:spAutoFit/>
+          </a:bodyPr>
+          <a:lstStyle/>
+          <a:p>
+            <a:pPr algn="l">
+              <a:lnSpc>
+                <a:spcPct val="108000"/>
+              </a:lnSpc>
+              <a:spcAft>
+                <a:spcPts val="400"/>
+              </a:spcAft>
+            </a:pPr>
+            <a:r>
+              <a:rPr sz="1050" b="0" i="0">
+                <a:solidFill>
+                  <a:srgbClr val="475569"/>
+                </a:solidFill>
+                <a:latin typeface="Calibri"/>
+              </a:rPr>
+              <a:t>Lưới 4 cột liền mạch, 2 hàng + Xem thêm, khung rộng 7xl</a:t>
+            </a:r>
+          </a:p>
+        </p:txBody>
+      </p:sp>
+      <p:sp>
+        <p:nvSpPr>
+          <p:cNvPr id="36" name="Rounded Rectangle 35"/>
+          <p:cNvSpPr/>
+          <p:nvPr/>
+        </p:nvSpPr>
+        <p:spPr>
+          <a:xfrm>
+            <a:off x="8091220" y="3739896"/>
+            <a:ext cx="3551834" cy="1051560"/>
+          </a:xfrm>
+          <a:prstGeom prst="roundRect">
+            <a:avLst>
+              <a:gd name="adj" fmla="val 8000"/>
+            </a:avLst>
+          </a:prstGeom>
+          <a:solidFill>
+            <a:srgbClr val="FFFFFF"/>
+          </a:solidFill>
+          <a:ln>
+            <a:noFill/>
+          </a:ln>
+          <a:effectLst>
+            <a:outerShdw blurRad="152400" dist="38100" dir="5400000" algn="t" rotWithShape="0">
+              <a:srgbClr val="0F172A">
+                <a:alpha val="14000"/>
+              </a:srgbClr>
+            </a:outerShdw>
+          </a:effectLst>
+        </p:spPr>
+        <p:style>
+          <a:lnRef idx="1">
+            <a:schemeClr val="accent1"/>
+          </a:lnRef>
+          <a:fillRef idx="3">
+            <a:schemeClr val="accent1"/>
+          </a:fillRef>
+          <a:effectRef idx="2">
+            <a:schemeClr val="accent1"/>
+          </a:effectRef>
+          <a:fontRef idx="minor">
+            <a:schemeClr val="lt1"/>
+          </a:fontRef>
+        </p:style>
+        <p:txBody>
+          <a:bodyPr rtlCol="0" anchor="ctr"/>
+          <a:lstStyle/>
+          <a:p/>
+        </p:txBody>
+      </p:sp>
+      <p:sp>
+        <p:nvSpPr>
+          <p:cNvPr id="37" name="TextBox 36"/>
+          <p:cNvSpPr txBox="1"/>
+          <p:nvPr/>
+        </p:nvSpPr>
+        <p:spPr>
+          <a:xfrm>
+            <a:off x="8255812" y="3831336"/>
+            <a:ext cx="457200" cy="411480"/>
+          </a:xfrm>
+          <a:prstGeom prst="rect">
+            <a:avLst/>
+          </a:prstGeom>
+          <a:noFill/>
+        </p:spPr>
+        <p:txBody>
+          <a:bodyPr wrap="square" lIns="0" rIns="0" tIns="0" bIns="0" anchor="t">
+            <a:spAutoFit/>
+          </a:bodyPr>
+          <a:lstStyle/>
+          <a:p>
+            <a:pPr algn="l">
+              <a:lnSpc>
+                <a:spcPct val="108000"/>
+              </a:lnSpc>
+              <a:spcAft>
+                <a:spcPts val="400"/>
+              </a:spcAft>
+            </a:pPr>
+            <a:r>
+              <a:rPr sz="2000" b="1" i="0">
+                <a:solidFill>
+                  <a:srgbClr val="0D9488"/>
+                </a:solidFill>
+                <a:latin typeface="Calibri"/>
+              </a:rPr>
+              <a:t>9</a:t>
+            </a:r>
+          </a:p>
+        </p:txBody>
+      </p:sp>
+      <p:sp>
+        <p:nvSpPr>
+          <p:cNvPr id="38" name="TextBox 37"/>
+          <p:cNvSpPr txBox="1"/>
+          <p:nvPr/>
+        </p:nvSpPr>
+        <p:spPr>
+          <a:xfrm>
+            <a:off x="8713012" y="3849624"/>
+            <a:ext cx="2774594" cy="320040"/>
+          </a:xfrm>
+          <a:prstGeom prst="rect">
+            <a:avLst/>
+          </a:prstGeom>
+          <a:noFill/>
+        </p:spPr>
+        <p:txBody>
+          <a:bodyPr wrap="square" lIns="0" rIns="0" tIns="0" bIns="0" anchor="t">
+            <a:spAutoFit/>
+          </a:bodyPr>
+          <a:lstStyle/>
+          <a:p>
+            <a:pPr algn="l">
+              <a:lnSpc>
+                <a:spcPct val="108000"/>
+              </a:lnSpc>
+              <a:spcAft>
+                <a:spcPts val="400"/>
+              </a:spcAft>
+            </a:pPr>
+            <a:r>
+              <a:rPr sz="1300" b="1" i="0">
+                <a:solidFill>
+                  <a:srgbClr val="0F172A"/>
+                </a:solidFill>
+                <a:latin typeface="Calibri"/>
+              </a:rPr>
+              <a:t>Khung giờ nào cũng có thợ</a:t>
+            </a:r>
+          </a:p>
+        </p:txBody>
+      </p:sp>
+      <p:sp>
+        <p:nvSpPr>
+          <p:cNvPr id="39" name="TextBox 38"/>
+          <p:cNvSpPr txBox="1"/>
+          <p:nvPr/>
+        </p:nvSpPr>
+        <p:spPr>
+          <a:xfrm>
+            <a:off x="8713012" y="4160520"/>
+            <a:ext cx="2774594" cy="594360"/>
+          </a:xfrm>
+          <a:prstGeom prst="rect">
+            <a:avLst/>
+          </a:prstGeom>
+          <a:noFill/>
+        </p:spPr>
+        <p:txBody>
+          <a:bodyPr wrap="square" lIns="0" rIns="0" tIns="0" bIns="0" anchor="t">
+            <a:spAutoFit/>
+          </a:bodyPr>
+          <a:lstStyle/>
+          <a:p>
+            <a:pPr algn="l">
+              <a:lnSpc>
+                <a:spcPct val="108000"/>
+              </a:lnSpc>
+              <a:spcAft>
+                <a:spcPts val="400"/>
+              </a:spcAft>
+            </a:pPr>
+            <a:r>
+              <a:rPr sz="1050" b="0" i="0">
+                <a:solidFill>
+                  <a:srgbClr val="475569"/>
+                </a:solidFill>
+                <a:latin typeface="Calibri"/>
+              </a:rPr>
+              <a:t>Cảnh báo khoảng trống + gợi ý thợ ít giờ làm, xếp 1 cú nhấp</a:t>
+            </a:r>
+          </a:p>
+        </p:txBody>
+      </p:sp>
+      <p:sp>
+        <p:nvSpPr>
+          <p:cNvPr id="40" name="Rounded Rectangle 39"/>
+          <p:cNvSpPr/>
+          <p:nvPr/>
+        </p:nvSpPr>
+        <p:spPr>
+          <a:xfrm>
+            <a:off x="548640" y="4901184"/>
+            <a:ext cx="3551834" cy="1051560"/>
+          </a:xfrm>
+          <a:prstGeom prst="roundRect">
+            <a:avLst>
+              <a:gd name="adj" fmla="val 8000"/>
+            </a:avLst>
+          </a:prstGeom>
+          <a:solidFill>
+            <a:srgbClr val="FFFFFF"/>
+          </a:solidFill>
+          <a:ln>
+            <a:noFill/>
+          </a:ln>
+          <a:effectLst>
+            <a:outerShdw blurRad="152400" dist="38100" dir="5400000" algn="t" rotWithShape="0">
+              <a:srgbClr val="0F172A">
+                <a:alpha val="14000"/>
+              </a:srgbClr>
+            </a:outerShdw>
+          </a:effectLst>
+        </p:spPr>
+        <p:style>
+          <a:lnRef idx="1">
+            <a:schemeClr val="accent1"/>
+          </a:lnRef>
+          <a:fillRef idx="3">
+            <a:schemeClr val="accent1"/>
+          </a:fillRef>
+          <a:effectRef idx="2">
+            <a:schemeClr val="accent1"/>
+          </a:effectRef>
+          <a:fontRef idx="minor">
+            <a:schemeClr val="lt1"/>
+          </a:fontRef>
+        </p:style>
+        <p:txBody>
+          <a:bodyPr rtlCol="0" anchor="ctr"/>
+          <a:lstStyle/>
+          <a:p/>
+        </p:txBody>
+      </p:sp>
+      <p:sp>
+        <p:nvSpPr>
+          <p:cNvPr id="41" name="TextBox 40"/>
+          <p:cNvSpPr txBox="1"/>
+          <p:nvPr/>
+        </p:nvSpPr>
+        <p:spPr>
+          <a:xfrm>
+            <a:off x="713232" y="4992624"/>
+            <a:ext cx="457200" cy="411480"/>
+          </a:xfrm>
+          <a:prstGeom prst="rect">
+            <a:avLst/>
+          </a:prstGeom>
+          <a:noFill/>
+        </p:spPr>
+        <p:txBody>
+          <a:bodyPr wrap="square" lIns="0" rIns="0" tIns="0" bIns="0" anchor="t">
+            <a:spAutoFit/>
+          </a:bodyPr>
+          <a:lstStyle/>
+          <a:p>
+            <a:pPr algn="l">
+              <a:lnSpc>
+                <a:spcPct val="108000"/>
+              </a:lnSpc>
+              <a:spcAft>
+                <a:spcPts val="400"/>
+              </a:spcAft>
+            </a:pPr>
+            <a:r>
+              <a:rPr sz="2000" b="1" i="0">
+                <a:solidFill>
+                  <a:srgbClr val="0D9488"/>
+                </a:solidFill>
+                <a:latin typeface="Calibri"/>
+              </a:rPr>
+              <a:t>10</a:t>
+            </a:r>
+          </a:p>
+        </p:txBody>
+      </p:sp>
       <p:sp>
         <p:nvSpPr>
           <p:cNvPr id="42" name="TextBox 41"/>
@@ -10765,36 +9562,36 @@
         </p:nvSpPr>
         <p:spPr>
           <a:xfrm>
-            <a:off x="10744200" y="4160520"/>
-            <a:ext cx="640080" cy="640080"/>
-          </a:xfrm>
-          <a:prstGeom prst="rect">
-            <a:avLst/>
-          </a:prstGeom>
-          <a:noFill/>
-        </p:spPr>
-        <p:txBody>
-          <a:bodyPr wrap="square" lIns="0" rIns="0" tIns="0" bIns="0" anchor="t">
-            <a:spAutoFit/>
-          </a:bodyPr>
-          <a:lstStyle/>
-          <a:p>
-            <a:pPr algn="r">
-              <a:lnSpc>
-                <a:spcPct val="108000"/>
-              </a:lnSpc>
-              <a:spcAft>
-                <a:spcPts val="400"/>
-              </a:spcAft>
-            </a:pPr>
-            <a:r>
-              <a:rPr sz="3600" b="1" i="0">
-                <a:solidFill>
-                  <a:srgbClr val="CCFBF1"/>
-                </a:solidFill>
-                <a:latin typeface="Calibri"/>
-              </a:rPr>
-              <a:t>6</a:t>
+            <a:off x="1170432" y="5010912"/>
+            <a:ext cx="2774594" cy="320040"/>
+          </a:xfrm>
+          <a:prstGeom prst="rect">
+            <a:avLst/>
+          </a:prstGeom>
+          <a:noFill/>
+        </p:spPr>
+        <p:txBody>
+          <a:bodyPr wrap="square" lIns="0" rIns="0" tIns="0" bIns="0" anchor="t">
+            <a:spAutoFit/>
+          </a:bodyPr>
+          <a:lstStyle/>
+          <a:p>
+            <a:pPr algn="l">
+              <a:lnSpc>
+                <a:spcPct val="108000"/>
+              </a:lnSpc>
+              <a:spcAft>
+                <a:spcPts val="400"/>
+              </a:spcAft>
+            </a:pPr>
+            <a:r>
+              <a:rPr sz="1300" b="1" i="0">
+                <a:solidFill>
+                  <a:srgbClr val="0F172A"/>
+                </a:solidFill>
+                <a:latin typeface="Calibri"/>
+              </a:rPr>
+              <a:t>Email đặt lịch thành công</a:t>
             </a:r>
           </a:p>
         </p:txBody>
@@ -10807,8 +9604,8 @@
         </p:nvSpPr>
         <p:spPr>
           <a:xfrm>
-            <a:off x="8339328" y="4892040"/>
-            <a:ext cx="3072384" cy="320040"/>
+            <a:off x="1170432" y="5321808"/>
+            <a:ext cx="2774594" cy="594360"/>
           </a:xfrm>
           <a:prstGeom prst="rect">
             <a:avLst/>
@@ -10830,27 +9627,161 @@
               </a:spcAft>
             </a:pPr>
             <a:r>
-              <a:rPr sz="1700" b="1" i="0">
+              <a:rPr sz="1050" b="0" i="0">
+                <a:solidFill>
+                  <a:srgbClr val="475569"/>
+                </a:solidFill>
+                <a:latin typeface="Calibri"/>
+              </a:rPr>
+              <a:t>Email đầy đủ, gửi ngay; gửi bổ sung từ màn hình thành công</a:t>
+            </a:r>
+          </a:p>
+        </p:txBody>
+      </p:sp>
+      <p:sp>
+        <p:nvSpPr>
+          <p:cNvPr id="44" name="Rounded Rectangle 43"/>
+          <p:cNvSpPr/>
+          <p:nvPr/>
+        </p:nvSpPr>
+        <p:spPr>
+          <a:xfrm>
+            <a:off x="4319930" y="4901184"/>
+            <a:ext cx="3551834" cy="1051560"/>
+          </a:xfrm>
+          <a:prstGeom prst="roundRect">
+            <a:avLst>
+              <a:gd name="adj" fmla="val 8000"/>
+            </a:avLst>
+          </a:prstGeom>
+          <a:solidFill>
+            <a:srgbClr val="FFFFFF"/>
+          </a:solidFill>
+          <a:ln>
+            <a:noFill/>
+          </a:ln>
+          <a:effectLst>
+            <a:outerShdw blurRad="152400" dist="38100" dir="5400000" algn="t" rotWithShape="0">
+              <a:srgbClr val="0F172A">
+                <a:alpha val="14000"/>
+              </a:srgbClr>
+            </a:outerShdw>
+          </a:effectLst>
+        </p:spPr>
+        <p:style>
+          <a:lnRef idx="1">
+            <a:schemeClr val="accent1"/>
+          </a:lnRef>
+          <a:fillRef idx="3">
+            <a:schemeClr val="accent1"/>
+          </a:fillRef>
+          <a:effectRef idx="2">
+            <a:schemeClr val="accent1"/>
+          </a:effectRef>
+          <a:fontRef idx="minor">
+            <a:schemeClr val="lt1"/>
+          </a:fontRef>
+        </p:style>
+        <p:txBody>
+          <a:bodyPr rtlCol="0" anchor="ctr"/>
+          <a:lstStyle/>
+          <a:p/>
+        </p:txBody>
+      </p:sp>
+      <p:sp>
+        <p:nvSpPr>
+          <p:cNvPr id="45" name="TextBox 44"/>
+          <p:cNvSpPr txBox="1"/>
+          <p:nvPr/>
+        </p:nvSpPr>
+        <p:spPr>
+          <a:xfrm>
+            <a:off x="4484522" y="4992624"/>
+            <a:ext cx="457200" cy="411480"/>
+          </a:xfrm>
+          <a:prstGeom prst="rect">
+            <a:avLst/>
+          </a:prstGeom>
+          <a:noFill/>
+        </p:spPr>
+        <p:txBody>
+          <a:bodyPr wrap="square" lIns="0" rIns="0" tIns="0" bIns="0" anchor="t">
+            <a:spAutoFit/>
+          </a:bodyPr>
+          <a:lstStyle/>
+          <a:p>
+            <a:pPr algn="l">
+              <a:lnSpc>
+                <a:spcPct val="108000"/>
+              </a:lnSpc>
+              <a:spcAft>
+                <a:spcPts val="400"/>
+              </a:spcAft>
+            </a:pPr>
+            <a:r>
+              <a:rPr sz="2000" b="1" i="0">
+                <a:solidFill>
+                  <a:srgbClr val="0D9488"/>
+                </a:solidFill>
+                <a:latin typeface="Calibri"/>
+              </a:rPr>
+              <a:t>11</a:t>
+            </a:r>
+          </a:p>
+        </p:txBody>
+      </p:sp>
+      <p:sp>
+        <p:nvSpPr>
+          <p:cNvPr id="46" name="TextBox 45"/>
+          <p:cNvSpPr txBox="1"/>
+          <p:nvPr/>
+        </p:nvSpPr>
+        <p:spPr>
+          <a:xfrm>
+            <a:off x="4941722" y="5010912"/>
+            <a:ext cx="2774594" cy="320040"/>
+          </a:xfrm>
+          <a:prstGeom prst="rect">
+            <a:avLst/>
+          </a:prstGeom>
+          <a:noFill/>
+        </p:spPr>
+        <p:txBody>
+          <a:bodyPr wrap="square" lIns="0" rIns="0" tIns="0" bIns="0" anchor="t">
+            <a:spAutoFit/>
+          </a:bodyPr>
+          <a:lstStyle/>
+          <a:p>
+            <a:pPr algn="l">
+              <a:lnSpc>
+                <a:spcPct val="108000"/>
+              </a:lnSpc>
+              <a:spcAft>
+                <a:spcPts val="400"/>
+              </a:spcAft>
+            </a:pPr>
+            <a:r>
+              <a:rPr sz="1300" b="1" i="0">
                 <a:solidFill>
                   <a:srgbClr val="0F172A"/>
                 </a:solidFill>
                 <a:latin typeface="Calibri"/>
               </a:rPr>
-              <a:t>Báo cáo &amp; kiểm soát</a:t>
-            </a:r>
-          </a:p>
-        </p:txBody>
-      </p:sp>
-      <p:sp>
-        <p:nvSpPr>
-          <p:cNvPr id="44" name="TextBox 43"/>
-          <p:cNvSpPr txBox="1"/>
-          <p:nvPr/>
-        </p:nvSpPr>
-        <p:spPr>
-          <a:xfrm>
-            <a:off x="8339328" y="5221224"/>
-            <a:ext cx="3072384" cy="274320"/>
+              <a:t>Giữ chỗ 10–15 phút</a:t>
+            </a:r>
+          </a:p>
+        </p:txBody>
+      </p:sp>
+      <p:sp>
+        <p:nvSpPr>
+          <p:cNvPr id="47" name="TextBox 46"/>
+          <p:cNvSpPr txBox="1"/>
+          <p:nvPr/>
+        </p:nvSpPr>
+        <p:spPr>
+          <a:xfrm>
+            <a:off x="4941722" y="5321808"/>
+            <a:ext cx="2774594" cy="594360"/>
           </a:xfrm>
           <a:prstGeom prst="rect">
             <a:avLst/>
@@ -10872,62 +9803,20 @@
               </a:spcAft>
             </a:pPr>
             <a:r>
-              <a:rPr sz="1200" b="1" i="0">
-                <a:solidFill>
-                  <a:srgbClr val="0F766E"/>
-                </a:solidFill>
-                <a:latin typeface="Calibri"/>
-              </a:rPr>
-              <a:t>owner@ · admin@</a:t>
-            </a:r>
-          </a:p>
-        </p:txBody>
-      </p:sp>
-      <p:sp>
-        <p:nvSpPr>
-          <p:cNvPr id="45" name="TextBox 44"/>
-          <p:cNvSpPr txBox="1"/>
-          <p:nvPr/>
-        </p:nvSpPr>
-        <p:spPr>
-          <a:xfrm>
-            <a:off x="8339328" y="5513832"/>
-            <a:ext cx="3072384" cy="640080"/>
-          </a:xfrm>
-          <a:prstGeom prst="rect">
-            <a:avLst/>
-          </a:prstGeom>
-          <a:noFill/>
-        </p:spPr>
-        <p:txBody>
-          <a:bodyPr wrap="square" lIns="0" rIns="0" tIns="0" bIns="0" anchor="t">
-            <a:spAutoFit/>
-          </a:bodyPr>
-          <a:lstStyle/>
-          <a:p>
-            <a:pPr algn="l">
-              <a:lnSpc>
-                <a:spcPct val="108000"/>
-              </a:lnSpc>
-              <a:spcAft>
-                <a:spcPts val="400"/>
-              </a:spcAft>
-            </a:pPr>
-            <a:r>
-              <a:rPr sz="1250" b="0" i="0">
+              <a:rPr sz="1050" b="0" i="0">
                 <a:solidFill>
                   <a:srgbClr val="475569"/>
                 </a:solidFill>
                 <a:latin typeface="Calibri"/>
               </a:rPr>
-              <a:t>Doanh thu cộng đúng thợ, xuất CSV; Nhật ký ghi mọi thao tác</a:t>
-            </a:r>
-          </a:p>
-        </p:txBody>
-      </p:sp>
-      <p:sp>
-        <p:nvSpPr>
-          <p:cNvPr id="46" name="TextBox 45"/>
+              <a:t>Khoá khung giờ khi khách điền form; đếm ngược; 10 khách tranh 1 khung → 1</a:t>
+            </a:r>
+          </a:p>
+        </p:txBody>
+      </p:sp>
+      <p:sp>
+        <p:nvSpPr>
+          <p:cNvPr id="48" name="TextBox 47"/>
           <p:cNvSpPr txBox="1"/>
           <p:nvPr/>
         </p:nvSpPr>
@@ -10969,7 +9858,7 @@
       </p:sp>
       <p:sp>
         <p:nvSpPr>
-          <p:cNvPr id="47" name="TextBox 46"/>
+          <p:cNvPr id="49" name="TextBox 48"/>
           <p:cNvSpPr txBox="1"/>
           <p:nvPr/>
         </p:nvSpPr>
@@ -11018,6 +9907,3981 @@
 </file>
 
 <file path=ppt/slides/slide13.xml><?xml version="1.0" encoding="utf-8"?>
+<p:sld xmlns:a="http://schemas.openxmlformats.org/drawingml/2006/main" xmlns:p="http://schemas.openxmlformats.org/presentationml/2006/main" xmlns:r="http://schemas.openxmlformats.org/officeDocument/2006/relationships">
+  <p:cSld>
+    <p:bg>
+      <p:bgPr>
+        <a:solidFill>
+          <a:srgbClr val="F8FAFC"/>
+        </a:solidFill>
+        <a:effectLst/>
+      </p:bgPr>
+    </p:bg>
+    <p:spTree>
+      <p:nvGrpSpPr>
+        <p:cNvPr id="1" name=""/>
+        <p:cNvGrpSpPr/>
+        <p:nvPr/>
+      </p:nvGrpSpPr>
+      <p:grpSpPr/>
+      <p:sp>
+        <p:nvSpPr>
+          <p:cNvPr id="2" name="TextBox 1"/>
+          <p:cNvSpPr txBox="1"/>
+          <p:nvPr/>
+        </p:nvSpPr>
+        <p:spPr>
+          <a:xfrm>
+            <a:off x="548640" y="384048"/>
+            <a:ext cx="8229600" cy="274320"/>
+          </a:xfrm>
+          <a:prstGeom prst="rect">
+            <a:avLst/>
+          </a:prstGeom>
+          <a:noFill/>
+        </p:spPr>
+        <p:txBody>
+          <a:bodyPr wrap="square" lIns="0" rIns="0" tIns="0" bIns="0" anchor="t">
+            <a:spAutoFit/>
+          </a:bodyPr>
+          <a:lstStyle/>
+          <a:p>
+            <a:pPr algn="l">
+              <a:lnSpc>
+                <a:spcPct val="108000"/>
+              </a:lnSpc>
+              <a:spcAft>
+                <a:spcPts val="400"/>
+              </a:spcAft>
+            </a:pPr>
+            <a:r>
+              <a:rPr sz="1200" b="1" i="0">
+                <a:solidFill>
+                  <a:srgbClr val="0D9488"/>
+                </a:solidFill>
+                <a:latin typeface="Calibri"/>
+              </a:rPr>
+              <a:t>13  ·  ĐẢM BẢO CHẤT LƯỢNG</a:t>
+            </a:r>
+          </a:p>
+        </p:txBody>
+      </p:sp>
+      <p:sp>
+        <p:nvSpPr>
+          <p:cNvPr id="3" name="TextBox 2"/>
+          <p:cNvSpPr txBox="1"/>
+          <p:nvPr/>
+        </p:nvSpPr>
+        <p:spPr>
+          <a:xfrm>
+            <a:off x="548640" y="658368"/>
+            <a:ext cx="11064240" cy="731520"/>
+          </a:xfrm>
+          <a:prstGeom prst="rect">
+            <a:avLst/>
+          </a:prstGeom>
+          <a:noFill/>
+        </p:spPr>
+        <p:txBody>
+          <a:bodyPr wrap="square" lIns="0" rIns="0" tIns="0" bIns="0" anchor="t">
+            <a:spAutoFit/>
+          </a:bodyPr>
+          <a:lstStyle/>
+          <a:p>
+            <a:pPr algn="l">
+              <a:lnSpc>
+                <a:spcPct val="108000"/>
+              </a:lnSpc>
+              <a:spcAft>
+                <a:spcPts val="400"/>
+              </a:spcAft>
+            </a:pPr>
+            <a:r>
+              <a:rPr sz="3200" b="1" i="0">
+                <a:solidFill>
+                  <a:srgbClr val="0F172A"/>
+                </a:solidFill>
+                <a:latin typeface="Calibri"/>
+              </a:rPr>
+              <a:t>100% kiểm thử đạt · 0 cảnh báo lint · đồng bộ Backlog</a:t>
+            </a:r>
+          </a:p>
+        </p:txBody>
+      </p:sp>
+      <p:sp>
+        <p:nvSpPr>
+          <p:cNvPr id="4" name="Rounded Rectangle 3"/>
+          <p:cNvSpPr/>
+          <p:nvPr/>
+        </p:nvSpPr>
+        <p:spPr>
+          <a:xfrm>
+            <a:off x="548640" y="1554480"/>
+            <a:ext cx="2624328" cy="1783080"/>
+          </a:xfrm>
+          <a:prstGeom prst="roundRect">
+            <a:avLst>
+              <a:gd name="adj" fmla="val 8000"/>
+            </a:avLst>
+          </a:prstGeom>
+          <a:solidFill>
+            <a:srgbClr val="FFFFFF"/>
+          </a:solidFill>
+          <a:ln>
+            <a:noFill/>
+          </a:ln>
+          <a:effectLst>
+            <a:outerShdw blurRad="152400" dist="38100" dir="5400000" algn="t" rotWithShape="0">
+              <a:srgbClr val="0F172A">
+                <a:alpha val="14000"/>
+              </a:srgbClr>
+            </a:outerShdw>
+          </a:effectLst>
+        </p:spPr>
+        <p:style>
+          <a:lnRef idx="1">
+            <a:schemeClr val="accent1"/>
+          </a:lnRef>
+          <a:fillRef idx="3">
+            <a:schemeClr val="accent1"/>
+          </a:fillRef>
+          <a:effectRef idx="2">
+            <a:schemeClr val="accent1"/>
+          </a:effectRef>
+          <a:fontRef idx="minor">
+            <a:schemeClr val="lt1"/>
+          </a:fontRef>
+        </p:style>
+        <p:txBody>
+          <a:bodyPr rtlCol="0" anchor="ctr"/>
+          <a:lstStyle/>
+          <a:p/>
+        </p:txBody>
+      </p:sp>
+      <p:sp>
+        <p:nvSpPr>
+          <p:cNvPr id="5" name="TextBox 4"/>
+          <p:cNvSpPr txBox="1"/>
+          <p:nvPr/>
+        </p:nvSpPr>
+        <p:spPr>
+          <a:xfrm>
+            <a:off x="804672" y="1719072"/>
+            <a:ext cx="2167128" cy="731520"/>
+          </a:xfrm>
+          <a:prstGeom prst="rect">
+            <a:avLst/>
+          </a:prstGeom>
+          <a:noFill/>
+        </p:spPr>
+        <p:txBody>
+          <a:bodyPr wrap="square" lIns="0" rIns="0" tIns="0" bIns="0" anchor="t">
+            <a:spAutoFit/>
+          </a:bodyPr>
+          <a:lstStyle/>
+          <a:p>
+            <a:pPr algn="l">
+              <a:lnSpc>
+                <a:spcPct val="108000"/>
+              </a:lnSpc>
+              <a:spcAft>
+                <a:spcPts val="400"/>
+              </a:spcAft>
+            </a:pPr>
+            <a:r>
+              <a:rPr sz="4000" b="1" i="0">
+                <a:solidFill>
+                  <a:srgbClr val="0D9488"/>
+                </a:solidFill>
+                <a:latin typeface="Calibri"/>
+              </a:rPr>
+              <a:t>168/168</a:t>
+            </a:r>
+          </a:p>
+        </p:txBody>
+      </p:sp>
+      <p:sp>
+        <p:nvSpPr>
+          <p:cNvPr id="6" name="TextBox 5"/>
+          <p:cNvSpPr txBox="1"/>
+          <p:nvPr/>
+        </p:nvSpPr>
+        <p:spPr>
+          <a:xfrm>
+            <a:off x="804672" y="2487168"/>
+            <a:ext cx="2167128" cy="320040"/>
+          </a:xfrm>
+          <a:prstGeom prst="rect">
+            <a:avLst/>
+          </a:prstGeom>
+          <a:noFill/>
+        </p:spPr>
+        <p:txBody>
+          <a:bodyPr wrap="square" lIns="0" rIns="0" tIns="0" bIns="0" anchor="t">
+            <a:spAutoFit/>
+          </a:bodyPr>
+          <a:lstStyle/>
+          <a:p>
+            <a:pPr algn="l">
+              <a:lnSpc>
+                <a:spcPct val="108000"/>
+              </a:lnSpc>
+              <a:spcAft>
+                <a:spcPts val="400"/>
+              </a:spcAft>
+            </a:pPr>
+            <a:r>
+              <a:rPr sz="1500" b="1" i="0">
+                <a:solidFill>
+                  <a:srgbClr val="0F172A"/>
+                </a:solidFill>
+                <a:latin typeface="Calibri"/>
+              </a:rPr>
+              <a:t>Unit test đạt</a:t>
+            </a:r>
+          </a:p>
+        </p:txBody>
+      </p:sp>
+      <p:sp>
+        <p:nvSpPr>
+          <p:cNvPr id="7" name="TextBox 6"/>
+          <p:cNvSpPr txBox="1"/>
+          <p:nvPr/>
+        </p:nvSpPr>
+        <p:spPr>
+          <a:xfrm>
+            <a:off x="804672" y="2834640"/>
+            <a:ext cx="2167128" cy="365760"/>
+          </a:xfrm>
+          <a:prstGeom prst="rect">
+            <a:avLst/>
+          </a:prstGeom>
+          <a:noFill/>
+        </p:spPr>
+        <p:txBody>
+          <a:bodyPr wrap="square" lIns="0" rIns="0" tIns="0" bIns="0" anchor="t">
+            <a:spAutoFit/>
+          </a:bodyPr>
+          <a:lstStyle/>
+          <a:p>
+            <a:pPr algn="l">
+              <a:lnSpc>
+                <a:spcPct val="108000"/>
+              </a:lnSpc>
+              <a:spcAft>
+                <a:spcPts val="400"/>
+              </a:spcAft>
+            </a:pPr>
+            <a:r>
+              <a:rPr sz="1200" b="0" i="0">
+                <a:solidFill>
+                  <a:srgbClr val="475569"/>
+                </a:solidFill>
+                <a:latin typeface="Calibri"/>
+              </a:rPr>
+              <a:t>11 bộ + Launcher 4/4</a:t>
+            </a:r>
+          </a:p>
+        </p:txBody>
+      </p:sp>
+      <p:sp>
+        <p:nvSpPr>
+          <p:cNvPr id="8" name="Rounded Rectangle 7"/>
+          <p:cNvSpPr/>
+          <p:nvPr/>
+        </p:nvSpPr>
+        <p:spPr>
+          <a:xfrm>
+            <a:off x="3364992" y="1554480"/>
+            <a:ext cx="2624328" cy="1783080"/>
+          </a:xfrm>
+          <a:prstGeom prst="roundRect">
+            <a:avLst>
+              <a:gd name="adj" fmla="val 8000"/>
+            </a:avLst>
+          </a:prstGeom>
+          <a:solidFill>
+            <a:srgbClr val="FFFFFF"/>
+          </a:solidFill>
+          <a:ln>
+            <a:noFill/>
+          </a:ln>
+          <a:effectLst>
+            <a:outerShdw blurRad="152400" dist="38100" dir="5400000" algn="t" rotWithShape="0">
+              <a:srgbClr val="0F172A">
+                <a:alpha val="14000"/>
+              </a:srgbClr>
+            </a:outerShdw>
+          </a:effectLst>
+        </p:spPr>
+        <p:style>
+          <a:lnRef idx="1">
+            <a:schemeClr val="accent1"/>
+          </a:lnRef>
+          <a:fillRef idx="3">
+            <a:schemeClr val="accent1"/>
+          </a:fillRef>
+          <a:effectRef idx="2">
+            <a:schemeClr val="accent1"/>
+          </a:effectRef>
+          <a:fontRef idx="minor">
+            <a:schemeClr val="lt1"/>
+          </a:fontRef>
+        </p:style>
+        <p:txBody>
+          <a:bodyPr rtlCol="0" anchor="ctr"/>
+          <a:lstStyle/>
+          <a:p/>
+        </p:txBody>
+      </p:sp>
+      <p:sp>
+        <p:nvSpPr>
+          <p:cNvPr id="9" name="TextBox 8"/>
+          <p:cNvSpPr txBox="1"/>
+          <p:nvPr/>
+        </p:nvSpPr>
+        <p:spPr>
+          <a:xfrm>
+            <a:off x="3621024" y="1719072"/>
+            <a:ext cx="2167128" cy="731520"/>
+          </a:xfrm>
+          <a:prstGeom prst="rect">
+            <a:avLst/>
+          </a:prstGeom>
+          <a:noFill/>
+        </p:spPr>
+        <p:txBody>
+          <a:bodyPr wrap="square" lIns="0" rIns="0" tIns="0" bIns="0" anchor="t">
+            <a:spAutoFit/>
+          </a:bodyPr>
+          <a:lstStyle/>
+          <a:p>
+            <a:pPr algn="l">
+              <a:lnSpc>
+                <a:spcPct val="108000"/>
+              </a:lnSpc>
+              <a:spcAft>
+                <a:spcPts val="400"/>
+              </a:spcAft>
+            </a:pPr>
+            <a:r>
+              <a:rPr sz="4000" b="1" i="0">
+                <a:solidFill>
+                  <a:srgbClr val="0D9488"/>
+                </a:solidFill>
+                <a:latin typeface="Calibri"/>
+              </a:rPr>
+              <a:t>95/95</a:t>
+            </a:r>
+          </a:p>
+        </p:txBody>
+      </p:sp>
+      <p:sp>
+        <p:nvSpPr>
+          <p:cNvPr id="10" name="TextBox 9"/>
+          <p:cNvSpPr txBox="1"/>
+          <p:nvPr/>
+        </p:nvSpPr>
+        <p:spPr>
+          <a:xfrm>
+            <a:off x="3621024" y="2487168"/>
+            <a:ext cx="2167128" cy="320040"/>
+          </a:xfrm>
+          <a:prstGeom prst="rect">
+            <a:avLst/>
+          </a:prstGeom>
+          <a:noFill/>
+        </p:spPr>
+        <p:txBody>
+          <a:bodyPr wrap="square" lIns="0" rIns="0" tIns="0" bIns="0" anchor="t">
+            <a:spAutoFit/>
+          </a:bodyPr>
+          <a:lstStyle/>
+          <a:p>
+            <a:pPr algn="l">
+              <a:lnSpc>
+                <a:spcPct val="108000"/>
+              </a:lnSpc>
+              <a:spcAft>
+                <a:spcPts val="400"/>
+              </a:spcAft>
+            </a:pPr>
+            <a:r>
+              <a:rPr sz="1500" b="1" i="0">
+                <a:solidFill>
+                  <a:srgbClr val="0F172A"/>
+                </a:solidFill>
+                <a:latin typeface="Calibri"/>
+              </a:rPr>
+              <a:t>E2E test đạt</a:t>
+            </a:r>
+          </a:p>
+        </p:txBody>
+      </p:sp>
+      <p:sp>
+        <p:nvSpPr>
+          <p:cNvPr id="11" name="TextBox 10"/>
+          <p:cNvSpPr txBox="1"/>
+          <p:nvPr/>
+        </p:nvSpPr>
+        <p:spPr>
+          <a:xfrm>
+            <a:off x="3621024" y="2834640"/>
+            <a:ext cx="2167128" cy="365760"/>
+          </a:xfrm>
+          <a:prstGeom prst="rect">
+            <a:avLst/>
+          </a:prstGeom>
+          <a:noFill/>
+        </p:spPr>
+        <p:txBody>
+          <a:bodyPr wrap="square" lIns="0" rIns="0" tIns="0" bIns="0" anchor="t">
+            <a:spAutoFit/>
+          </a:bodyPr>
+          <a:lstStyle/>
+          <a:p>
+            <a:pPr algn="l">
+              <a:lnSpc>
+                <a:spcPct val="108000"/>
+              </a:lnSpc>
+              <a:spcAft>
+                <a:spcPts val="400"/>
+              </a:spcAft>
+            </a:pPr>
+            <a:r>
+              <a:rPr sz="1200" b="0" i="0">
+                <a:solidFill>
+                  <a:srgbClr val="475569"/>
+                </a:solidFill>
+                <a:latin typeface="Calibri"/>
+              </a:rPr>
+              <a:t>13 bộ PostgreSQL · Demo 4/4</a:t>
+            </a:r>
+          </a:p>
+        </p:txBody>
+      </p:sp>
+      <p:sp>
+        <p:nvSpPr>
+          <p:cNvPr id="12" name="Rounded Rectangle 11"/>
+          <p:cNvSpPr/>
+          <p:nvPr/>
+        </p:nvSpPr>
+        <p:spPr>
+          <a:xfrm>
+            <a:off x="6181344" y="1554480"/>
+            <a:ext cx="2624328" cy="1783080"/>
+          </a:xfrm>
+          <a:prstGeom prst="roundRect">
+            <a:avLst>
+              <a:gd name="adj" fmla="val 8000"/>
+            </a:avLst>
+          </a:prstGeom>
+          <a:solidFill>
+            <a:srgbClr val="FFFFFF"/>
+          </a:solidFill>
+          <a:ln>
+            <a:noFill/>
+          </a:ln>
+          <a:effectLst>
+            <a:outerShdw blurRad="152400" dist="38100" dir="5400000" algn="t" rotWithShape="0">
+              <a:srgbClr val="0F172A">
+                <a:alpha val="14000"/>
+              </a:srgbClr>
+            </a:outerShdw>
+          </a:effectLst>
+        </p:spPr>
+        <p:style>
+          <a:lnRef idx="1">
+            <a:schemeClr val="accent1"/>
+          </a:lnRef>
+          <a:fillRef idx="3">
+            <a:schemeClr val="accent1"/>
+          </a:fillRef>
+          <a:effectRef idx="2">
+            <a:schemeClr val="accent1"/>
+          </a:effectRef>
+          <a:fontRef idx="minor">
+            <a:schemeClr val="lt1"/>
+          </a:fontRef>
+        </p:style>
+        <p:txBody>
+          <a:bodyPr rtlCol="0" anchor="ctr"/>
+          <a:lstStyle/>
+          <a:p/>
+        </p:txBody>
+      </p:sp>
+      <p:sp>
+        <p:nvSpPr>
+          <p:cNvPr id="13" name="TextBox 12"/>
+          <p:cNvSpPr txBox="1"/>
+          <p:nvPr/>
+        </p:nvSpPr>
+        <p:spPr>
+          <a:xfrm>
+            <a:off x="6437376" y="1719072"/>
+            <a:ext cx="2167128" cy="731520"/>
+          </a:xfrm>
+          <a:prstGeom prst="rect">
+            <a:avLst/>
+          </a:prstGeom>
+          <a:noFill/>
+        </p:spPr>
+        <p:txBody>
+          <a:bodyPr wrap="square" lIns="0" rIns="0" tIns="0" bIns="0" anchor="t">
+            <a:spAutoFit/>
+          </a:bodyPr>
+          <a:lstStyle/>
+          <a:p>
+            <a:pPr algn="l">
+              <a:lnSpc>
+                <a:spcPct val="108000"/>
+              </a:lnSpc>
+              <a:spcAft>
+                <a:spcPts val="400"/>
+              </a:spcAft>
+            </a:pPr>
+            <a:r>
+              <a:rPr sz="4000" b="1" i="0">
+                <a:solidFill>
+                  <a:srgbClr val="0D9488"/>
+                </a:solidFill>
+                <a:latin typeface="Calibri"/>
+              </a:rPr>
+              <a:t>0</a:t>
+            </a:r>
+          </a:p>
+        </p:txBody>
+      </p:sp>
+      <p:sp>
+        <p:nvSpPr>
+          <p:cNvPr id="14" name="TextBox 13"/>
+          <p:cNvSpPr txBox="1"/>
+          <p:nvPr/>
+        </p:nvSpPr>
+        <p:spPr>
+          <a:xfrm>
+            <a:off x="6437376" y="2487168"/>
+            <a:ext cx="2167128" cy="320040"/>
+          </a:xfrm>
+          <a:prstGeom prst="rect">
+            <a:avLst/>
+          </a:prstGeom>
+          <a:noFill/>
+        </p:spPr>
+        <p:txBody>
+          <a:bodyPr wrap="square" lIns="0" rIns="0" tIns="0" bIns="0" anchor="t">
+            <a:spAutoFit/>
+          </a:bodyPr>
+          <a:lstStyle/>
+          <a:p>
+            <a:pPr algn="l">
+              <a:lnSpc>
+                <a:spcPct val="108000"/>
+              </a:lnSpc>
+              <a:spcAft>
+                <a:spcPts val="400"/>
+              </a:spcAft>
+            </a:pPr>
+            <a:r>
+              <a:rPr sz="1500" b="1" i="0">
+                <a:solidFill>
+                  <a:srgbClr val="0F172A"/>
+                </a:solidFill>
+                <a:latin typeface="Calibri"/>
+              </a:rPr>
+              <a:t>Lỗi build · cảnh báo lint</a:t>
+            </a:r>
+          </a:p>
+        </p:txBody>
+      </p:sp>
+      <p:sp>
+        <p:nvSpPr>
+          <p:cNvPr id="15" name="TextBox 14"/>
+          <p:cNvSpPr txBox="1"/>
+          <p:nvPr/>
+        </p:nvSpPr>
+        <p:spPr>
+          <a:xfrm>
+            <a:off x="6437376" y="2834640"/>
+            <a:ext cx="2167128" cy="365760"/>
+          </a:xfrm>
+          <a:prstGeom prst="rect">
+            <a:avLst/>
+          </a:prstGeom>
+          <a:noFill/>
+        </p:spPr>
+        <p:txBody>
+          <a:bodyPr wrap="square" lIns="0" rIns="0" tIns="0" bIns="0" anchor="t">
+            <a:spAutoFit/>
+          </a:bodyPr>
+          <a:lstStyle/>
+          <a:p>
+            <a:pPr algn="l">
+              <a:lnSpc>
+                <a:spcPct val="108000"/>
+              </a:lnSpc>
+              <a:spcAft>
+                <a:spcPts val="400"/>
+              </a:spcAft>
+            </a:pPr>
+            <a:r>
+              <a:rPr sz="1200" b="0" i="0">
+                <a:solidFill>
+                  <a:srgbClr val="475569"/>
+                </a:solidFill>
+                <a:latin typeface="Calibri"/>
+              </a:rPr>
+              <a:t>tsc -b · ESLint --max-warnings 0</a:t>
+            </a:r>
+          </a:p>
+        </p:txBody>
+      </p:sp>
+      <p:sp>
+        <p:nvSpPr>
+          <p:cNvPr id="16" name="Rounded Rectangle 15"/>
+          <p:cNvSpPr/>
+          <p:nvPr/>
+        </p:nvSpPr>
+        <p:spPr>
+          <a:xfrm>
+            <a:off x="8997696" y="1554480"/>
+            <a:ext cx="2624328" cy="1783080"/>
+          </a:xfrm>
+          <a:prstGeom prst="roundRect">
+            <a:avLst>
+              <a:gd name="adj" fmla="val 8000"/>
+            </a:avLst>
+          </a:prstGeom>
+          <a:solidFill>
+            <a:srgbClr val="FFFFFF"/>
+          </a:solidFill>
+          <a:ln>
+            <a:noFill/>
+          </a:ln>
+          <a:effectLst>
+            <a:outerShdw blurRad="152400" dist="38100" dir="5400000" algn="t" rotWithShape="0">
+              <a:srgbClr val="0F172A">
+                <a:alpha val="14000"/>
+              </a:srgbClr>
+            </a:outerShdw>
+          </a:effectLst>
+        </p:spPr>
+        <p:style>
+          <a:lnRef idx="1">
+            <a:schemeClr val="accent1"/>
+          </a:lnRef>
+          <a:fillRef idx="3">
+            <a:schemeClr val="accent1"/>
+          </a:fillRef>
+          <a:effectRef idx="2">
+            <a:schemeClr val="accent1"/>
+          </a:effectRef>
+          <a:fontRef idx="minor">
+            <a:schemeClr val="lt1"/>
+          </a:fontRef>
+        </p:style>
+        <p:txBody>
+          <a:bodyPr rtlCol="0" anchor="ctr"/>
+          <a:lstStyle/>
+          <a:p/>
+        </p:txBody>
+      </p:sp>
+      <p:sp>
+        <p:nvSpPr>
+          <p:cNvPr id="17" name="TextBox 16"/>
+          <p:cNvSpPr txBox="1"/>
+          <p:nvPr/>
+        </p:nvSpPr>
+        <p:spPr>
+          <a:xfrm>
+            <a:off x="9253728" y="1719072"/>
+            <a:ext cx="2167128" cy="731520"/>
+          </a:xfrm>
+          <a:prstGeom prst="rect">
+            <a:avLst/>
+          </a:prstGeom>
+          <a:noFill/>
+        </p:spPr>
+        <p:txBody>
+          <a:bodyPr wrap="square" lIns="0" rIns="0" tIns="0" bIns="0" anchor="t">
+            <a:spAutoFit/>
+          </a:bodyPr>
+          <a:lstStyle/>
+          <a:p>
+            <a:pPr algn="l">
+              <a:lnSpc>
+                <a:spcPct val="108000"/>
+              </a:lnSpc>
+              <a:spcAft>
+                <a:spcPts val="400"/>
+              </a:spcAft>
+            </a:pPr>
+            <a:r>
+              <a:rPr sz="4000" b="1" i="0">
+                <a:solidFill>
+                  <a:srgbClr val="0D9488"/>
+                </a:solidFill>
+                <a:latin typeface="Calibri"/>
+              </a:rPr>
+              <a:t>39 / 39</a:t>
+            </a:r>
+          </a:p>
+        </p:txBody>
+      </p:sp>
+      <p:sp>
+        <p:nvSpPr>
+          <p:cNvPr id="18" name="TextBox 17"/>
+          <p:cNvSpPr txBox="1"/>
+          <p:nvPr/>
+        </p:nvSpPr>
+        <p:spPr>
+          <a:xfrm>
+            <a:off x="9253728" y="2487168"/>
+            <a:ext cx="2167128" cy="320040"/>
+          </a:xfrm>
+          <a:prstGeom prst="rect">
+            <a:avLst/>
+          </a:prstGeom>
+          <a:noFill/>
+        </p:spPr>
+        <p:txBody>
+          <a:bodyPr wrap="square" lIns="0" rIns="0" tIns="0" bIns="0" anchor="t">
+            <a:spAutoFit/>
+          </a:bodyPr>
+          <a:lstStyle/>
+          <a:p>
+            <a:pPr algn="l">
+              <a:lnSpc>
+                <a:spcPct val="108000"/>
+              </a:lnSpc>
+              <a:spcAft>
+                <a:spcPts val="400"/>
+              </a:spcAft>
+            </a:pPr>
+            <a:r>
+              <a:rPr sz="1500" b="1" i="0">
+                <a:solidFill>
+                  <a:srgbClr val="0F172A"/>
+                </a:solidFill>
+                <a:latin typeface="Calibri"/>
+              </a:rPr>
+              <a:t>User story đối chiếu</a:t>
+            </a:r>
+          </a:p>
+        </p:txBody>
+      </p:sp>
+      <p:sp>
+        <p:nvSpPr>
+          <p:cNvPr id="19" name="TextBox 18"/>
+          <p:cNvSpPr txBox="1"/>
+          <p:nvPr/>
+        </p:nvSpPr>
+        <p:spPr>
+          <a:xfrm>
+            <a:off x="9253728" y="2834640"/>
+            <a:ext cx="2167128" cy="365760"/>
+          </a:xfrm>
+          <a:prstGeom prst="rect">
+            <a:avLst/>
+          </a:prstGeom>
+          <a:noFill/>
+        </p:spPr>
+        <p:txBody>
+          <a:bodyPr wrap="square" lIns="0" rIns="0" tIns="0" bIns="0" anchor="t">
+            <a:spAutoFit/>
+          </a:bodyPr>
+          <a:lstStyle/>
+          <a:p>
+            <a:pPr algn="l">
+              <a:lnSpc>
+                <a:spcPct val="108000"/>
+              </a:lnSpc>
+              <a:spcAft>
+                <a:spcPts val="400"/>
+              </a:spcAft>
+            </a:pPr>
+            <a:r>
+              <a:rPr sz="1200" b="0" i="0">
+                <a:solidFill>
+                  <a:srgbClr val="475569"/>
+                </a:solidFill>
+                <a:latin typeface="Calibri"/>
+              </a:rPr>
+              <a:t>4 Sprint · 165 Story Point</a:t>
+            </a:r>
+          </a:p>
+        </p:txBody>
+      </p:sp>
+      <p:sp>
+        <p:nvSpPr>
+          <p:cNvPr id="20" name="TextBox 19"/>
+          <p:cNvSpPr txBox="1"/>
+          <p:nvPr/>
+        </p:nvSpPr>
+        <p:spPr>
+          <a:xfrm>
+            <a:off x="548640" y="3611880"/>
+            <a:ext cx="7315200" cy="320040"/>
+          </a:xfrm>
+          <a:prstGeom prst="rect">
+            <a:avLst/>
+          </a:prstGeom>
+          <a:noFill/>
+        </p:spPr>
+        <p:txBody>
+          <a:bodyPr wrap="square" lIns="0" rIns="0" tIns="0" bIns="0" anchor="t">
+            <a:spAutoFit/>
+          </a:bodyPr>
+          <a:lstStyle/>
+          <a:p>
+            <a:pPr algn="l">
+              <a:lnSpc>
+                <a:spcPct val="108000"/>
+              </a:lnSpc>
+              <a:spcAft>
+                <a:spcPts val="400"/>
+              </a:spcAft>
+            </a:pPr>
+            <a:r>
+              <a:rPr sz="1600" b="1" i="0">
+                <a:solidFill>
+                  <a:srgbClr val="0F172A"/>
+                </a:solidFill>
+                <a:latin typeface="Calibri"/>
+              </a:rPr>
+              <a:t>Vòng phản hồi PO → phát hành có tag (Git Flow)</a:t>
+            </a:r>
+          </a:p>
+        </p:txBody>
+      </p:sp>
+      <p:cxnSp>
+        <p:nvCxnSpPr>
+          <p:cNvPr id="21" name="Connector 20"/>
+          <p:cNvCxnSpPr/>
+          <p:nvPr/>
+        </p:nvCxnSpPr>
+        <p:spPr>
+          <a:xfrm>
+            <a:off x="1097280" y="4526280"/>
+            <a:ext cx="9997135" cy="0"/>
+          </a:xfrm>
+          <a:prstGeom prst="line">
+            <a:avLst/>
+          </a:prstGeom>
+          <a:ln w="38100">
+            <a:solidFill>
+              <a:srgbClr val="99F6E4"/>
+            </a:solidFill>
+          </a:ln>
+        </p:spPr>
+        <p:style>
+          <a:lnRef idx="2">
+            <a:schemeClr val="accent1"/>
+          </a:lnRef>
+          <a:fillRef idx="0">
+            <a:schemeClr val="accent1"/>
+          </a:fillRef>
+          <a:effectRef idx="1">
+            <a:schemeClr val="accent1"/>
+          </a:effectRef>
+          <a:fontRef idx="minor">
+            <a:schemeClr val="tx1"/>
+          </a:fontRef>
+        </p:style>
+      </p:cxnSp>
+      <p:sp>
+        <p:nvSpPr>
+          <p:cNvPr id="22" name="Oval 21"/>
+          <p:cNvSpPr/>
+          <p:nvPr/>
+        </p:nvSpPr>
+        <p:spPr>
+          <a:xfrm>
+            <a:off x="969264" y="4398264"/>
+            <a:ext cx="256032" cy="256032"/>
+          </a:xfrm>
+          <a:prstGeom prst="ellipse">
+            <a:avLst/>
+          </a:prstGeom>
+          <a:solidFill>
+            <a:srgbClr val="0D9488"/>
+          </a:solidFill>
+          <a:ln w="25400">
+            <a:solidFill>
+              <a:srgbClr val="FFFFFF"/>
+            </a:solidFill>
+          </a:ln>
+        </p:spPr>
+        <p:style>
+          <a:lnRef idx="1">
+            <a:schemeClr val="accent1"/>
+          </a:lnRef>
+          <a:fillRef idx="3">
+            <a:schemeClr val="accent1"/>
+          </a:fillRef>
+          <a:effectRef idx="2">
+            <a:schemeClr val="accent1"/>
+          </a:effectRef>
+          <a:fontRef idx="minor">
+            <a:schemeClr val="lt1"/>
+          </a:fontRef>
+        </p:style>
+        <p:txBody>
+          <a:bodyPr rtlCol="0" anchor="ctr"/>
+          <a:lstStyle/>
+          <a:p>
+            <a:pPr algn="ctr"/>
+          </a:p>
+        </p:txBody>
+      </p:sp>
+      <p:sp>
+        <p:nvSpPr>
+          <p:cNvPr id="23" name="TextBox 22"/>
+          <p:cNvSpPr txBox="1"/>
+          <p:nvPr/>
+        </p:nvSpPr>
+        <p:spPr>
+          <a:xfrm>
+            <a:off x="91440" y="3977640"/>
+            <a:ext cx="2011680" cy="274320"/>
+          </a:xfrm>
+          <a:prstGeom prst="rect">
+            <a:avLst/>
+          </a:prstGeom>
+          <a:noFill/>
+        </p:spPr>
+        <p:txBody>
+          <a:bodyPr wrap="square" lIns="0" rIns="0" tIns="0" bIns="0" anchor="t">
+            <a:spAutoFit/>
+          </a:bodyPr>
+          <a:lstStyle/>
+          <a:p>
+            <a:pPr algn="ctr">
+              <a:lnSpc>
+                <a:spcPct val="108000"/>
+              </a:lnSpc>
+              <a:spcAft>
+                <a:spcPts val="400"/>
+              </a:spcAft>
+            </a:pPr>
+            <a:r>
+              <a:rPr sz="1200" b="0" i="0">
+                <a:solidFill>
+                  <a:srgbClr val="475569"/>
+                </a:solidFill>
+                <a:latin typeface="Calibri"/>
+              </a:rPr>
+              <a:t>25/09</a:t>
+            </a:r>
+          </a:p>
+        </p:txBody>
+      </p:sp>
+      <p:sp>
+        <p:nvSpPr>
+          <p:cNvPr id="24" name="TextBox 23"/>
+          <p:cNvSpPr txBox="1"/>
+          <p:nvPr/>
+        </p:nvSpPr>
+        <p:spPr>
+          <a:xfrm>
+            <a:off x="91440" y="4773168"/>
+            <a:ext cx="2011680" cy="320040"/>
+          </a:xfrm>
+          <a:prstGeom prst="rect">
+            <a:avLst/>
+          </a:prstGeom>
+          <a:noFill/>
+        </p:spPr>
+        <p:txBody>
+          <a:bodyPr wrap="square" lIns="0" rIns="0" tIns="0" bIns="0" anchor="t">
+            <a:spAutoFit/>
+          </a:bodyPr>
+          <a:lstStyle/>
+          <a:p>
+            <a:pPr algn="ctr">
+              <a:lnSpc>
+                <a:spcPct val="108000"/>
+              </a:lnSpc>
+              <a:spcAft>
+                <a:spcPts val="400"/>
+              </a:spcAft>
+            </a:pPr>
+            <a:r>
+              <a:rPr sz="1600" b="1" i="0">
+                <a:solidFill>
+                  <a:srgbClr val="0F172A"/>
+                </a:solidFill>
+                <a:latin typeface="Calibri"/>
+              </a:rPr>
+              <a:t>v1.1.0</a:t>
+            </a:r>
+          </a:p>
+        </p:txBody>
+      </p:sp>
+      <p:sp>
+        <p:nvSpPr>
+          <p:cNvPr id="25" name="TextBox 24"/>
+          <p:cNvSpPr txBox="1"/>
+          <p:nvPr/>
+        </p:nvSpPr>
+        <p:spPr>
+          <a:xfrm>
+            <a:off x="91440" y="5093208"/>
+            <a:ext cx="2011680" cy="274320"/>
+          </a:xfrm>
+          <a:prstGeom prst="rect">
+            <a:avLst/>
+          </a:prstGeom>
+          <a:noFill/>
+        </p:spPr>
+        <p:txBody>
+          <a:bodyPr wrap="square" lIns="0" rIns="0" tIns="0" bIns="0" anchor="t">
+            <a:spAutoFit/>
+          </a:bodyPr>
+          <a:lstStyle/>
+          <a:p>
+            <a:pPr algn="ctr">
+              <a:lnSpc>
+                <a:spcPct val="108000"/>
+              </a:lnSpc>
+              <a:spcAft>
+                <a:spcPts val="400"/>
+              </a:spcAft>
+            </a:pPr>
+            <a:r>
+              <a:rPr sz="1200" b="0" i="0">
+                <a:solidFill>
+                  <a:srgbClr val="475569"/>
+                </a:solidFill>
+                <a:latin typeface="Calibri"/>
+              </a:rPr>
+              <a:t>Giao diện Fresha</a:t>
+            </a:r>
+          </a:p>
+        </p:txBody>
+      </p:sp>
+      <p:sp>
+        <p:nvSpPr>
+          <p:cNvPr id="26" name="Oval 25"/>
+          <p:cNvSpPr/>
+          <p:nvPr/>
+        </p:nvSpPr>
+        <p:spPr>
+          <a:xfrm>
+            <a:off x="2968691" y="4398264"/>
+            <a:ext cx="256032" cy="256032"/>
+          </a:xfrm>
+          <a:prstGeom prst="ellipse">
+            <a:avLst/>
+          </a:prstGeom>
+          <a:solidFill>
+            <a:srgbClr val="0D9488"/>
+          </a:solidFill>
+          <a:ln w="25400">
+            <a:solidFill>
+              <a:srgbClr val="FFFFFF"/>
+            </a:solidFill>
+          </a:ln>
+        </p:spPr>
+        <p:style>
+          <a:lnRef idx="1">
+            <a:schemeClr val="accent1"/>
+          </a:lnRef>
+          <a:fillRef idx="3">
+            <a:schemeClr val="accent1"/>
+          </a:fillRef>
+          <a:effectRef idx="2">
+            <a:schemeClr val="accent1"/>
+          </a:effectRef>
+          <a:fontRef idx="minor">
+            <a:schemeClr val="lt1"/>
+          </a:fontRef>
+        </p:style>
+        <p:txBody>
+          <a:bodyPr rtlCol="0" anchor="ctr"/>
+          <a:lstStyle/>
+          <a:p>
+            <a:pPr algn="ctr"/>
+          </a:p>
+        </p:txBody>
+      </p:sp>
+      <p:sp>
+        <p:nvSpPr>
+          <p:cNvPr id="27" name="TextBox 26"/>
+          <p:cNvSpPr txBox="1"/>
+          <p:nvPr/>
+        </p:nvSpPr>
+        <p:spPr>
+          <a:xfrm>
+            <a:off x="2090867" y="3977640"/>
+            <a:ext cx="2011680" cy="274320"/>
+          </a:xfrm>
+          <a:prstGeom prst="rect">
+            <a:avLst/>
+          </a:prstGeom>
+          <a:noFill/>
+        </p:spPr>
+        <p:txBody>
+          <a:bodyPr wrap="square" lIns="0" rIns="0" tIns="0" bIns="0" anchor="t">
+            <a:spAutoFit/>
+          </a:bodyPr>
+          <a:lstStyle/>
+          <a:p>
+            <a:pPr algn="ctr">
+              <a:lnSpc>
+                <a:spcPct val="108000"/>
+              </a:lnSpc>
+              <a:spcAft>
+                <a:spcPts val="400"/>
+              </a:spcAft>
+            </a:pPr>
+            <a:r>
+              <a:rPr sz="1200" b="0" i="0">
+                <a:solidFill>
+                  <a:srgbClr val="475569"/>
+                </a:solidFill>
+                <a:latin typeface="Calibri"/>
+              </a:rPr>
+              <a:t>27/09</a:t>
+            </a:r>
+          </a:p>
+        </p:txBody>
+      </p:sp>
+      <p:sp>
+        <p:nvSpPr>
+          <p:cNvPr id="28" name="TextBox 27"/>
+          <p:cNvSpPr txBox="1"/>
+          <p:nvPr/>
+        </p:nvSpPr>
+        <p:spPr>
+          <a:xfrm>
+            <a:off x="2090867" y="4773168"/>
+            <a:ext cx="2011680" cy="320040"/>
+          </a:xfrm>
+          <a:prstGeom prst="rect">
+            <a:avLst/>
+          </a:prstGeom>
+          <a:noFill/>
+        </p:spPr>
+        <p:txBody>
+          <a:bodyPr wrap="square" lIns="0" rIns="0" tIns="0" bIns="0" anchor="t">
+            <a:spAutoFit/>
+          </a:bodyPr>
+          <a:lstStyle/>
+          <a:p>
+            <a:pPr algn="ctr">
+              <a:lnSpc>
+                <a:spcPct val="108000"/>
+              </a:lnSpc>
+              <a:spcAft>
+                <a:spcPts val="400"/>
+              </a:spcAft>
+            </a:pPr>
+            <a:r>
+              <a:rPr sz="1600" b="1" i="0">
+                <a:solidFill>
+                  <a:srgbClr val="0F172A"/>
+                </a:solidFill>
+                <a:latin typeface="Calibri"/>
+              </a:rPr>
+              <a:t>v1.2.0</a:t>
+            </a:r>
+          </a:p>
+        </p:txBody>
+      </p:sp>
+      <p:sp>
+        <p:nvSpPr>
+          <p:cNvPr id="29" name="TextBox 28"/>
+          <p:cNvSpPr txBox="1"/>
+          <p:nvPr/>
+        </p:nvSpPr>
+        <p:spPr>
+          <a:xfrm>
+            <a:off x="2090867" y="5093208"/>
+            <a:ext cx="2011680" cy="274320"/>
+          </a:xfrm>
+          <a:prstGeom prst="rect">
+            <a:avLst/>
+          </a:prstGeom>
+          <a:noFill/>
+        </p:spPr>
+        <p:txBody>
+          <a:bodyPr wrap="square" lIns="0" rIns="0" tIns="0" bIns="0" anchor="t">
+            <a:spAutoFit/>
+          </a:bodyPr>
+          <a:lstStyle/>
+          <a:p>
+            <a:pPr algn="ctr">
+              <a:lnSpc>
+                <a:spcPct val="108000"/>
+              </a:lnSpc>
+              <a:spcAft>
+                <a:spcPts val="400"/>
+              </a:spcAft>
+            </a:pPr>
+            <a:r>
+              <a:rPr sz="1200" b="0" i="0">
+                <a:solidFill>
+                  <a:srgbClr val="475569"/>
+                </a:solidFill>
+                <a:latin typeface="Calibri"/>
+              </a:rPr>
+              <a:t>15 + 8 lỗi Sprint 1</a:t>
+            </a:r>
+          </a:p>
+        </p:txBody>
+      </p:sp>
+      <p:sp>
+        <p:nvSpPr>
+          <p:cNvPr id="30" name="Oval 29"/>
+          <p:cNvSpPr/>
+          <p:nvPr/>
+        </p:nvSpPr>
+        <p:spPr>
+          <a:xfrm>
+            <a:off x="4968118" y="4398264"/>
+            <a:ext cx="256032" cy="256032"/>
+          </a:xfrm>
+          <a:prstGeom prst="ellipse">
+            <a:avLst/>
+          </a:prstGeom>
+          <a:solidFill>
+            <a:srgbClr val="0D9488"/>
+          </a:solidFill>
+          <a:ln w="25400">
+            <a:solidFill>
+              <a:srgbClr val="FFFFFF"/>
+            </a:solidFill>
+          </a:ln>
+        </p:spPr>
+        <p:style>
+          <a:lnRef idx="1">
+            <a:schemeClr val="accent1"/>
+          </a:lnRef>
+          <a:fillRef idx="3">
+            <a:schemeClr val="accent1"/>
+          </a:fillRef>
+          <a:effectRef idx="2">
+            <a:schemeClr val="accent1"/>
+          </a:effectRef>
+          <a:fontRef idx="minor">
+            <a:schemeClr val="lt1"/>
+          </a:fontRef>
+        </p:style>
+        <p:txBody>
+          <a:bodyPr rtlCol="0" anchor="ctr"/>
+          <a:lstStyle/>
+          <a:p>
+            <a:pPr algn="ctr"/>
+          </a:p>
+        </p:txBody>
+      </p:sp>
+      <p:sp>
+        <p:nvSpPr>
+          <p:cNvPr id="31" name="TextBox 30"/>
+          <p:cNvSpPr txBox="1"/>
+          <p:nvPr/>
+        </p:nvSpPr>
+        <p:spPr>
+          <a:xfrm>
+            <a:off x="4090294" y="3977640"/>
+            <a:ext cx="2011680" cy="274320"/>
+          </a:xfrm>
+          <a:prstGeom prst="rect">
+            <a:avLst/>
+          </a:prstGeom>
+          <a:noFill/>
+        </p:spPr>
+        <p:txBody>
+          <a:bodyPr wrap="square" lIns="0" rIns="0" tIns="0" bIns="0" anchor="t">
+            <a:spAutoFit/>
+          </a:bodyPr>
+          <a:lstStyle/>
+          <a:p>
+            <a:pPr algn="ctr">
+              <a:lnSpc>
+                <a:spcPct val="108000"/>
+              </a:lnSpc>
+              <a:spcAft>
+                <a:spcPts val="400"/>
+              </a:spcAft>
+            </a:pPr>
+            <a:r>
+              <a:rPr sz="1200" b="0" i="0">
+                <a:solidFill>
+                  <a:srgbClr val="475569"/>
+                </a:solidFill>
+                <a:latin typeface="Calibri"/>
+              </a:rPr>
+              <a:t>28/09</a:t>
+            </a:r>
+          </a:p>
+        </p:txBody>
+      </p:sp>
+      <p:sp>
+        <p:nvSpPr>
+          <p:cNvPr id="32" name="TextBox 31"/>
+          <p:cNvSpPr txBox="1"/>
+          <p:nvPr/>
+        </p:nvSpPr>
+        <p:spPr>
+          <a:xfrm>
+            <a:off x="4090294" y="4773168"/>
+            <a:ext cx="2011680" cy="320040"/>
+          </a:xfrm>
+          <a:prstGeom prst="rect">
+            <a:avLst/>
+          </a:prstGeom>
+          <a:noFill/>
+        </p:spPr>
+        <p:txBody>
+          <a:bodyPr wrap="square" lIns="0" rIns="0" tIns="0" bIns="0" anchor="t">
+            <a:spAutoFit/>
+          </a:bodyPr>
+          <a:lstStyle/>
+          <a:p>
+            <a:pPr algn="ctr">
+              <a:lnSpc>
+                <a:spcPct val="108000"/>
+              </a:lnSpc>
+              <a:spcAft>
+                <a:spcPts val="400"/>
+              </a:spcAft>
+            </a:pPr>
+            <a:r>
+              <a:rPr sz="1600" b="1" i="0">
+                <a:solidFill>
+                  <a:srgbClr val="0F172A"/>
+                </a:solidFill>
+                <a:latin typeface="Calibri"/>
+              </a:rPr>
+              <a:t>v1.2.5</a:t>
+            </a:r>
+          </a:p>
+        </p:txBody>
+      </p:sp>
+      <p:sp>
+        <p:nvSpPr>
+          <p:cNvPr id="33" name="TextBox 32"/>
+          <p:cNvSpPr txBox="1"/>
+          <p:nvPr/>
+        </p:nvSpPr>
+        <p:spPr>
+          <a:xfrm>
+            <a:off x="4090294" y="5093208"/>
+            <a:ext cx="2011680" cy="274320"/>
+          </a:xfrm>
+          <a:prstGeom prst="rect">
+            <a:avLst/>
+          </a:prstGeom>
+          <a:noFill/>
+        </p:spPr>
+        <p:txBody>
+          <a:bodyPr wrap="square" lIns="0" rIns="0" tIns="0" bIns="0" anchor="t">
+            <a:spAutoFit/>
+          </a:bodyPr>
+          <a:lstStyle/>
+          <a:p>
+            <a:pPr algn="ctr">
+              <a:lnSpc>
+                <a:spcPct val="108000"/>
+              </a:lnSpc>
+              <a:spcAft>
+                <a:spcPts val="400"/>
+              </a:spcAft>
+            </a:pPr>
+            <a:r>
+              <a:rPr sz="1200" b="0" i="0">
+                <a:solidFill>
+                  <a:srgbClr val="475569"/>
+                </a:solidFill>
+                <a:latin typeface="Calibri"/>
+              </a:rPr>
+              <a:t>Supervisor</a:t>
+            </a:r>
+          </a:p>
+        </p:txBody>
+      </p:sp>
+      <p:sp>
+        <p:nvSpPr>
+          <p:cNvPr id="34" name="Oval 33"/>
+          <p:cNvSpPr/>
+          <p:nvPr/>
+        </p:nvSpPr>
+        <p:spPr>
+          <a:xfrm>
+            <a:off x="6967545" y="4398264"/>
+            <a:ext cx="256032" cy="256032"/>
+          </a:xfrm>
+          <a:prstGeom prst="ellipse">
+            <a:avLst/>
+          </a:prstGeom>
+          <a:solidFill>
+            <a:srgbClr val="0D9488"/>
+          </a:solidFill>
+          <a:ln w="25400">
+            <a:solidFill>
+              <a:srgbClr val="FFFFFF"/>
+            </a:solidFill>
+          </a:ln>
+        </p:spPr>
+        <p:style>
+          <a:lnRef idx="1">
+            <a:schemeClr val="accent1"/>
+          </a:lnRef>
+          <a:fillRef idx="3">
+            <a:schemeClr val="accent1"/>
+          </a:fillRef>
+          <a:effectRef idx="2">
+            <a:schemeClr val="accent1"/>
+          </a:effectRef>
+          <a:fontRef idx="minor">
+            <a:schemeClr val="lt1"/>
+          </a:fontRef>
+        </p:style>
+        <p:txBody>
+          <a:bodyPr rtlCol="0" anchor="ctr"/>
+          <a:lstStyle/>
+          <a:p>
+            <a:pPr algn="ctr"/>
+          </a:p>
+        </p:txBody>
+      </p:sp>
+      <p:sp>
+        <p:nvSpPr>
+          <p:cNvPr id="35" name="TextBox 34"/>
+          <p:cNvSpPr txBox="1"/>
+          <p:nvPr/>
+        </p:nvSpPr>
+        <p:spPr>
+          <a:xfrm>
+            <a:off x="6089721" y="3977640"/>
+            <a:ext cx="2011680" cy="274320"/>
+          </a:xfrm>
+          <a:prstGeom prst="rect">
+            <a:avLst/>
+          </a:prstGeom>
+          <a:noFill/>
+        </p:spPr>
+        <p:txBody>
+          <a:bodyPr wrap="square" lIns="0" rIns="0" tIns="0" bIns="0" anchor="t">
+            <a:spAutoFit/>
+          </a:bodyPr>
+          <a:lstStyle/>
+          <a:p>
+            <a:pPr algn="ctr">
+              <a:lnSpc>
+                <a:spcPct val="108000"/>
+              </a:lnSpc>
+              <a:spcAft>
+                <a:spcPts val="400"/>
+              </a:spcAft>
+            </a:pPr>
+            <a:r>
+              <a:rPr sz="1200" b="0" i="0">
+                <a:solidFill>
+                  <a:srgbClr val="475569"/>
+                </a:solidFill>
+                <a:latin typeface="Calibri"/>
+              </a:rPr>
+              <a:t>02/10</a:t>
+            </a:r>
+          </a:p>
+        </p:txBody>
+      </p:sp>
+      <p:sp>
+        <p:nvSpPr>
+          <p:cNvPr id="36" name="TextBox 35"/>
+          <p:cNvSpPr txBox="1"/>
+          <p:nvPr/>
+        </p:nvSpPr>
+        <p:spPr>
+          <a:xfrm>
+            <a:off x="6089721" y="4773168"/>
+            <a:ext cx="2011680" cy="320040"/>
+          </a:xfrm>
+          <a:prstGeom prst="rect">
+            <a:avLst/>
+          </a:prstGeom>
+          <a:noFill/>
+        </p:spPr>
+        <p:txBody>
+          <a:bodyPr wrap="square" lIns="0" rIns="0" tIns="0" bIns="0" anchor="t">
+            <a:spAutoFit/>
+          </a:bodyPr>
+          <a:lstStyle/>
+          <a:p>
+            <a:pPr algn="ctr">
+              <a:lnSpc>
+                <a:spcPct val="108000"/>
+              </a:lnSpc>
+              <a:spcAft>
+                <a:spcPts val="400"/>
+              </a:spcAft>
+            </a:pPr>
+            <a:r>
+              <a:rPr sz="1600" b="1" i="0">
+                <a:solidFill>
+                  <a:srgbClr val="0F172A"/>
+                </a:solidFill>
+                <a:latin typeface="Calibri"/>
+              </a:rPr>
+              <a:t>v1.3.0</a:t>
+            </a:r>
+          </a:p>
+        </p:txBody>
+      </p:sp>
+      <p:sp>
+        <p:nvSpPr>
+          <p:cNvPr id="37" name="TextBox 36"/>
+          <p:cNvSpPr txBox="1"/>
+          <p:nvPr/>
+        </p:nvSpPr>
+        <p:spPr>
+          <a:xfrm>
+            <a:off x="6089721" y="5093208"/>
+            <a:ext cx="2011680" cy="274320"/>
+          </a:xfrm>
+          <a:prstGeom prst="rect">
+            <a:avLst/>
+          </a:prstGeom>
+          <a:noFill/>
+        </p:spPr>
+        <p:txBody>
+          <a:bodyPr wrap="square" lIns="0" rIns="0" tIns="0" bIns="0" anchor="t">
+            <a:spAutoFit/>
+          </a:bodyPr>
+          <a:lstStyle/>
+          <a:p>
+            <a:pPr algn="ctr">
+              <a:lnSpc>
+                <a:spcPct val="108000"/>
+              </a:lnSpc>
+              <a:spcAft>
+                <a:spcPts val="400"/>
+              </a:spcAft>
+            </a:pPr>
+            <a:r>
+              <a:rPr sz="1200" b="0" i="0">
+                <a:solidFill>
+                  <a:srgbClr val="475569"/>
+                </a:solidFill>
+                <a:latin typeface="Calibri"/>
+              </a:rPr>
+              <a:t>23 lỗi QA Sprint 2</a:t>
+            </a:r>
+          </a:p>
+        </p:txBody>
+      </p:sp>
+      <p:sp>
+        <p:nvSpPr>
+          <p:cNvPr id="38" name="Oval 37"/>
+          <p:cNvSpPr/>
+          <p:nvPr/>
+        </p:nvSpPr>
+        <p:spPr>
+          <a:xfrm>
+            <a:off x="8966972" y="4398264"/>
+            <a:ext cx="256032" cy="256032"/>
+          </a:xfrm>
+          <a:prstGeom prst="ellipse">
+            <a:avLst/>
+          </a:prstGeom>
+          <a:solidFill>
+            <a:srgbClr val="0D9488"/>
+          </a:solidFill>
+          <a:ln w="25400">
+            <a:solidFill>
+              <a:srgbClr val="FFFFFF"/>
+            </a:solidFill>
+          </a:ln>
+        </p:spPr>
+        <p:style>
+          <a:lnRef idx="1">
+            <a:schemeClr val="accent1"/>
+          </a:lnRef>
+          <a:fillRef idx="3">
+            <a:schemeClr val="accent1"/>
+          </a:fillRef>
+          <a:effectRef idx="2">
+            <a:schemeClr val="accent1"/>
+          </a:effectRef>
+          <a:fontRef idx="minor">
+            <a:schemeClr val="lt1"/>
+          </a:fontRef>
+        </p:style>
+        <p:txBody>
+          <a:bodyPr rtlCol="0" anchor="ctr"/>
+          <a:lstStyle/>
+          <a:p>
+            <a:pPr algn="ctr"/>
+          </a:p>
+        </p:txBody>
+      </p:sp>
+      <p:sp>
+        <p:nvSpPr>
+          <p:cNvPr id="39" name="TextBox 38"/>
+          <p:cNvSpPr txBox="1"/>
+          <p:nvPr/>
+        </p:nvSpPr>
+        <p:spPr>
+          <a:xfrm>
+            <a:off x="8089148" y="3977640"/>
+            <a:ext cx="2011680" cy="274320"/>
+          </a:xfrm>
+          <a:prstGeom prst="rect">
+            <a:avLst/>
+          </a:prstGeom>
+          <a:noFill/>
+        </p:spPr>
+        <p:txBody>
+          <a:bodyPr wrap="square" lIns="0" rIns="0" tIns="0" bIns="0" anchor="t">
+            <a:spAutoFit/>
+          </a:bodyPr>
+          <a:lstStyle/>
+          <a:p>
+            <a:pPr algn="ctr">
+              <a:lnSpc>
+                <a:spcPct val="108000"/>
+              </a:lnSpc>
+              <a:spcAft>
+                <a:spcPts val="400"/>
+              </a:spcAft>
+            </a:pPr>
+            <a:r>
+              <a:rPr sz="1200" b="0" i="0">
+                <a:solidFill>
+                  <a:srgbClr val="475569"/>
+                </a:solidFill>
+                <a:latin typeface="Calibri"/>
+              </a:rPr>
+              <a:t>05/10</a:t>
+            </a:r>
+          </a:p>
+        </p:txBody>
+      </p:sp>
+      <p:sp>
+        <p:nvSpPr>
+          <p:cNvPr id="40" name="TextBox 39"/>
+          <p:cNvSpPr txBox="1"/>
+          <p:nvPr/>
+        </p:nvSpPr>
+        <p:spPr>
+          <a:xfrm>
+            <a:off x="8089148" y="4773168"/>
+            <a:ext cx="2011680" cy="320040"/>
+          </a:xfrm>
+          <a:prstGeom prst="rect">
+            <a:avLst/>
+          </a:prstGeom>
+          <a:noFill/>
+        </p:spPr>
+        <p:txBody>
+          <a:bodyPr wrap="square" lIns="0" rIns="0" tIns="0" bIns="0" anchor="t">
+            <a:spAutoFit/>
+          </a:bodyPr>
+          <a:lstStyle/>
+          <a:p>
+            <a:pPr algn="ctr">
+              <a:lnSpc>
+                <a:spcPct val="108000"/>
+              </a:lnSpc>
+              <a:spcAft>
+                <a:spcPts val="400"/>
+              </a:spcAft>
+            </a:pPr>
+            <a:r>
+              <a:rPr sz="1600" b="1" i="0">
+                <a:solidFill>
+                  <a:srgbClr val="0F172A"/>
+                </a:solidFill>
+                <a:latin typeface="Calibri"/>
+              </a:rPr>
+              <a:t>v1.3.6</a:t>
+            </a:r>
+          </a:p>
+        </p:txBody>
+      </p:sp>
+      <p:sp>
+        <p:nvSpPr>
+          <p:cNvPr id="41" name="TextBox 40"/>
+          <p:cNvSpPr txBox="1"/>
+          <p:nvPr/>
+        </p:nvSpPr>
+        <p:spPr>
+          <a:xfrm>
+            <a:off x="8089148" y="5093208"/>
+            <a:ext cx="2011680" cy="274320"/>
+          </a:xfrm>
+          <a:prstGeom prst="rect">
+            <a:avLst/>
+          </a:prstGeom>
+          <a:noFill/>
+        </p:spPr>
+        <p:txBody>
+          <a:bodyPr wrap="square" lIns="0" rIns="0" tIns="0" bIns="0" anchor="t">
+            <a:spAutoFit/>
+          </a:bodyPr>
+          <a:lstStyle/>
+          <a:p>
+            <a:pPr algn="ctr">
+              <a:lnSpc>
+                <a:spcPct val="108000"/>
+              </a:lnSpc>
+              <a:spcAft>
+                <a:spcPts val="400"/>
+              </a:spcAft>
+            </a:pPr>
+            <a:r>
+              <a:rPr sz="1200" b="0" i="0">
+                <a:solidFill>
+                  <a:srgbClr val="475569"/>
+                </a:solidFill>
+                <a:latin typeface="Calibri"/>
+              </a:rPr>
+              <a:t>Số liệu khách</a:t>
+            </a:r>
+          </a:p>
+        </p:txBody>
+      </p:sp>
+      <p:sp>
+        <p:nvSpPr>
+          <p:cNvPr id="42" name="Oval 41"/>
+          <p:cNvSpPr/>
+          <p:nvPr/>
+        </p:nvSpPr>
+        <p:spPr>
+          <a:xfrm>
+            <a:off x="10966399" y="4398264"/>
+            <a:ext cx="256032" cy="256032"/>
+          </a:xfrm>
+          <a:prstGeom prst="ellipse">
+            <a:avLst/>
+          </a:prstGeom>
+          <a:solidFill>
+            <a:srgbClr val="0F172A"/>
+          </a:solidFill>
+          <a:ln w="25400">
+            <a:solidFill>
+              <a:srgbClr val="FFFFFF"/>
+            </a:solidFill>
+          </a:ln>
+        </p:spPr>
+        <p:style>
+          <a:lnRef idx="1">
+            <a:schemeClr val="accent1"/>
+          </a:lnRef>
+          <a:fillRef idx="3">
+            <a:schemeClr val="accent1"/>
+          </a:fillRef>
+          <a:effectRef idx="2">
+            <a:schemeClr val="accent1"/>
+          </a:effectRef>
+          <a:fontRef idx="minor">
+            <a:schemeClr val="lt1"/>
+          </a:fontRef>
+        </p:style>
+        <p:txBody>
+          <a:bodyPr rtlCol="0" anchor="ctr"/>
+          <a:lstStyle/>
+          <a:p>
+            <a:pPr algn="ctr"/>
+          </a:p>
+        </p:txBody>
+      </p:sp>
+      <p:sp>
+        <p:nvSpPr>
+          <p:cNvPr id="43" name="TextBox 42"/>
+          <p:cNvSpPr txBox="1"/>
+          <p:nvPr/>
+        </p:nvSpPr>
+        <p:spPr>
+          <a:xfrm>
+            <a:off x="10088575" y="3977640"/>
+            <a:ext cx="2011680" cy="274320"/>
+          </a:xfrm>
+          <a:prstGeom prst="rect">
+            <a:avLst/>
+          </a:prstGeom>
+          <a:noFill/>
+        </p:spPr>
+        <p:txBody>
+          <a:bodyPr wrap="square" lIns="0" rIns="0" tIns="0" bIns="0" anchor="t">
+            <a:spAutoFit/>
+          </a:bodyPr>
+          <a:lstStyle/>
+          <a:p>
+            <a:pPr algn="ctr">
+              <a:lnSpc>
+                <a:spcPct val="108000"/>
+              </a:lnSpc>
+              <a:spcAft>
+                <a:spcPts val="400"/>
+              </a:spcAft>
+            </a:pPr>
+            <a:r>
+              <a:rPr sz="1200" b="0" i="0">
+                <a:solidFill>
+                  <a:srgbClr val="475569"/>
+                </a:solidFill>
+                <a:latin typeface="Calibri"/>
+              </a:rPr>
+              <a:t>06/10</a:t>
+            </a:r>
+          </a:p>
+        </p:txBody>
+      </p:sp>
+      <p:sp>
+        <p:nvSpPr>
+          <p:cNvPr id="44" name="TextBox 43"/>
+          <p:cNvSpPr txBox="1"/>
+          <p:nvPr/>
+        </p:nvSpPr>
+        <p:spPr>
+          <a:xfrm>
+            <a:off x="10088575" y="4773168"/>
+            <a:ext cx="2011680" cy="320040"/>
+          </a:xfrm>
+          <a:prstGeom prst="rect">
+            <a:avLst/>
+          </a:prstGeom>
+          <a:noFill/>
+        </p:spPr>
+        <p:txBody>
+          <a:bodyPr wrap="square" lIns="0" rIns="0" tIns="0" bIns="0" anchor="t">
+            <a:spAutoFit/>
+          </a:bodyPr>
+          <a:lstStyle/>
+          <a:p>
+            <a:pPr algn="ctr">
+              <a:lnSpc>
+                <a:spcPct val="108000"/>
+              </a:lnSpc>
+              <a:spcAft>
+                <a:spcPts val="400"/>
+              </a:spcAft>
+            </a:pPr>
+            <a:r>
+              <a:rPr sz="1600" b="1" i="0">
+                <a:solidFill>
+                  <a:srgbClr val="0F172A"/>
+                </a:solidFill>
+                <a:latin typeface="Calibri"/>
+              </a:rPr>
+              <a:t>v1.4.0</a:t>
+            </a:r>
+          </a:p>
+        </p:txBody>
+      </p:sp>
+      <p:sp>
+        <p:nvSpPr>
+          <p:cNvPr id="45" name="TextBox 44"/>
+          <p:cNvSpPr txBox="1"/>
+          <p:nvPr/>
+        </p:nvSpPr>
+        <p:spPr>
+          <a:xfrm>
+            <a:off x="10088575" y="5093208"/>
+            <a:ext cx="2011680" cy="274320"/>
+          </a:xfrm>
+          <a:prstGeom prst="rect">
+            <a:avLst/>
+          </a:prstGeom>
+          <a:noFill/>
+        </p:spPr>
+        <p:txBody>
+          <a:bodyPr wrap="square" lIns="0" rIns="0" tIns="0" bIns="0" anchor="t">
+            <a:spAutoFit/>
+          </a:bodyPr>
+          <a:lstStyle/>
+          <a:p>
+            <a:pPr algn="ctr">
+              <a:lnSpc>
+                <a:spcPct val="108000"/>
+              </a:lnSpc>
+              <a:spcAft>
+                <a:spcPts val="400"/>
+              </a:spcAft>
+            </a:pPr>
+            <a:r>
+              <a:rPr sz="1200" b="0" i="0">
+                <a:solidFill>
+                  <a:srgbClr val="475569"/>
+                </a:solidFill>
+                <a:latin typeface="Calibri"/>
+              </a:rPr>
+              <a:t>11 góp ý Mentor</a:t>
+            </a:r>
+          </a:p>
+        </p:txBody>
+      </p:sp>
+      <p:sp>
+        <p:nvSpPr>
+          <p:cNvPr id="46" name="Rounded Rectangle 45"/>
+          <p:cNvSpPr/>
+          <p:nvPr/>
+        </p:nvSpPr>
+        <p:spPr>
+          <a:xfrm>
+            <a:off x="548640" y="5559552"/>
+            <a:ext cx="11094415" cy="731520"/>
+          </a:xfrm>
+          <a:prstGeom prst="roundRect">
+            <a:avLst>
+              <a:gd name="adj" fmla="val 8000"/>
+            </a:avLst>
+          </a:prstGeom>
+          <a:solidFill>
+            <a:srgbClr val="F0FDFA"/>
+          </a:solidFill>
+          <a:ln w="12700">
+            <a:solidFill>
+              <a:srgbClr val="99F6E4"/>
+            </a:solidFill>
+          </a:ln>
+        </p:spPr>
+        <p:style>
+          <a:lnRef idx="1">
+            <a:schemeClr val="accent1"/>
+          </a:lnRef>
+          <a:fillRef idx="3">
+            <a:schemeClr val="accent1"/>
+          </a:fillRef>
+          <a:effectRef idx="2">
+            <a:schemeClr val="accent1"/>
+          </a:effectRef>
+          <a:fontRef idx="minor">
+            <a:schemeClr val="lt1"/>
+          </a:fontRef>
+        </p:style>
+        <p:txBody>
+          <a:bodyPr rtlCol="0" anchor="ctr"/>
+          <a:lstStyle/>
+          <a:p/>
+        </p:txBody>
+      </p:sp>
+      <p:sp>
+        <p:nvSpPr>
+          <p:cNvPr id="47" name="Oval 46"/>
+          <p:cNvSpPr/>
+          <p:nvPr/>
+        </p:nvSpPr>
+        <p:spPr>
+          <a:xfrm>
+            <a:off x="713232" y="5678424"/>
+            <a:ext cx="493776" cy="493776"/>
+          </a:xfrm>
+          <a:prstGeom prst="ellipse">
+            <a:avLst/>
+          </a:prstGeom>
+          <a:solidFill>
+            <a:srgbClr val="0D9488"/>
+          </a:solidFill>
+          <a:ln>
+            <a:noFill/>
+          </a:ln>
+        </p:spPr>
+        <p:style>
+          <a:lnRef idx="1">
+            <a:schemeClr val="accent1"/>
+          </a:lnRef>
+          <a:fillRef idx="3">
+            <a:schemeClr val="accent1"/>
+          </a:fillRef>
+          <a:effectRef idx="2">
+            <a:schemeClr val="accent1"/>
+          </a:effectRef>
+          <a:fontRef idx="minor">
+            <a:schemeClr val="lt1"/>
+          </a:fontRef>
+        </p:style>
+        <p:txBody>
+          <a:bodyPr rtlCol="0" anchor="ctr"/>
+          <a:lstStyle/>
+          <a:p>
+            <a:pPr algn="ctr"/>
+          </a:p>
+        </p:txBody>
+      </p:sp>
+      <p:pic>
+        <p:nvPicPr>
+          <p:cNvPr id="48" name="Picture 47" descr="check_w.png"/>
+          <p:cNvPicPr>
+            <a:picLocks noChangeAspect="1"/>
+          </p:cNvPicPr>
+          <p:nvPr/>
+        </p:nvPicPr>
+        <p:blipFill>
+          <a:blip r:embed="rId2"/>
+          <a:stretch>
+            <a:fillRect/>
+          </a:stretch>
+        </p:blipFill>
+        <p:spPr>
+          <a:xfrm>
+            <a:off x="831738" y="5796930"/>
+            <a:ext cx="256764" cy="256764"/>
+          </a:xfrm>
+          <a:prstGeom prst="rect">
+            <a:avLst/>
+          </a:prstGeom>
+        </p:spPr>
+      </p:pic>
+      <p:sp>
+        <p:nvSpPr>
+          <p:cNvPr id="49" name="TextBox 48"/>
+          <p:cNvSpPr txBox="1"/>
+          <p:nvPr/>
+        </p:nvSpPr>
+        <p:spPr>
+          <a:xfrm>
+            <a:off x="1371600" y="5669280"/>
+            <a:ext cx="10088575" cy="548640"/>
+          </a:xfrm>
+          <a:prstGeom prst="rect">
+            <a:avLst/>
+          </a:prstGeom>
+          <a:noFill/>
+        </p:spPr>
+        <p:txBody>
+          <a:bodyPr wrap="square" lIns="0" rIns="0" tIns="0" bIns="0" anchor="ctr">
+            <a:spAutoFit/>
+          </a:bodyPr>
+          <a:lstStyle/>
+          <a:p>
+            <a:pPr algn="l">
+              <a:lnSpc>
+                <a:spcPct val="108000"/>
+              </a:lnSpc>
+              <a:spcAft>
+                <a:spcPts val="400"/>
+              </a:spcAft>
+            </a:pPr>
+            <a:r>
+              <a:rPr sz="1300" b="0" i="0">
+                <a:solidFill>
+                  <a:srgbClr val="0F766E"/>
+                </a:solidFill>
+                <a:latin typeface="Calibri"/>
+              </a:rPr>
+              <a:t>Định nghĩa Hoàn thành: review + merge vào develop · build &amp; lint sạch · test đạt · story đối chiếu trong BACKLOG-MAPPING · chạy được trên staging dựng bằng một lệnh.</a:t>
+            </a:r>
+          </a:p>
+        </p:txBody>
+      </p:sp>
+    </p:spTree>
+  </p:cSld>
+  <p:clrMapOvr>
+    <a:masterClrMapping/>
+  </p:clrMapOvr>
+</p:sld>
+</file>
+
+<file path=ppt/slides/slide14.xml><?xml version="1.0" encoding="utf-8"?>
+<p:sld xmlns:a="http://schemas.openxmlformats.org/drawingml/2006/main" xmlns:p="http://schemas.openxmlformats.org/presentationml/2006/main" xmlns:r="http://schemas.openxmlformats.org/officeDocument/2006/relationships">
+  <p:cSld>
+    <p:bg>
+      <p:bgPr>
+        <a:solidFill>
+          <a:srgbClr val="F8FAFC"/>
+        </a:solidFill>
+        <a:effectLst/>
+      </p:bgPr>
+    </p:bg>
+    <p:spTree>
+      <p:nvGrpSpPr>
+        <p:cNvPr id="1" name=""/>
+        <p:cNvGrpSpPr/>
+        <p:nvPr/>
+      </p:nvGrpSpPr>
+      <p:grpSpPr/>
+      <p:sp>
+        <p:nvSpPr>
+          <p:cNvPr id="2" name="TextBox 1"/>
+          <p:cNvSpPr txBox="1"/>
+          <p:nvPr/>
+        </p:nvSpPr>
+        <p:spPr>
+          <a:xfrm>
+            <a:off x="548640" y="384048"/>
+            <a:ext cx="8229600" cy="274320"/>
+          </a:xfrm>
+          <a:prstGeom prst="rect">
+            <a:avLst/>
+          </a:prstGeom>
+          <a:noFill/>
+        </p:spPr>
+        <p:txBody>
+          <a:bodyPr wrap="square" lIns="0" rIns="0" tIns="0" bIns="0" anchor="t">
+            <a:spAutoFit/>
+          </a:bodyPr>
+          <a:lstStyle/>
+          <a:p>
+            <a:pPr algn="l">
+              <a:lnSpc>
+                <a:spcPct val="108000"/>
+              </a:lnSpc>
+              <a:spcAft>
+                <a:spcPts val="400"/>
+              </a:spcAft>
+            </a:pPr>
+            <a:r>
+              <a:rPr sz="1200" b="1" i="0">
+                <a:solidFill>
+                  <a:srgbClr val="0D9488"/>
+                </a:solidFill>
+                <a:latin typeface="Calibri"/>
+              </a:rPr>
+              <a:t>14  ·  DEMO TRỰC TIẾP</a:t>
+            </a:r>
+          </a:p>
+        </p:txBody>
+      </p:sp>
+      <p:sp>
+        <p:nvSpPr>
+          <p:cNvPr id="3" name="TextBox 2"/>
+          <p:cNvSpPr txBox="1"/>
+          <p:nvPr/>
+        </p:nvSpPr>
+        <p:spPr>
+          <a:xfrm>
+            <a:off x="548640" y="658368"/>
+            <a:ext cx="11064240" cy="731520"/>
+          </a:xfrm>
+          <a:prstGeom prst="rect">
+            <a:avLst/>
+          </a:prstGeom>
+          <a:noFill/>
+        </p:spPr>
+        <p:txBody>
+          <a:bodyPr wrap="square" lIns="0" rIns="0" tIns="0" bIns="0" anchor="t">
+            <a:spAutoFit/>
+          </a:bodyPr>
+          <a:lstStyle/>
+          <a:p>
+            <a:pPr algn="l">
+              <a:lnSpc>
+                <a:spcPct val="108000"/>
+              </a:lnSpc>
+              <a:spcAft>
+                <a:spcPts val="400"/>
+              </a:spcAft>
+            </a:pPr>
+            <a:r>
+              <a:rPr sz="3200" b="1" i="0">
+                <a:solidFill>
+                  <a:srgbClr val="0F172A"/>
+                </a:solidFill>
+                <a:latin typeface="Calibri"/>
+              </a:rPr>
+              <a:t>Kịch bản 6 bước — mỗi bước một vai trò</a:t>
+            </a:r>
+          </a:p>
+        </p:txBody>
+      </p:sp>
+      <p:sp>
+        <p:nvSpPr>
+          <p:cNvPr id="4" name="Rounded Rectangle 3"/>
+          <p:cNvSpPr/>
+          <p:nvPr/>
+        </p:nvSpPr>
+        <p:spPr>
+          <a:xfrm>
+            <a:off x="548640" y="1554480"/>
+            <a:ext cx="3529584" cy="2194560"/>
+          </a:xfrm>
+          <a:prstGeom prst="roundRect">
+            <a:avLst>
+              <a:gd name="adj" fmla="val 8000"/>
+            </a:avLst>
+          </a:prstGeom>
+          <a:solidFill>
+            <a:srgbClr val="FFFFFF"/>
+          </a:solidFill>
+          <a:ln>
+            <a:noFill/>
+          </a:ln>
+          <a:effectLst>
+            <a:outerShdw blurRad="152400" dist="38100" dir="5400000" algn="t" rotWithShape="0">
+              <a:srgbClr val="0F172A">
+                <a:alpha val="14000"/>
+              </a:srgbClr>
+            </a:outerShdw>
+          </a:effectLst>
+        </p:spPr>
+        <p:style>
+          <a:lnRef idx="1">
+            <a:schemeClr val="accent1"/>
+          </a:lnRef>
+          <a:fillRef idx="3">
+            <a:schemeClr val="accent1"/>
+          </a:fillRef>
+          <a:effectRef idx="2">
+            <a:schemeClr val="accent1"/>
+          </a:effectRef>
+          <a:fontRef idx="minor">
+            <a:schemeClr val="lt1"/>
+          </a:fontRef>
+        </p:style>
+        <p:txBody>
+          <a:bodyPr rtlCol="0" anchor="ctr"/>
+          <a:lstStyle/>
+          <a:p/>
+        </p:txBody>
+      </p:sp>
+      <p:sp>
+        <p:nvSpPr>
+          <p:cNvPr id="5" name="Oval 4"/>
+          <p:cNvSpPr/>
+          <p:nvPr/>
+        </p:nvSpPr>
+        <p:spPr>
+          <a:xfrm>
+            <a:off x="804672" y="1810512"/>
+            <a:ext cx="530352" cy="530352"/>
+          </a:xfrm>
+          <a:prstGeom prst="ellipse">
+            <a:avLst/>
+          </a:prstGeom>
+          <a:solidFill>
+            <a:srgbClr val="0D9488"/>
+          </a:solidFill>
+          <a:ln>
+            <a:noFill/>
+          </a:ln>
+        </p:spPr>
+        <p:style>
+          <a:lnRef idx="1">
+            <a:schemeClr val="accent1"/>
+          </a:lnRef>
+          <a:fillRef idx="3">
+            <a:schemeClr val="accent1"/>
+          </a:fillRef>
+          <a:effectRef idx="2">
+            <a:schemeClr val="accent1"/>
+          </a:effectRef>
+          <a:fontRef idx="minor">
+            <a:schemeClr val="lt1"/>
+          </a:fontRef>
+        </p:style>
+        <p:txBody>
+          <a:bodyPr rtlCol="0" anchor="ctr"/>
+          <a:lstStyle/>
+          <a:p>
+            <a:pPr algn="ctr"/>
+          </a:p>
+        </p:txBody>
+      </p:sp>
+      <p:pic>
+        <p:nvPicPr>
+          <p:cNvPr id="6" name="Picture 5" descr="phone_w.png"/>
+          <p:cNvPicPr>
+            <a:picLocks noChangeAspect="1"/>
+          </p:cNvPicPr>
+          <p:nvPr/>
+        </p:nvPicPr>
+        <p:blipFill>
+          <a:blip r:embed="rId2"/>
+          <a:stretch>
+            <a:fillRect/>
+          </a:stretch>
+        </p:blipFill>
+        <p:spPr>
+          <a:xfrm>
+            <a:off x="931956" y="1937796"/>
+            <a:ext cx="275784" cy="275784"/>
+          </a:xfrm>
+          <a:prstGeom prst="rect">
+            <a:avLst/>
+          </a:prstGeom>
+        </p:spPr>
+      </p:pic>
+      <p:sp>
+        <p:nvSpPr>
+          <p:cNvPr id="7" name="TextBox 6"/>
+          <p:cNvSpPr txBox="1"/>
+          <p:nvPr/>
+        </p:nvSpPr>
+        <p:spPr>
+          <a:xfrm>
+            <a:off x="3209544" y="1737360"/>
+            <a:ext cx="640080" cy="640080"/>
+          </a:xfrm>
+          <a:prstGeom prst="rect">
+            <a:avLst/>
+          </a:prstGeom>
+          <a:noFill/>
+        </p:spPr>
+        <p:txBody>
+          <a:bodyPr wrap="square" lIns="0" rIns="0" tIns="0" bIns="0" anchor="t">
+            <a:spAutoFit/>
+          </a:bodyPr>
+          <a:lstStyle/>
+          <a:p>
+            <a:pPr algn="r">
+              <a:lnSpc>
+                <a:spcPct val="108000"/>
+              </a:lnSpc>
+              <a:spcAft>
+                <a:spcPts val="400"/>
+              </a:spcAft>
+            </a:pPr>
+            <a:r>
+              <a:rPr sz="3600" b="1" i="0">
+                <a:solidFill>
+                  <a:srgbClr val="CCFBF1"/>
+                </a:solidFill>
+                <a:latin typeface="Calibri"/>
+              </a:rPr>
+              <a:t>1</a:t>
+            </a:r>
+          </a:p>
+        </p:txBody>
+      </p:sp>
+      <p:sp>
+        <p:nvSpPr>
+          <p:cNvPr id="8" name="TextBox 7"/>
+          <p:cNvSpPr txBox="1"/>
+          <p:nvPr/>
+        </p:nvSpPr>
+        <p:spPr>
+          <a:xfrm>
+            <a:off x="804672" y="2468880"/>
+            <a:ext cx="3072384" cy="320040"/>
+          </a:xfrm>
+          <a:prstGeom prst="rect">
+            <a:avLst/>
+          </a:prstGeom>
+          <a:noFill/>
+        </p:spPr>
+        <p:txBody>
+          <a:bodyPr wrap="square" lIns="0" rIns="0" tIns="0" bIns="0" anchor="t">
+            <a:spAutoFit/>
+          </a:bodyPr>
+          <a:lstStyle/>
+          <a:p>
+            <a:pPr algn="l">
+              <a:lnSpc>
+                <a:spcPct val="108000"/>
+              </a:lnSpc>
+              <a:spcAft>
+                <a:spcPts val="400"/>
+              </a:spcAft>
+            </a:pPr>
+            <a:r>
+              <a:rPr sz="1700" b="1" i="0">
+                <a:solidFill>
+                  <a:srgbClr val="0F172A"/>
+                </a:solidFill>
+                <a:latin typeface="Calibri"/>
+              </a:rPr>
+              <a:t>Khách đặt lịch</a:t>
+            </a:r>
+          </a:p>
+        </p:txBody>
+      </p:sp>
+      <p:sp>
+        <p:nvSpPr>
+          <p:cNvPr id="9" name="TextBox 8"/>
+          <p:cNvSpPr txBox="1"/>
+          <p:nvPr/>
+        </p:nvSpPr>
+        <p:spPr>
+          <a:xfrm>
+            <a:off x="804672" y="2798064"/>
+            <a:ext cx="3072384" cy="274320"/>
+          </a:xfrm>
+          <a:prstGeom prst="rect">
+            <a:avLst/>
+          </a:prstGeom>
+          <a:noFill/>
+        </p:spPr>
+        <p:txBody>
+          <a:bodyPr wrap="square" lIns="0" rIns="0" tIns="0" bIns="0" anchor="t">
+            <a:spAutoFit/>
+          </a:bodyPr>
+          <a:lstStyle/>
+          <a:p>
+            <a:pPr algn="l">
+              <a:lnSpc>
+                <a:spcPct val="108000"/>
+              </a:lnSpc>
+              <a:spcAft>
+                <a:spcPts val="400"/>
+              </a:spcAft>
+            </a:pPr>
+            <a:r>
+              <a:rPr sz="1200" b="1" i="0">
+                <a:solidFill>
+                  <a:srgbClr val="0F766E"/>
+                </a:solidFill>
+                <a:latin typeface="Calibri"/>
+              </a:rPr>
+              <a:t>Cửa sổ ẩn danh · /dat-lich</a:t>
+            </a:r>
+          </a:p>
+        </p:txBody>
+      </p:sp>
+      <p:sp>
+        <p:nvSpPr>
+          <p:cNvPr id="10" name="TextBox 9"/>
+          <p:cNvSpPr txBox="1"/>
+          <p:nvPr/>
+        </p:nvSpPr>
+        <p:spPr>
+          <a:xfrm>
+            <a:off x="804672" y="3090672"/>
+            <a:ext cx="3072384" cy="640080"/>
+          </a:xfrm>
+          <a:prstGeom prst="rect">
+            <a:avLst/>
+          </a:prstGeom>
+          <a:noFill/>
+        </p:spPr>
+        <p:txBody>
+          <a:bodyPr wrap="square" lIns="0" rIns="0" tIns="0" bIns="0" anchor="t">
+            <a:spAutoFit/>
+          </a:bodyPr>
+          <a:lstStyle/>
+          <a:p>
+            <a:pPr algn="l">
+              <a:lnSpc>
+                <a:spcPct val="108000"/>
+              </a:lnSpc>
+              <a:spcAft>
+                <a:spcPts val="400"/>
+              </a:spcAft>
+            </a:pPr>
+            <a:r>
+              <a:rPr sz="1250" b="0" i="0">
+                <a:solidFill>
+                  <a:srgbClr val="475569"/>
+                </a:solidFill>
+                <a:latin typeface="Calibri"/>
+              </a:rPr>
+              <a:t>Cắt tóc nam + Nhuộm → khung giờ 150 phút → mã 8 ký tự, email ở Maildev</a:t>
+            </a:r>
+          </a:p>
+        </p:txBody>
+      </p:sp>
+      <p:sp>
+        <p:nvSpPr>
+          <p:cNvPr id="11" name="Rounded Rectangle 10"/>
+          <p:cNvSpPr/>
+          <p:nvPr/>
+        </p:nvSpPr>
+        <p:spPr>
+          <a:xfrm>
+            <a:off x="4315968" y="1554480"/>
+            <a:ext cx="3529584" cy="2194560"/>
+          </a:xfrm>
+          <a:prstGeom prst="roundRect">
+            <a:avLst>
+              <a:gd name="adj" fmla="val 8000"/>
+            </a:avLst>
+          </a:prstGeom>
+          <a:solidFill>
+            <a:srgbClr val="FFFFFF"/>
+          </a:solidFill>
+          <a:ln>
+            <a:noFill/>
+          </a:ln>
+          <a:effectLst>
+            <a:outerShdw blurRad="152400" dist="38100" dir="5400000" algn="t" rotWithShape="0">
+              <a:srgbClr val="0F172A">
+                <a:alpha val="14000"/>
+              </a:srgbClr>
+            </a:outerShdw>
+          </a:effectLst>
+        </p:spPr>
+        <p:style>
+          <a:lnRef idx="1">
+            <a:schemeClr val="accent1"/>
+          </a:lnRef>
+          <a:fillRef idx="3">
+            <a:schemeClr val="accent1"/>
+          </a:fillRef>
+          <a:effectRef idx="2">
+            <a:schemeClr val="accent1"/>
+          </a:effectRef>
+          <a:fontRef idx="minor">
+            <a:schemeClr val="lt1"/>
+          </a:fontRef>
+        </p:style>
+        <p:txBody>
+          <a:bodyPr rtlCol="0" anchor="ctr"/>
+          <a:lstStyle/>
+          <a:p/>
+        </p:txBody>
+      </p:sp>
+      <p:sp>
+        <p:nvSpPr>
+          <p:cNvPr id="12" name="Oval 11"/>
+          <p:cNvSpPr/>
+          <p:nvPr/>
+        </p:nvSpPr>
+        <p:spPr>
+          <a:xfrm>
+            <a:off x="4572000" y="1810512"/>
+            <a:ext cx="530352" cy="530352"/>
+          </a:xfrm>
+          <a:prstGeom prst="ellipse">
+            <a:avLst/>
+          </a:prstGeom>
+          <a:solidFill>
+            <a:srgbClr val="0D9488"/>
+          </a:solidFill>
+          <a:ln>
+            <a:noFill/>
+          </a:ln>
+        </p:spPr>
+        <p:style>
+          <a:lnRef idx="1">
+            <a:schemeClr val="accent1"/>
+          </a:lnRef>
+          <a:fillRef idx="3">
+            <a:schemeClr val="accent1"/>
+          </a:fillRef>
+          <a:effectRef idx="2">
+            <a:schemeClr val="accent1"/>
+          </a:effectRef>
+          <a:fontRef idx="minor">
+            <a:schemeClr val="lt1"/>
+          </a:fontRef>
+        </p:style>
+        <p:txBody>
+          <a:bodyPr rtlCol="0" anchor="ctr"/>
+          <a:lstStyle/>
+          <a:p>
+            <a:pPr algn="ctr"/>
+          </a:p>
+        </p:txBody>
+      </p:sp>
+      <p:pic>
+        <p:nvPicPr>
+          <p:cNvPr id="13" name="Picture 12" descr="lock_w.png"/>
+          <p:cNvPicPr>
+            <a:picLocks noChangeAspect="1"/>
+          </p:cNvPicPr>
+          <p:nvPr/>
+        </p:nvPicPr>
+        <p:blipFill>
+          <a:blip r:embed="rId3"/>
+          <a:stretch>
+            <a:fillRect/>
+          </a:stretch>
+        </p:blipFill>
+        <p:spPr>
+          <a:xfrm>
+            <a:off x="4699284" y="1937796"/>
+            <a:ext cx="275784" cy="275784"/>
+          </a:xfrm>
+          <a:prstGeom prst="rect">
+            <a:avLst/>
+          </a:prstGeom>
+        </p:spPr>
+      </p:pic>
+      <p:sp>
+        <p:nvSpPr>
+          <p:cNvPr id="14" name="TextBox 13"/>
+          <p:cNvSpPr txBox="1"/>
+          <p:nvPr/>
+        </p:nvSpPr>
+        <p:spPr>
+          <a:xfrm>
+            <a:off x="6976872" y="1737360"/>
+            <a:ext cx="640080" cy="640080"/>
+          </a:xfrm>
+          <a:prstGeom prst="rect">
+            <a:avLst/>
+          </a:prstGeom>
+          <a:noFill/>
+        </p:spPr>
+        <p:txBody>
+          <a:bodyPr wrap="square" lIns="0" rIns="0" tIns="0" bIns="0" anchor="t">
+            <a:spAutoFit/>
+          </a:bodyPr>
+          <a:lstStyle/>
+          <a:p>
+            <a:pPr algn="r">
+              <a:lnSpc>
+                <a:spcPct val="108000"/>
+              </a:lnSpc>
+              <a:spcAft>
+                <a:spcPts val="400"/>
+              </a:spcAft>
+            </a:pPr>
+            <a:r>
+              <a:rPr sz="3600" b="1" i="0">
+                <a:solidFill>
+                  <a:srgbClr val="CCFBF1"/>
+                </a:solidFill>
+                <a:latin typeface="Calibri"/>
+              </a:rPr>
+              <a:t>2</a:t>
+            </a:r>
+          </a:p>
+        </p:txBody>
+      </p:sp>
+      <p:sp>
+        <p:nvSpPr>
+          <p:cNvPr id="15" name="TextBox 14"/>
+          <p:cNvSpPr txBox="1"/>
+          <p:nvPr/>
+        </p:nvSpPr>
+        <p:spPr>
+          <a:xfrm>
+            <a:off x="4572000" y="2468880"/>
+            <a:ext cx="3072384" cy="320040"/>
+          </a:xfrm>
+          <a:prstGeom prst="rect">
+            <a:avLst/>
+          </a:prstGeom>
+          <a:noFill/>
+        </p:spPr>
+        <p:txBody>
+          <a:bodyPr wrap="square" lIns="0" rIns="0" tIns="0" bIns="0" anchor="t">
+            <a:spAutoFit/>
+          </a:bodyPr>
+          <a:lstStyle/>
+          <a:p>
+            <a:pPr algn="l">
+              <a:lnSpc>
+                <a:spcPct val="108000"/>
+              </a:lnSpc>
+              <a:spcAft>
+                <a:spcPts val="400"/>
+              </a:spcAft>
+            </a:pPr>
+            <a:r>
+              <a:rPr sz="1700" b="1" i="0">
+                <a:solidFill>
+                  <a:srgbClr val="0F172A"/>
+                </a:solidFill>
+                <a:latin typeface="Calibri"/>
+              </a:rPr>
+              <a:t>Chống đặt trùng</a:t>
+            </a:r>
+          </a:p>
+        </p:txBody>
+      </p:sp>
+      <p:sp>
+        <p:nvSpPr>
+          <p:cNvPr id="16" name="TextBox 15"/>
+          <p:cNvSpPr txBox="1"/>
+          <p:nvPr/>
+        </p:nvSpPr>
+        <p:spPr>
+          <a:xfrm>
+            <a:off x="4572000" y="2798064"/>
+            <a:ext cx="3072384" cy="274320"/>
+          </a:xfrm>
+          <a:prstGeom prst="rect">
+            <a:avLst/>
+          </a:prstGeom>
+          <a:noFill/>
+        </p:spPr>
+        <p:txBody>
+          <a:bodyPr wrap="square" lIns="0" rIns="0" tIns="0" bIns="0" anchor="t">
+            <a:spAutoFit/>
+          </a:bodyPr>
+          <a:lstStyle/>
+          <a:p>
+            <a:pPr algn="l">
+              <a:lnSpc>
+                <a:spcPct val="108000"/>
+              </a:lnSpc>
+              <a:spcAft>
+                <a:spcPts val="400"/>
+              </a:spcAft>
+            </a:pPr>
+            <a:r>
+              <a:rPr sz="1200" b="1" i="0">
+                <a:solidFill>
+                  <a:srgbClr val="0F766E"/>
+                </a:solidFill>
+                <a:latin typeface="Calibri"/>
+              </a:rPr>
+              <a:t>Terminal</a:t>
+            </a:r>
+          </a:p>
+        </p:txBody>
+      </p:sp>
+      <p:sp>
+        <p:nvSpPr>
+          <p:cNvPr id="17" name="TextBox 16"/>
+          <p:cNvSpPr txBox="1"/>
+          <p:nvPr/>
+        </p:nvSpPr>
+        <p:spPr>
+          <a:xfrm>
+            <a:off x="4572000" y="3090672"/>
+            <a:ext cx="3072384" cy="640080"/>
+          </a:xfrm>
+          <a:prstGeom prst="rect">
+            <a:avLst/>
+          </a:prstGeom>
+          <a:noFill/>
+        </p:spPr>
+        <p:txBody>
+          <a:bodyPr wrap="square" lIns="0" rIns="0" tIns="0" bIns="0" anchor="t">
+            <a:spAutoFit/>
+          </a:bodyPr>
+          <a:lstStyle/>
+          <a:p>
+            <a:pPr algn="l">
+              <a:lnSpc>
+                <a:spcPct val="108000"/>
+              </a:lnSpc>
+              <a:spcAft>
+                <a:spcPts val="400"/>
+              </a:spcAft>
+            </a:pPr>
+            <a:r>
+              <a:rPr sz="1250" b="0" i="0">
+                <a:solidFill>
+                  <a:srgbClr val="475569"/>
+                </a:solidFill>
+                <a:latin typeface="Calibri"/>
+              </a:rPr>
+              <a:t>npm run test:e2e -- booking-concurrency → 1 thành công / 19 nhận 409</a:t>
+            </a:r>
+          </a:p>
+        </p:txBody>
+      </p:sp>
+      <p:sp>
+        <p:nvSpPr>
+          <p:cNvPr id="18" name="Rounded Rectangle 17"/>
+          <p:cNvSpPr/>
+          <p:nvPr/>
+        </p:nvSpPr>
+        <p:spPr>
+          <a:xfrm>
+            <a:off x="8083296" y="1554480"/>
+            <a:ext cx="3529584" cy="2194560"/>
+          </a:xfrm>
+          <a:prstGeom prst="roundRect">
+            <a:avLst>
+              <a:gd name="adj" fmla="val 8000"/>
+            </a:avLst>
+          </a:prstGeom>
+          <a:solidFill>
+            <a:srgbClr val="FFFFFF"/>
+          </a:solidFill>
+          <a:ln>
+            <a:noFill/>
+          </a:ln>
+          <a:effectLst>
+            <a:outerShdw blurRad="152400" dist="38100" dir="5400000" algn="t" rotWithShape="0">
+              <a:srgbClr val="0F172A">
+                <a:alpha val="14000"/>
+              </a:srgbClr>
+            </a:outerShdw>
+          </a:effectLst>
+        </p:spPr>
+        <p:style>
+          <a:lnRef idx="1">
+            <a:schemeClr val="accent1"/>
+          </a:lnRef>
+          <a:fillRef idx="3">
+            <a:schemeClr val="accent1"/>
+          </a:fillRef>
+          <a:effectRef idx="2">
+            <a:schemeClr val="accent1"/>
+          </a:effectRef>
+          <a:fontRef idx="minor">
+            <a:schemeClr val="lt1"/>
+          </a:fontRef>
+        </p:style>
+        <p:txBody>
+          <a:bodyPr rtlCol="0" anchor="ctr"/>
+          <a:lstStyle/>
+          <a:p/>
+        </p:txBody>
+      </p:sp>
+      <p:sp>
+        <p:nvSpPr>
+          <p:cNvPr id="19" name="Oval 18"/>
+          <p:cNvSpPr/>
+          <p:nvPr/>
+        </p:nvSpPr>
+        <p:spPr>
+          <a:xfrm>
+            <a:off x="8339328" y="1810512"/>
+            <a:ext cx="530352" cy="530352"/>
+          </a:xfrm>
+          <a:prstGeom prst="ellipse">
+            <a:avLst/>
+          </a:prstGeom>
+          <a:solidFill>
+            <a:srgbClr val="0D9488"/>
+          </a:solidFill>
+          <a:ln>
+            <a:noFill/>
+          </a:ln>
+        </p:spPr>
+        <p:style>
+          <a:lnRef idx="1">
+            <a:schemeClr val="accent1"/>
+          </a:lnRef>
+          <a:fillRef idx="3">
+            <a:schemeClr val="accent1"/>
+          </a:fillRef>
+          <a:effectRef idx="2">
+            <a:schemeClr val="accent1"/>
+          </a:effectRef>
+          <a:fontRef idx="minor">
+            <a:schemeClr val="lt1"/>
+          </a:fontRef>
+        </p:style>
+        <p:txBody>
+          <a:bodyPr rtlCol="0" anchor="ctr"/>
+          <a:lstStyle/>
+          <a:p>
+            <a:pPr algn="ctr"/>
+          </a:p>
+        </p:txBody>
+      </p:sp>
+      <p:pic>
+        <p:nvPicPr>
+          <p:cNvPr id="20" name="Picture 19" descr="calendar_w.png"/>
+          <p:cNvPicPr>
+            <a:picLocks noChangeAspect="1"/>
+          </p:cNvPicPr>
+          <p:nvPr/>
+        </p:nvPicPr>
+        <p:blipFill>
+          <a:blip r:embed="rId4"/>
+          <a:stretch>
+            <a:fillRect/>
+          </a:stretch>
+        </p:blipFill>
+        <p:spPr>
+          <a:xfrm>
+            <a:off x="8466612" y="1937796"/>
+            <a:ext cx="275784" cy="275784"/>
+          </a:xfrm>
+          <a:prstGeom prst="rect">
+            <a:avLst/>
+          </a:prstGeom>
+        </p:spPr>
+      </p:pic>
+      <p:sp>
+        <p:nvSpPr>
+          <p:cNvPr id="21" name="TextBox 20"/>
+          <p:cNvSpPr txBox="1"/>
+          <p:nvPr/>
+        </p:nvSpPr>
+        <p:spPr>
+          <a:xfrm>
+            <a:off x="10744200" y="1737360"/>
+            <a:ext cx="640080" cy="640080"/>
+          </a:xfrm>
+          <a:prstGeom prst="rect">
+            <a:avLst/>
+          </a:prstGeom>
+          <a:noFill/>
+        </p:spPr>
+        <p:txBody>
+          <a:bodyPr wrap="square" lIns="0" rIns="0" tIns="0" bIns="0" anchor="t">
+            <a:spAutoFit/>
+          </a:bodyPr>
+          <a:lstStyle/>
+          <a:p>
+            <a:pPr algn="r">
+              <a:lnSpc>
+                <a:spcPct val="108000"/>
+              </a:lnSpc>
+              <a:spcAft>
+                <a:spcPts val="400"/>
+              </a:spcAft>
+            </a:pPr>
+            <a:r>
+              <a:rPr sz="3600" b="1" i="0">
+                <a:solidFill>
+                  <a:srgbClr val="CCFBF1"/>
+                </a:solidFill>
+                <a:latin typeface="Calibri"/>
+              </a:rPr>
+              <a:t>3</a:t>
+            </a:r>
+          </a:p>
+        </p:txBody>
+      </p:sp>
+      <p:sp>
+        <p:nvSpPr>
+          <p:cNvPr id="22" name="TextBox 21"/>
+          <p:cNvSpPr txBox="1"/>
+          <p:nvPr/>
+        </p:nvSpPr>
+        <p:spPr>
+          <a:xfrm>
+            <a:off x="8339328" y="2468880"/>
+            <a:ext cx="3072384" cy="320040"/>
+          </a:xfrm>
+          <a:prstGeom prst="rect">
+            <a:avLst/>
+          </a:prstGeom>
+          <a:noFill/>
+        </p:spPr>
+        <p:txBody>
+          <a:bodyPr wrap="square" lIns="0" rIns="0" tIns="0" bIns="0" anchor="t">
+            <a:spAutoFit/>
+          </a:bodyPr>
+          <a:lstStyle/>
+          <a:p>
+            <a:pPr algn="l">
+              <a:lnSpc>
+                <a:spcPct val="108000"/>
+              </a:lnSpc>
+              <a:spcAft>
+                <a:spcPts val="400"/>
+              </a:spcAft>
+            </a:pPr>
+            <a:r>
+              <a:rPr sz="1700" b="1" i="0">
+                <a:solidFill>
+                  <a:srgbClr val="0F172A"/>
+                </a:solidFill>
+                <a:latin typeface="Calibri"/>
+              </a:rPr>
+              <a:t>Lễ tân điều phối</a:t>
+            </a:r>
+          </a:p>
+        </p:txBody>
+      </p:sp>
+      <p:sp>
+        <p:nvSpPr>
+          <p:cNvPr id="23" name="TextBox 22"/>
+          <p:cNvSpPr txBox="1"/>
+          <p:nvPr/>
+        </p:nvSpPr>
+        <p:spPr>
+          <a:xfrm>
+            <a:off x="8339328" y="2798064"/>
+            <a:ext cx="3072384" cy="274320"/>
+          </a:xfrm>
+          <a:prstGeom prst="rect">
+            <a:avLst/>
+          </a:prstGeom>
+          <a:noFill/>
+        </p:spPr>
+        <p:txBody>
+          <a:bodyPr wrap="square" lIns="0" rIns="0" tIns="0" bIns="0" anchor="t">
+            <a:spAutoFit/>
+          </a:bodyPr>
+          <a:lstStyle/>
+          <a:p>
+            <a:pPr algn="l">
+              <a:lnSpc>
+                <a:spcPct val="108000"/>
+              </a:lnSpc>
+              <a:spcAft>
+                <a:spcPts val="400"/>
+              </a:spcAft>
+            </a:pPr>
+            <a:r>
+              <a:rPr sz="1200" b="1" i="0">
+                <a:solidFill>
+                  <a:srgbClr val="0F766E"/>
+                </a:solidFill>
+                <a:latin typeface="Calibri"/>
+              </a:rPr>
+              <a:t>reception@salon.vn</a:t>
+            </a:r>
+          </a:p>
+        </p:txBody>
+      </p:sp>
+      <p:sp>
+        <p:nvSpPr>
+          <p:cNvPr id="24" name="TextBox 23"/>
+          <p:cNvSpPr txBox="1"/>
+          <p:nvPr/>
+        </p:nvSpPr>
+        <p:spPr>
+          <a:xfrm>
+            <a:off x="8339328" y="3090672"/>
+            <a:ext cx="3072384" cy="640080"/>
+          </a:xfrm>
+          <a:prstGeom prst="rect">
+            <a:avLst/>
+          </a:prstGeom>
+          <a:noFill/>
+        </p:spPr>
+        <p:txBody>
+          <a:bodyPr wrap="square" lIns="0" rIns="0" tIns="0" bIns="0" anchor="t">
+            <a:spAutoFit/>
+          </a:bodyPr>
+          <a:lstStyle/>
+          <a:p>
+            <a:pPr algn="l">
+              <a:lnSpc>
+                <a:spcPct val="108000"/>
+              </a:lnSpc>
+              <a:spcAft>
+                <a:spcPts val="400"/>
+              </a:spcAft>
+            </a:pPr>
+            <a:r>
+              <a:rPr sz="1250" b="0" i="0">
+                <a:solidFill>
+                  <a:srgbClr val="475569"/>
+                </a:solidFill>
+                <a:latin typeface="Calibri"/>
+              </a:rPr>
+              <a:t>Xác nhận lịch vừa đặt, tạo khách vãng lai, check-in trên Lịch ngày</a:t>
+            </a:r>
+          </a:p>
+        </p:txBody>
+      </p:sp>
+      <p:sp>
+        <p:nvSpPr>
+          <p:cNvPr id="25" name="Rounded Rectangle 24"/>
+          <p:cNvSpPr/>
+          <p:nvPr/>
+        </p:nvSpPr>
+        <p:spPr>
+          <a:xfrm>
+            <a:off x="548640" y="3977640"/>
+            <a:ext cx="3529584" cy="2194560"/>
+          </a:xfrm>
+          <a:prstGeom prst="roundRect">
+            <a:avLst>
+              <a:gd name="adj" fmla="val 8000"/>
+            </a:avLst>
+          </a:prstGeom>
+          <a:solidFill>
+            <a:srgbClr val="FFFFFF"/>
+          </a:solidFill>
+          <a:ln>
+            <a:noFill/>
+          </a:ln>
+          <a:effectLst>
+            <a:outerShdw blurRad="152400" dist="38100" dir="5400000" algn="t" rotWithShape="0">
+              <a:srgbClr val="0F172A">
+                <a:alpha val="14000"/>
+              </a:srgbClr>
+            </a:outerShdw>
+          </a:effectLst>
+        </p:spPr>
+        <p:style>
+          <a:lnRef idx="1">
+            <a:schemeClr val="accent1"/>
+          </a:lnRef>
+          <a:fillRef idx="3">
+            <a:schemeClr val="accent1"/>
+          </a:fillRef>
+          <a:effectRef idx="2">
+            <a:schemeClr val="accent1"/>
+          </a:effectRef>
+          <a:fontRef idx="minor">
+            <a:schemeClr val="lt1"/>
+          </a:fontRef>
+        </p:style>
+        <p:txBody>
+          <a:bodyPr rtlCol="0" anchor="ctr"/>
+          <a:lstStyle/>
+          <a:p/>
+        </p:txBody>
+      </p:sp>
+      <p:sp>
+        <p:nvSpPr>
+          <p:cNvPr id="26" name="Oval 25"/>
+          <p:cNvSpPr/>
+          <p:nvPr/>
+        </p:nvSpPr>
+        <p:spPr>
+          <a:xfrm>
+            <a:off x="804672" y="4233672"/>
+            <a:ext cx="530352" cy="530352"/>
+          </a:xfrm>
+          <a:prstGeom prst="ellipse">
+            <a:avLst/>
+          </a:prstGeom>
+          <a:solidFill>
+            <a:srgbClr val="0D9488"/>
+          </a:solidFill>
+          <a:ln>
+            <a:noFill/>
+          </a:ln>
+        </p:spPr>
+        <p:style>
+          <a:lnRef idx="1">
+            <a:schemeClr val="accent1"/>
+          </a:lnRef>
+          <a:fillRef idx="3">
+            <a:schemeClr val="accent1"/>
+          </a:fillRef>
+          <a:effectRef idx="2">
+            <a:schemeClr val="accent1"/>
+          </a:effectRef>
+          <a:fontRef idx="minor">
+            <a:schemeClr val="lt1"/>
+          </a:fontRef>
+        </p:style>
+        <p:txBody>
+          <a:bodyPr rtlCol="0" anchor="ctr"/>
+          <a:lstStyle/>
+          <a:p>
+            <a:pPr algn="ctr"/>
+          </a:p>
+        </p:txBody>
+      </p:sp>
+      <p:pic>
+        <p:nvPicPr>
+          <p:cNvPr id="27" name="Picture 26" descr="scissors_w.png"/>
+          <p:cNvPicPr>
+            <a:picLocks noChangeAspect="1"/>
+          </p:cNvPicPr>
+          <p:nvPr/>
+        </p:nvPicPr>
+        <p:blipFill>
+          <a:blip r:embed="rId5"/>
+          <a:stretch>
+            <a:fillRect/>
+          </a:stretch>
+        </p:blipFill>
+        <p:spPr>
+          <a:xfrm>
+            <a:off x="931956" y="4360956"/>
+            <a:ext cx="275784" cy="275784"/>
+          </a:xfrm>
+          <a:prstGeom prst="rect">
+            <a:avLst/>
+          </a:prstGeom>
+        </p:spPr>
+      </p:pic>
+      <p:sp>
+        <p:nvSpPr>
+          <p:cNvPr id="28" name="TextBox 27"/>
+          <p:cNvSpPr txBox="1"/>
+          <p:nvPr/>
+        </p:nvSpPr>
+        <p:spPr>
+          <a:xfrm>
+            <a:off x="3209544" y="4160520"/>
+            <a:ext cx="640080" cy="640080"/>
+          </a:xfrm>
+          <a:prstGeom prst="rect">
+            <a:avLst/>
+          </a:prstGeom>
+          <a:noFill/>
+        </p:spPr>
+        <p:txBody>
+          <a:bodyPr wrap="square" lIns="0" rIns="0" tIns="0" bIns="0" anchor="t">
+            <a:spAutoFit/>
+          </a:bodyPr>
+          <a:lstStyle/>
+          <a:p>
+            <a:pPr algn="r">
+              <a:lnSpc>
+                <a:spcPct val="108000"/>
+              </a:lnSpc>
+              <a:spcAft>
+                <a:spcPts val="400"/>
+              </a:spcAft>
+            </a:pPr>
+            <a:r>
+              <a:rPr sz="3600" b="1" i="0">
+                <a:solidFill>
+                  <a:srgbClr val="CCFBF1"/>
+                </a:solidFill>
+                <a:latin typeface="Calibri"/>
+              </a:rPr>
+              <a:t>4</a:t>
+            </a:r>
+          </a:p>
+        </p:txBody>
+      </p:sp>
+      <p:sp>
+        <p:nvSpPr>
+          <p:cNvPr id="29" name="TextBox 28"/>
+          <p:cNvSpPr txBox="1"/>
+          <p:nvPr/>
+        </p:nvSpPr>
+        <p:spPr>
+          <a:xfrm>
+            <a:off x="804672" y="4892040"/>
+            <a:ext cx="3072384" cy="320040"/>
+          </a:xfrm>
+          <a:prstGeom prst="rect">
+            <a:avLst/>
+          </a:prstGeom>
+          <a:noFill/>
+        </p:spPr>
+        <p:txBody>
+          <a:bodyPr wrap="square" lIns="0" rIns="0" tIns="0" bIns="0" anchor="t">
+            <a:spAutoFit/>
+          </a:bodyPr>
+          <a:lstStyle/>
+          <a:p>
+            <a:pPr algn="l">
+              <a:lnSpc>
+                <a:spcPct val="108000"/>
+              </a:lnSpc>
+              <a:spcAft>
+                <a:spcPts val="400"/>
+              </a:spcAft>
+            </a:pPr>
+            <a:r>
+              <a:rPr sz="1700" b="1" i="0">
+                <a:solidFill>
+                  <a:srgbClr val="0F172A"/>
+                </a:solidFill>
+                <a:latin typeface="Calibri"/>
+              </a:rPr>
+              <a:t>Thợ phục vụ</a:t>
+            </a:r>
+          </a:p>
+        </p:txBody>
+      </p:sp>
+      <p:sp>
+        <p:nvSpPr>
+          <p:cNvPr id="30" name="TextBox 29"/>
+          <p:cNvSpPr txBox="1"/>
+          <p:nvPr/>
+        </p:nvSpPr>
+        <p:spPr>
+          <a:xfrm>
+            <a:off x="804672" y="5221224"/>
+            <a:ext cx="3072384" cy="274320"/>
+          </a:xfrm>
+          <a:prstGeom prst="rect">
+            <a:avLst/>
+          </a:prstGeom>
+          <a:noFill/>
+        </p:spPr>
+        <p:txBody>
+          <a:bodyPr wrap="square" lIns="0" rIns="0" tIns="0" bIns="0" anchor="t">
+            <a:spAutoFit/>
+          </a:bodyPr>
+          <a:lstStyle/>
+          <a:p>
+            <a:pPr algn="l">
+              <a:lnSpc>
+                <a:spcPct val="108000"/>
+              </a:lnSpc>
+              <a:spcAft>
+                <a:spcPts val="400"/>
+              </a:spcAft>
+            </a:pPr>
+            <a:r>
+              <a:rPr sz="1200" b="1" i="0">
+                <a:solidFill>
+                  <a:srgbClr val="0F766E"/>
+                </a:solidFill>
+                <a:latin typeface="Calibri"/>
+              </a:rPr>
+              <a:t>stylist1@salon.vn</a:t>
+            </a:r>
+          </a:p>
+        </p:txBody>
+      </p:sp>
+      <p:sp>
+        <p:nvSpPr>
+          <p:cNvPr id="31" name="TextBox 30"/>
+          <p:cNvSpPr txBox="1"/>
+          <p:nvPr/>
+        </p:nvSpPr>
+        <p:spPr>
+          <a:xfrm>
+            <a:off x="804672" y="5513832"/>
+            <a:ext cx="3072384" cy="640080"/>
+          </a:xfrm>
+          <a:prstGeom prst="rect">
+            <a:avLst/>
+          </a:prstGeom>
+          <a:noFill/>
+        </p:spPr>
+        <p:txBody>
+          <a:bodyPr wrap="square" lIns="0" rIns="0" tIns="0" bIns="0" anchor="t">
+            <a:spAutoFit/>
+          </a:bodyPr>
+          <a:lstStyle/>
+          <a:p>
+            <a:pPr algn="l">
+              <a:lnSpc>
+                <a:spcPct val="108000"/>
+              </a:lnSpc>
+              <a:spcAft>
+                <a:spcPts val="400"/>
+              </a:spcAft>
+            </a:pPr>
+            <a:r>
+              <a:rPr sz="1250" b="0" i="0">
+                <a:solidFill>
+                  <a:srgbClr val="475569"/>
+                </a:solidFill>
+                <a:latin typeface="Calibri"/>
+              </a:rPr>
+              <a:t>Bắt đầu → Hoàn tất; SĐT khách hiển thị 098***1234; ghi chú kỹ thuật</a:t>
+            </a:r>
+          </a:p>
+        </p:txBody>
+      </p:sp>
+      <p:sp>
+        <p:nvSpPr>
+          <p:cNvPr id="32" name="Rounded Rectangle 31"/>
+          <p:cNvSpPr/>
+          <p:nvPr/>
+        </p:nvSpPr>
+        <p:spPr>
+          <a:xfrm>
+            <a:off x="4315968" y="3977640"/>
+            <a:ext cx="3529584" cy="2194560"/>
+          </a:xfrm>
+          <a:prstGeom prst="roundRect">
+            <a:avLst>
+              <a:gd name="adj" fmla="val 8000"/>
+            </a:avLst>
+          </a:prstGeom>
+          <a:solidFill>
+            <a:srgbClr val="FFFFFF"/>
+          </a:solidFill>
+          <a:ln>
+            <a:noFill/>
+          </a:ln>
+          <a:effectLst>
+            <a:outerShdw blurRad="152400" dist="38100" dir="5400000" algn="t" rotWithShape="0">
+              <a:srgbClr val="0F172A">
+                <a:alpha val="14000"/>
+              </a:srgbClr>
+            </a:outerShdw>
+          </a:effectLst>
+        </p:spPr>
+        <p:style>
+          <a:lnRef idx="1">
+            <a:schemeClr val="accent1"/>
+          </a:lnRef>
+          <a:fillRef idx="3">
+            <a:schemeClr val="accent1"/>
+          </a:fillRef>
+          <a:effectRef idx="2">
+            <a:schemeClr val="accent1"/>
+          </a:effectRef>
+          <a:fontRef idx="minor">
+            <a:schemeClr val="lt1"/>
+          </a:fontRef>
+        </p:style>
+        <p:txBody>
+          <a:bodyPr rtlCol="0" anchor="ctr"/>
+          <a:lstStyle/>
+          <a:p/>
+        </p:txBody>
+      </p:sp>
+      <p:sp>
+        <p:nvSpPr>
+          <p:cNvPr id="33" name="Oval 32"/>
+          <p:cNvSpPr/>
+          <p:nvPr/>
+        </p:nvSpPr>
+        <p:spPr>
+          <a:xfrm>
+            <a:off x="4572000" y="4233672"/>
+            <a:ext cx="530352" cy="530352"/>
+          </a:xfrm>
+          <a:prstGeom prst="ellipse">
+            <a:avLst/>
+          </a:prstGeom>
+          <a:solidFill>
+            <a:srgbClr val="0D9488"/>
+          </a:solidFill>
+          <a:ln>
+            <a:noFill/>
+          </a:ln>
+        </p:spPr>
+        <p:style>
+          <a:lnRef idx="1">
+            <a:schemeClr val="accent1"/>
+          </a:lnRef>
+          <a:fillRef idx="3">
+            <a:schemeClr val="accent1"/>
+          </a:fillRef>
+          <a:effectRef idx="2">
+            <a:schemeClr val="accent1"/>
+          </a:effectRef>
+          <a:fontRef idx="minor">
+            <a:schemeClr val="lt1"/>
+          </a:fontRef>
+        </p:style>
+        <p:txBody>
+          <a:bodyPr rtlCol="0" anchor="ctr"/>
+          <a:lstStyle/>
+          <a:p>
+            <a:pPr algn="ctr"/>
+          </a:p>
+        </p:txBody>
+      </p:sp>
+      <p:pic>
+        <p:nvPicPr>
+          <p:cNvPr id="34" name="Picture 33" descr="receipt_w.png"/>
+          <p:cNvPicPr>
+            <a:picLocks noChangeAspect="1"/>
+          </p:cNvPicPr>
+          <p:nvPr/>
+        </p:nvPicPr>
+        <p:blipFill>
+          <a:blip r:embed="rId6"/>
+          <a:stretch>
+            <a:fillRect/>
+          </a:stretch>
+        </p:blipFill>
+        <p:spPr>
+          <a:xfrm>
+            <a:off x="4699284" y="4360956"/>
+            <a:ext cx="275784" cy="275784"/>
+          </a:xfrm>
+          <a:prstGeom prst="rect">
+            <a:avLst/>
+          </a:prstGeom>
+        </p:spPr>
+      </p:pic>
+      <p:sp>
+        <p:nvSpPr>
+          <p:cNvPr id="35" name="TextBox 34"/>
+          <p:cNvSpPr txBox="1"/>
+          <p:nvPr/>
+        </p:nvSpPr>
+        <p:spPr>
+          <a:xfrm>
+            <a:off x="6976872" y="4160520"/>
+            <a:ext cx="640080" cy="640080"/>
+          </a:xfrm>
+          <a:prstGeom prst="rect">
+            <a:avLst/>
+          </a:prstGeom>
+          <a:noFill/>
+        </p:spPr>
+        <p:txBody>
+          <a:bodyPr wrap="square" lIns="0" rIns="0" tIns="0" bIns="0" anchor="t">
+            <a:spAutoFit/>
+          </a:bodyPr>
+          <a:lstStyle/>
+          <a:p>
+            <a:pPr algn="r">
+              <a:lnSpc>
+                <a:spcPct val="108000"/>
+              </a:lnSpc>
+              <a:spcAft>
+                <a:spcPts val="400"/>
+              </a:spcAft>
+            </a:pPr>
+            <a:r>
+              <a:rPr sz="3600" b="1" i="0">
+                <a:solidFill>
+                  <a:srgbClr val="CCFBF1"/>
+                </a:solidFill>
+                <a:latin typeface="Calibri"/>
+              </a:rPr>
+              <a:t>5</a:t>
+            </a:r>
+          </a:p>
+        </p:txBody>
+      </p:sp>
+      <p:sp>
+        <p:nvSpPr>
+          <p:cNvPr id="36" name="TextBox 35"/>
+          <p:cNvSpPr txBox="1"/>
+          <p:nvPr/>
+        </p:nvSpPr>
+        <p:spPr>
+          <a:xfrm>
+            <a:off x="4572000" y="4892040"/>
+            <a:ext cx="3072384" cy="320040"/>
+          </a:xfrm>
+          <a:prstGeom prst="rect">
+            <a:avLst/>
+          </a:prstGeom>
+          <a:noFill/>
+        </p:spPr>
+        <p:txBody>
+          <a:bodyPr wrap="square" lIns="0" rIns="0" tIns="0" bIns="0" anchor="t">
+            <a:spAutoFit/>
+          </a:bodyPr>
+          <a:lstStyle/>
+          <a:p>
+            <a:pPr algn="l">
+              <a:lnSpc>
+                <a:spcPct val="108000"/>
+              </a:lnSpc>
+              <a:spcAft>
+                <a:spcPts val="400"/>
+              </a:spcAft>
+            </a:pPr>
+            <a:r>
+              <a:rPr sz="1700" b="1" i="0">
+                <a:solidFill>
+                  <a:srgbClr val="0F172A"/>
+                </a:solidFill>
+                <a:latin typeface="Calibri"/>
+              </a:rPr>
+              <a:t>Thu tiền</a:t>
+            </a:r>
+          </a:p>
+        </p:txBody>
+      </p:sp>
+      <p:sp>
+        <p:nvSpPr>
+          <p:cNvPr id="37" name="TextBox 36"/>
+          <p:cNvSpPr txBox="1"/>
+          <p:nvPr/>
+        </p:nvSpPr>
+        <p:spPr>
+          <a:xfrm>
+            <a:off x="4572000" y="5221224"/>
+            <a:ext cx="3072384" cy="274320"/>
+          </a:xfrm>
+          <a:prstGeom prst="rect">
+            <a:avLst/>
+          </a:prstGeom>
+          <a:noFill/>
+        </p:spPr>
+        <p:txBody>
+          <a:bodyPr wrap="square" lIns="0" rIns="0" tIns="0" bIns="0" anchor="t">
+            <a:spAutoFit/>
+          </a:bodyPr>
+          <a:lstStyle/>
+          <a:p>
+            <a:pPr algn="l">
+              <a:lnSpc>
+                <a:spcPct val="108000"/>
+              </a:lnSpc>
+              <a:spcAft>
+                <a:spcPts val="400"/>
+              </a:spcAft>
+            </a:pPr>
+            <a:r>
+              <a:rPr sz="1200" b="1" i="0">
+                <a:solidFill>
+                  <a:srgbClr val="0F766E"/>
+                </a:solidFill>
+                <a:latin typeface="Calibri"/>
+              </a:rPr>
+              <a:t>reception@salon.vn</a:t>
+            </a:r>
+          </a:p>
+        </p:txBody>
+      </p:sp>
+      <p:sp>
+        <p:nvSpPr>
+          <p:cNvPr id="38" name="TextBox 37"/>
+          <p:cNvSpPr txBox="1"/>
+          <p:nvPr/>
+        </p:nvSpPr>
+        <p:spPr>
+          <a:xfrm>
+            <a:off x="4572000" y="5513832"/>
+            <a:ext cx="3072384" cy="640080"/>
+          </a:xfrm>
+          <a:prstGeom prst="rect">
+            <a:avLst/>
+          </a:prstGeom>
+          <a:noFill/>
+        </p:spPr>
+        <p:txBody>
+          <a:bodyPr wrap="square" lIns="0" rIns="0" tIns="0" bIns="0" anchor="t">
+            <a:spAutoFit/>
+          </a:bodyPr>
+          <a:lstStyle/>
+          <a:p>
+            <a:pPr algn="l">
+              <a:lnSpc>
+                <a:spcPct val="108000"/>
+              </a:lnSpc>
+              <a:spcAft>
+                <a:spcPts val="400"/>
+              </a:spcAft>
+            </a:pPr>
+            <a:r>
+              <a:rPr sz="1250" b="0" i="0">
+                <a:solidFill>
+                  <a:srgbClr val="475569"/>
+                </a:solidFill>
+                <a:latin typeface="Calibri"/>
+              </a:rPr>
+              <a:t>Lập phiếu, mã NGAYTHUONG10 → 963.000 đ, đóng phiếu → email đánh giá</a:t>
+            </a:r>
+          </a:p>
+        </p:txBody>
+      </p:sp>
+      <p:sp>
+        <p:nvSpPr>
+          <p:cNvPr id="39" name="Rounded Rectangle 38"/>
+          <p:cNvSpPr/>
+          <p:nvPr/>
+        </p:nvSpPr>
+        <p:spPr>
+          <a:xfrm>
+            <a:off x="8083296" y="3977640"/>
+            <a:ext cx="3529584" cy="2194560"/>
+          </a:xfrm>
+          <a:prstGeom prst="roundRect">
+            <a:avLst>
+              <a:gd name="adj" fmla="val 8000"/>
+            </a:avLst>
+          </a:prstGeom>
+          <a:solidFill>
+            <a:srgbClr val="FFFFFF"/>
+          </a:solidFill>
+          <a:ln>
+            <a:noFill/>
+          </a:ln>
+          <a:effectLst>
+            <a:outerShdw blurRad="152400" dist="38100" dir="5400000" algn="t" rotWithShape="0">
+              <a:srgbClr val="0F172A">
+                <a:alpha val="14000"/>
+              </a:srgbClr>
+            </a:outerShdw>
+          </a:effectLst>
+        </p:spPr>
+        <p:style>
+          <a:lnRef idx="1">
+            <a:schemeClr val="accent1"/>
+          </a:lnRef>
+          <a:fillRef idx="3">
+            <a:schemeClr val="accent1"/>
+          </a:fillRef>
+          <a:effectRef idx="2">
+            <a:schemeClr val="accent1"/>
+          </a:effectRef>
+          <a:fontRef idx="minor">
+            <a:schemeClr val="lt1"/>
+          </a:fontRef>
+        </p:style>
+        <p:txBody>
+          <a:bodyPr rtlCol="0" anchor="ctr"/>
+          <a:lstStyle/>
+          <a:p/>
+        </p:txBody>
+      </p:sp>
+      <p:sp>
+        <p:nvSpPr>
+          <p:cNvPr id="40" name="Oval 39"/>
+          <p:cNvSpPr/>
+          <p:nvPr/>
+        </p:nvSpPr>
+        <p:spPr>
+          <a:xfrm>
+            <a:off x="8339328" y="4233672"/>
+            <a:ext cx="530352" cy="530352"/>
+          </a:xfrm>
+          <a:prstGeom prst="ellipse">
+            <a:avLst/>
+          </a:prstGeom>
+          <a:solidFill>
+            <a:srgbClr val="0D9488"/>
+          </a:solidFill>
+          <a:ln>
+            <a:noFill/>
+          </a:ln>
+        </p:spPr>
+        <p:style>
+          <a:lnRef idx="1">
+            <a:schemeClr val="accent1"/>
+          </a:lnRef>
+          <a:fillRef idx="3">
+            <a:schemeClr val="accent1"/>
+          </a:fillRef>
+          <a:effectRef idx="2">
+            <a:schemeClr val="accent1"/>
+          </a:effectRef>
+          <a:fontRef idx="minor">
+            <a:schemeClr val="lt1"/>
+          </a:fontRef>
+        </p:style>
+        <p:txBody>
+          <a:bodyPr rtlCol="0" anchor="ctr"/>
+          <a:lstStyle/>
+          <a:p>
+            <a:pPr algn="ctr"/>
+          </a:p>
+        </p:txBody>
+      </p:sp>
+      <p:pic>
+        <p:nvPicPr>
+          <p:cNvPr id="41" name="Picture 40" descr="chart_w.png"/>
+          <p:cNvPicPr>
+            <a:picLocks noChangeAspect="1"/>
+          </p:cNvPicPr>
+          <p:nvPr/>
+        </p:nvPicPr>
+        <p:blipFill>
+          <a:blip r:embed="rId7"/>
+          <a:stretch>
+            <a:fillRect/>
+          </a:stretch>
+        </p:blipFill>
+        <p:spPr>
+          <a:xfrm>
+            <a:off x="8466612" y="4360956"/>
+            <a:ext cx="275784" cy="275784"/>
+          </a:xfrm>
+          <a:prstGeom prst="rect">
+            <a:avLst/>
+          </a:prstGeom>
+        </p:spPr>
+      </p:pic>
+      <p:sp>
+        <p:nvSpPr>
+          <p:cNvPr id="42" name="TextBox 41"/>
+          <p:cNvSpPr txBox="1"/>
+          <p:nvPr/>
+        </p:nvSpPr>
+        <p:spPr>
+          <a:xfrm>
+            <a:off x="10744200" y="4160520"/>
+            <a:ext cx="640080" cy="640080"/>
+          </a:xfrm>
+          <a:prstGeom prst="rect">
+            <a:avLst/>
+          </a:prstGeom>
+          <a:noFill/>
+        </p:spPr>
+        <p:txBody>
+          <a:bodyPr wrap="square" lIns="0" rIns="0" tIns="0" bIns="0" anchor="t">
+            <a:spAutoFit/>
+          </a:bodyPr>
+          <a:lstStyle/>
+          <a:p>
+            <a:pPr algn="r">
+              <a:lnSpc>
+                <a:spcPct val="108000"/>
+              </a:lnSpc>
+              <a:spcAft>
+                <a:spcPts val="400"/>
+              </a:spcAft>
+            </a:pPr>
+            <a:r>
+              <a:rPr sz="3600" b="1" i="0">
+                <a:solidFill>
+                  <a:srgbClr val="CCFBF1"/>
+                </a:solidFill>
+                <a:latin typeface="Calibri"/>
+              </a:rPr>
+              <a:t>6</a:t>
+            </a:r>
+          </a:p>
+        </p:txBody>
+      </p:sp>
+      <p:sp>
+        <p:nvSpPr>
+          <p:cNvPr id="43" name="TextBox 42"/>
+          <p:cNvSpPr txBox="1"/>
+          <p:nvPr/>
+        </p:nvSpPr>
+        <p:spPr>
+          <a:xfrm>
+            <a:off x="8339328" y="4892040"/>
+            <a:ext cx="3072384" cy="320040"/>
+          </a:xfrm>
+          <a:prstGeom prst="rect">
+            <a:avLst/>
+          </a:prstGeom>
+          <a:noFill/>
+        </p:spPr>
+        <p:txBody>
+          <a:bodyPr wrap="square" lIns="0" rIns="0" tIns="0" bIns="0" anchor="t">
+            <a:spAutoFit/>
+          </a:bodyPr>
+          <a:lstStyle/>
+          <a:p>
+            <a:pPr algn="l">
+              <a:lnSpc>
+                <a:spcPct val="108000"/>
+              </a:lnSpc>
+              <a:spcAft>
+                <a:spcPts val="400"/>
+              </a:spcAft>
+            </a:pPr>
+            <a:r>
+              <a:rPr sz="1700" b="1" i="0">
+                <a:solidFill>
+                  <a:srgbClr val="0F172A"/>
+                </a:solidFill>
+                <a:latin typeface="Calibri"/>
+              </a:rPr>
+              <a:t>Báo cáo &amp; kiểm soát</a:t>
+            </a:r>
+          </a:p>
+        </p:txBody>
+      </p:sp>
+      <p:sp>
+        <p:nvSpPr>
+          <p:cNvPr id="44" name="TextBox 43"/>
+          <p:cNvSpPr txBox="1"/>
+          <p:nvPr/>
+        </p:nvSpPr>
+        <p:spPr>
+          <a:xfrm>
+            <a:off x="8339328" y="5221224"/>
+            <a:ext cx="3072384" cy="274320"/>
+          </a:xfrm>
+          <a:prstGeom prst="rect">
+            <a:avLst/>
+          </a:prstGeom>
+          <a:noFill/>
+        </p:spPr>
+        <p:txBody>
+          <a:bodyPr wrap="square" lIns="0" rIns="0" tIns="0" bIns="0" anchor="t">
+            <a:spAutoFit/>
+          </a:bodyPr>
+          <a:lstStyle/>
+          <a:p>
+            <a:pPr algn="l">
+              <a:lnSpc>
+                <a:spcPct val="108000"/>
+              </a:lnSpc>
+              <a:spcAft>
+                <a:spcPts val="400"/>
+              </a:spcAft>
+            </a:pPr>
+            <a:r>
+              <a:rPr sz="1200" b="1" i="0">
+                <a:solidFill>
+                  <a:srgbClr val="0F766E"/>
+                </a:solidFill>
+                <a:latin typeface="Calibri"/>
+              </a:rPr>
+              <a:t>owner@ · admin@</a:t>
+            </a:r>
+          </a:p>
+        </p:txBody>
+      </p:sp>
+      <p:sp>
+        <p:nvSpPr>
+          <p:cNvPr id="45" name="TextBox 44"/>
+          <p:cNvSpPr txBox="1"/>
+          <p:nvPr/>
+        </p:nvSpPr>
+        <p:spPr>
+          <a:xfrm>
+            <a:off x="8339328" y="5513832"/>
+            <a:ext cx="3072384" cy="640080"/>
+          </a:xfrm>
+          <a:prstGeom prst="rect">
+            <a:avLst/>
+          </a:prstGeom>
+          <a:noFill/>
+        </p:spPr>
+        <p:txBody>
+          <a:bodyPr wrap="square" lIns="0" rIns="0" tIns="0" bIns="0" anchor="t">
+            <a:spAutoFit/>
+          </a:bodyPr>
+          <a:lstStyle/>
+          <a:p>
+            <a:pPr algn="l">
+              <a:lnSpc>
+                <a:spcPct val="108000"/>
+              </a:lnSpc>
+              <a:spcAft>
+                <a:spcPts val="400"/>
+              </a:spcAft>
+            </a:pPr>
+            <a:r>
+              <a:rPr sz="1250" b="0" i="0">
+                <a:solidFill>
+                  <a:srgbClr val="475569"/>
+                </a:solidFill>
+                <a:latin typeface="Calibri"/>
+              </a:rPr>
+              <a:t>Doanh thu cộng đúng thợ, xuất CSV; Nhật ký ghi mọi thao tác</a:t>
+            </a:r>
+          </a:p>
+        </p:txBody>
+      </p:sp>
+      <p:sp>
+        <p:nvSpPr>
+          <p:cNvPr id="46" name="TextBox 45"/>
+          <p:cNvSpPr txBox="1"/>
+          <p:nvPr/>
+        </p:nvSpPr>
+        <p:spPr>
+          <a:xfrm>
+            <a:off x="548640" y="6446520"/>
+            <a:ext cx="7315200" cy="228600"/>
+          </a:xfrm>
+          <a:prstGeom prst="rect">
+            <a:avLst/>
+          </a:prstGeom>
+          <a:noFill/>
+        </p:spPr>
+        <p:txBody>
+          <a:bodyPr wrap="square" lIns="0" rIns="0" tIns="0" bIns="0" anchor="t">
+            <a:spAutoFit/>
+          </a:bodyPr>
+          <a:lstStyle/>
+          <a:p>
+            <a:pPr algn="l">
+              <a:lnSpc>
+                <a:spcPct val="108000"/>
+              </a:lnSpc>
+              <a:spcAft>
+                <a:spcPts val="400"/>
+              </a:spcAft>
+            </a:pPr>
+            <a:r>
+              <a:rPr sz="1000" b="0" i="0">
+                <a:solidFill>
+                  <a:srgbClr val="94A3B8"/>
+                </a:solidFill>
+                <a:latin typeface="Calibri"/>
+              </a:rPr>
+              <a:t>Nhóm 3 · TTCS_T926_K2S3_N3 · Hệ thống Đặt lịch và Quản lý Vận hành Salon - Spa</a:t>
+            </a:r>
+          </a:p>
+        </p:txBody>
+      </p:sp>
+      <p:sp>
+        <p:nvSpPr>
+          <p:cNvPr id="47" name="TextBox 46"/>
+          <p:cNvSpPr txBox="1"/>
+          <p:nvPr/>
+        </p:nvSpPr>
+        <p:spPr>
+          <a:xfrm>
+            <a:off x="10271455" y="6446520"/>
+            <a:ext cx="1371600" cy="228600"/>
+          </a:xfrm>
+          <a:prstGeom prst="rect">
+            <a:avLst/>
+          </a:prstGeom>
+          <a:noFill/>
+        </p:spPr>
+        <p:txBody>
+          <a:bodyPr wrap="square" lIns="0" rIns="0" tIns="0" bIns="0" anchor="t">
+            <a:spAutoFit/>
+          </a:bodyPr>
+          <a:lstStyle/>
+          <a:p>
+            <a:pPr algn="r">
+              <a:lnSpc>
+                <a:spcPct val="108000"/>
+              </a:lnSpc>
+              <a:spcAft>
+                <a:spcPts val="400"/>
+              </a:spcAft>
+            </a:pPr>
+            <a:r>
+              <a:rPr sz="1000" b="0" i="0">
+                <a:solidFill>
+                  <a:srgbClr val="94A3B8"/>
+                </a:solidFill>
+                <a:latin typeface="Calibri"/>
+              </a:rPr>
+              <a:t>14 / 13</a:t>
+            </a:r>
+          </a:p>
+        </p:txBody>
+      </p:sp>
+    </p:spTree>
+  </p:cSld>
+  <p:clrMapOvr>
+    <a:masterClrMapping/>
+  </p:clrMapOvr>
+</p:sld>
+</file>
+
+<file path=ppt/slides/slide15.xml><?xml version="1.0" encoding="utf-8"?>
 <p:sld xmlns:a="http://schemas.openxmlformats.org/drawingml/2006/main" xmlns:p="http://schemas.openxmlformats.org/presentationml/2006/main" xmlns:r="http://schemas.openxmlformats.org/officeDocument/2006/relationships">
   <p:cSld>
     <p:bg>

--- a/docs/presentations/Slide_Bao_Cao_He_Thong_Dat_Lich_Salon_Spa.pptx
+++ b/docs/presentations/Slide_Bao_Cao_He_Thong_Dat_Lich_Salon_Spa.pptx
@@ -16543,7 +16543,7 @@
                 </a:solidFill>
                 <a:latin typeface="Calibri"/>
               </a:rPr>
-              <a:t>1. Trình bày</a:t>
+              <a:t>1. Trình bày (Cloud/Local)</a:t>
             </a:r>
           </a:p>
         </p:txBody>
@@ -16585,7 +16585,7 @@
                 </a:solidFill>
                 <a:latin typeface="Calibri"/>
               </a:rPr>
-              <a:t>React 18 + Vite</a:t>
+              <a:t>React 18 + Vite (Cloudflare Pages CDN)</a:t>
             </a:r>
           </a:p>
         </p:txBody>
@@ -16627,7 +16627,7 @@
                 </a:solidFill>
                 <a:latin typeface="Calibri"/>
               </a:rPr>
-              <a:t>Trang công khai và quản lý; nhận SSE để làm mới dữ liệu</a:t>
+              <a:t>Trang công khai và quản lý; nhận SSE; triển khai đám mây toàn cầu https://huongsen-salon.pages.dev</a:t>
             </a:r>
           </a:p>
         </p:txBody>
@@ -16754,7 +16754,7 @@
                 </a:solidFill>
                 <a:latin typeface="Calibri"/>
               </a:rPr>
-              <a:t>NestJS 10 Controller, DTO, Guard</a:t>
+              <a:t>NestJS 10 (Render Cloud Service)</a:t>
             </a:r>
           </a:p>
         </p:txBody>
@@ -16796,7 +16796,7 @@
                 </a:solidFill>
                 <a:latin typeface="Calibri"/>
               </a:rPr>
-              <a:t>REST/JSON; xác thực JWT; kiểm tra dữ liệu và phân quyền</a:t>
+              <a:t>REST/JSON, JWT, CORS; triển khai backend 24/7 https://salon-spa-api-93d7.onrender.com</a:t>
             </a:r>
           </a:p>
         </p:txBody>
@@ -16881,7 +16881,7 @@
                 </a:solidFill>
                 <a:latin typeface="Calibri"/>
               </a:rPr>
-              <a:t>3. Nghiệp vụ</a:t>
+              <a:t>3. Nghiệp vụ &amp; Vận hành</a:t>
             </a:r>
           </a:p>
         </p:txBody>
@@ -16923,7 +16923,7 @@
                 </a:solidFill>
                 <a:latin typeface="Calibri"/>
               </a:rPr>
-              <a:t>NestJS Service</a:t>
+              <a:t>NestJS Service + Cloudflare Worker</a:t>
             </a:r>
           </a:p>
         </p:txBody>
@@ -16965,7 +16965,7 @@
                 </a:solidFill>
                 <a:latin typeface="Calibri"/>
               </a:rPr>
-              <a:t>Tính khung giờ, ngày nghỉ, vòng đời lịch, thanh toán; phát sự kiện sau commit</a:t>
+              <a:t>Tính khung giờ, ca làm, giữ chỗ; Worker cron 10 phút giữ thức API 24/7</a:t>
             </a:r>
           </a:p>
         </p:txBody>
@@ -17092,7 +17092,7 @@
                 </a:solidFill>
                 <a:latin typeface="Calibri"/>
               </a:rPr>
-              <a:t>TypeORM Repository + PostgreSQL</a:t>
+              <a:t>TypeORM + Supabase PostgreSQL 17</a:t>
             </a:r>
           </a:p>
         </p:txBody>
@@ -17134,7 +17134,7 @@
                 </a:solidFill>
                 <a:latin typeface="Calibri"/>
               </a:rPr>
-              <a:t>Migration có phiên bản; giao dịch SERIALIZABLE, FOR UPDATE, EXCLUDE</a:t>
+              <a:t>Migration 32 bảng, Session Pooler cổng 5432, sao lưu tự động pg_dump</a:t>
             </a:r>
           </a:p>
         </p:txBody>

--- a/docs/presentations/Slide_Bao_Cao_He_Thong_Dat_Lich_Salon_Spa.pptx
+++ b/docs/presentations/Slide_Bao_Cao_He_Thong_Dat_Lich_Salon_Spa.pptx
@@ -974,7 +974,7 @@
           <a:lstStyle/>
           <a:p>
             <a:r>
-              <a:t>Kiểm định 06/10/2026: 168 unit test, 95 E2E trong 13 bộ, 4 test Demo đạt. Build và lint sạch. 39 story / 165 point đối chiếu Excel gốc và BACKLOG-MAPPING; test tự động không thay thế biên bản nghiệm thu thủ công của PO.</a:t>
+              <a:t>Kiểm định 16/10/2026: 385 unit test, 155 E2E trong 13 bộ, 4 test Demo đạt. Build và lint sạch. 39 story / 165 point đối chiếu Excel gốc và BACKLOG-MAPPING; test tự động không thay thế biên bản nghiệm thu thủ công của PO.</a:t>
             </a:r>
           </a:p>
         </p:txBody>
@@ -10095,7 +10095,7 @@
                 </a:solidFill>
                 <a:latin typeface="Calibri"/>
               </a:rPr>
-              <a:t>168/168</a:t>
+              <a:t>385/385</a:t>
             </a:r>
           </a:p>
         </p:txBody>
@@ -10271,7 +10271,7 @@
                 </a:solidFill>
                 <a:latin typeface="Calibri"/>
               </a:rPr>
-              <a:t>95/95</a:t>
+              <a:t>155/155</a:t>
             </a:r>
           </a:p>
         </p:txBody>
@@ -10955,7 +10955,7 @@
                 </a:solidFill>
                 <a:latin typeface="Calibri"/>
               </a:rPr>
-              <a:t>Giao diện Fresha</a:t>
+              <a:t>Fresha Luxury</a:t>
             </a:r>
           </a:p>
         </p:txBody>
@@ -11042,7 +11042,7 @@
                 </a:solidFill>
                 <a:latin typeface="Calibri"/>
               </a:rPr>
-              <a:t>27/09</a:t>
+              <a:t>02/10</a:t>
             </a:r>
           </a:p>
         </p:txBody>
@@ -11084,7 +11084,7 @@
                 </a:solidFill>
                 <a:latin typeface="Calibri"/>
               </a:rPr>
-              <a:t>v1.2.0</a:t>
+              <a:t>v1.3.0</a:t>
             </a:r>
           </a:p>
         </p:txBody>
@@ -11126,7 +11126,7 @@
                 </a:solidFill>
                 <a:latin typeface="Calibri"/>
               </a:rPr>
-              <a:t>15 + 8 lỗi Sprint 1</a:t>
+              <a:t>23 lỗi QA</a:t>
             </a:r>
           </a:p>
         </p:txBody>
@@ -11213,7 +11213,7 @@
                 </a:solidFill>
                 <a:latin typeface="Calibri"/>
               </a:rPr>
-              <a:t>28/09</a:t>
+              <a:t>06/10</a:t>
             </a:r>
           </a:p>
         </p:txBody>
@@ -11255,7 +11255,7 @@
                 </a:solidFill>
                 <a:latin typeface="Calibri"/>
               </a:rPr>
-              <a:t>v1.2.5</a:t>
+              <a:t>v1.4.0</a:t>
             </a:r>
           </a:p>
         </p:txBody>
@@ -11297,7 +11297,7 @@
                 </a:solidFill>
                 <a:latin typeface="Calibri"/>
               </a:rPr>
-              <a:t>Supervisor</a:t>
+              <a:t>11 góp ý Mentor</a:t>
             </a:r>
           </a:p>
         </p:txBody>
@@ -11384,7 +11384,7 @@
                 </a:solidFill>
                 <a:latin typeface="Calibri"/>
               </a:rPr>
-              <a:t>02/10</a:t>
+              <a:t>11/10</a:t>
             </a:r>
           </a:p>
         </p:txBody>
@@ -11426,7 +11426,7 @@
                 </a:solidFill>
                 <a:latin typeface="Calibri"/>
               </a:rPr>
-              <a:t>v1.3.0</a:t>
+              <a:t>v2.0.0</a:t>
             </a:r>
           </a:p>
         </p:txBody>
@@ -11468,7 +11468,7 @@
                 </a:solidFill>
                 <a:latin typeface="Calibri"/>
               </a:rPr>
-              <a:t>23 lỗi QA Sprint 2</a:t>
+              <a:t>AI Local</a:t>
             </a:r>
           </a:p>
         </p:txBody>
@@ -11555,7 +11555,7 @@
                 </a:solidFill>
                 <a:latin typeface="Calibri"/>
               </a:rPr>
-              <a:t>05/10</a:t>
+              <a:t>15/10</a:t>
             </a:r>
           </a:p>
         </p:txBody>
@@ -11597,7 +11597,7 @@
                 </a:solidFill>
                 <a:latin typeface="Calibri"/>
               </a:rPr>
-              <a:t>v1.3.6</a:t>
+              <a:t>v2.2.1</a:t>
             </a:r>
           </a:p>
         </p:txBody>
@@ -11639,7 +11639,7 @@
                 </a:solidFill>
                 <a:latin typeface="Calibri"/>
               </a:rPr>
-              <a:t>Số liệu khách</a:t>
+              <a:t>Cloud 24/7</a:t>
             </a:r>
           </a:p>
         </p:txBody>
@@ -11726,7 +11726,7 @@
                 </a:solidFill>
                 <a:latin typeface="Calibri"/>
               </a:rPr>
-              <a:t>06/10</a:t>
+              <a:t>16/10</a:t>
             </a:r>
           </a:p>
         </p:txBody>
@@ -11768,7 +11768,7 @@
                 </a:solidFill>
                 <a:latin typeface="Calibri"/>
               </a:rPr>
-              <a:t>v1.4.0</a:t>
+              <a:t>v3.0.0</a:t>
             </a:r>
           </a:p>
         </p:txBody>
@@ -11810,7 +11810,7 @@
                 </a:solidFill>
                 <a:latin typeface="Calibri"/>
               </a:rPr>
-              <a:t>11 góp ý Mentor</a:t>
+              <a:t>Lotus Ivory $10k</a:t>
             </a:r>
           </a:p>
         </p:txBody>

--- a/docs/presentations/Slide_Bao_Cao_He_Thong_Dat_Lich_Salon_Spa.pptx
+++ b/docs/presentations/Slide_Bao_Cao_He_Thong_Dat_Lich_Salon_Spa.pptx
@@ -11768,7 +11768,7 @@
                 </a:solidFill>
                 <a:latin typeface="Calibri"/>
               </a:rPr>
-              <a:t>v3.0.0</a:t>
+              <a:t>v3.1.0</a:t>
             </a:r>
           </a:p>
         </p:txBody>
